--- a/presentation/MCCNNY_2026_FINAL.pptx
+++ b/presentation/MCCNNY_2026_FINAL.pptx
@@ -14,9 +14,12 @@
     <p:sldId id="262" r:id="rId8"/>
     <p:sldId id="263" r:id="rId9"/>
     <p:sldId id="264" r:id="rId10"/>
+    <p:sldId id="265" r:id="rId11"/>
+    <p:sldId id="266" r:id="rId12"/>
+    <p:sldId id="267" r:id="rId13"/>
   </p:sldIdLst>
   <p:notesMasterIdLst>
-    <p:notesMasterId r:id="rId11"/>
+    <p:notesMasterId r:id="rId14"/>
   </p:notesMasterIdLst>
   <p:sldSz cx="12192000" cy="6858000"/>
   <p:notesSz cx="6858000" cy="12192000"/>
@@ -510,7 +513,7 @@
           <a:p>
             <a:r>
               <a:rPr lang="en-US" dirty="0"/>
-              <a:t>[15s] Good morning. My talk uses data mining to find which acoustic features identify deepfakes even after audio compression.</a:t>
+              <a:t>[15s] Good morning. My talk: which acoustic features identify deepfakes after codec compression?</a:t>
             </a:r>
             <a:endParaRPr lang="en-US" dirty="0"/>
           </a:p>
@@ -534,6 +537,270 @@
             <a:fld id="{F7021451-1387-4CA6-816F-3879F97B5CBC}" type="slidenum">
               <a:rPr lang="en-US"/>
               <a:t>1</a:t>
+            </a:fld>
+            <a:endParaRPr lang="en-US"/>
+          </a:p>
+        </p:txBody>
+      </p:sp>
+    </p:spTree>
+    <p:extLst>
+      <p:ext uri="{BB962C8B-B14F-4D97-AF65-F5344CB8AC3E}">
+        <p14:creationId xmlns:p14="http://schemas.microsoft.com/office/powerpoint/2010/main" val="1024086991"/>
+      </p:ext>
+    </p:extLst>
+  </p:cSld>
+  <p:clrMapOvr>
+    <a:masterClrMapping/>
+  </p:clrMapOvr>
+</p:notes>
+</file>
+
+<file path=ppt/notesSlides/notesSlide10.xml><?xml version="1.0" encoding="utf-8"?>
+<p:notes xmlns:a="http://schemas.openxmlformats.org/drawingml/2006/main" xmlns:r="http://schemas.openxmlformats.org/officeDocument/2006/relationships" xmlns:p="http://schemas.openxmlformats.org/presentationml/2006/main">
+  <p:cSld>
+    <p:spTree>
+      <p:nvGrpSpPr>
+        <p:cNvPr id="1" name=""/>
+        <p:cNvGrpSpPr/>
+        <p:nvPr/>
+      </p:nvGrpSpPr>
+      <p:grpSpPr>
+        <a:xfrm>
+          <a:off x="0" y="0"/>
+          <a:ext cx="0" cy="0"/>
+          <a:chOff x="0" y="0"/>
+          <a:chExt cx="0" cy="0"/>
+        </a:xfrm>
+      </p:grpSpPr>
+      <p:sp>
+        <p:nvSpPr>
+          <p:cNvPr id="2" name="Slide Image Placeholder 1"/>
+          <p:cNvSpPr>
+            <a:spLocks noGrp="1" noRot="1" noChangeAspect="1"/>
+          </p:cNvSpPr>
+          <p:nvPr>
+            <p:ph type="sldImg"/>
+          </p:nvPr>
+        </p:nvSpPr>
+        <p:spPr/>
+      </p:sp>
+      <p:sp>
+        <p:nvSpPr>
+          <p:cNvPr id="3" name="Notes Placeholder 2"/>
+          <p:cNvSpPr>
+            <a:spLocks noGrp="1"/>
+          </p:cNvSpPr>
+          <p:nvPr>
+            <p:ph type="body" idx="1"/>
+          </p:nvPr>
+        </p:nvSpPr>
+        <p:spPr/>
+        <p:txBody>
+          <a:bodyPr/>
+          <a:lstStyle/>
+          <a:p>
+            <a:r>
+              <a:rPr lang="en-US" dirty="0"/>
+              <a:t>[30s] F1_bw alone: 18→24%. Formants+Prosody: 11→21%. All 36: 9→55% COLLAPSED. Best lab = worst deployed.</a:t>
+            </a:r>
+            <a:endParaRPr lang="en-US" dirty="0"/>
+          </a:p>
+        </p:txBody>
+      </p:sp>
+      <p:sp>
+        <p:nvSpPr>
+          <p:cNvPr id="4" name="Slide Number Placeholder 3"/>
+          <p:cNvSpPr>
+            <a:spLocks noGrp="1"/>
+          </p:cNvSpPr>
+          <p:nvPr>
+            <p:ph type="sldNum" sz="quarter" idx="10"/>
+          </p:nvPr>
+        </p:nvSpPr>
+        <p:spPr/>
+        <p:txBody>
+          <a:bodyPr/>
+          <a:lstStyle/>
+          <a:p>
+            <a:fld id="{F7021451-1387-4CA6-816F-3879F97B5CBC}" type="slidenum">
+              <a:rPr lang="en-US"/>
+              <a:t>10</a:t>
+            </a:fld>
+            <a:endParaRPr lang="en-US"/>
+          </a:p>
+        </p:txBody>
+      </p:sp>
+    </p:spTree>
+    <p:extLst>
+      <p:ext uri="{BB962C8B-B14F-4D97-AF65-F5344CB8AC3E}">
+        <p14:creationId xmlns:p14="http://schemas.microsoft.com/office/powerpoint/2010/main" val="1024086991"/>
+      </p:ext>
+    </p:extLst>
+  </p:cSld>
+  <p:clrMapOvr>
+    <a:masterClrMapping/>
+  </p:clrMapOvr>
+</p:notes>
+</file>
+
+<file path=ppt/notesSlides/notesSlide11.xml><?xml version="1.0" encoding="utf-8"?>
+<p:notes xmlns:a="http://schemas.openxmlformats.org/drawingml/2006/main" xmlns:r="http://schemas.openxmlformats.org/officeDocument/2006/relationships" xmlns:p="http://schemas.openxmlformats.org/presentationml/2006/main">
+  <p:cSld>
+    <p:spTree>
+      <p:nvGrpSpPr>
+        <p:cNvPr id="1" name=""/>
+        <p:cNvGrpSpPr/>
+        <p:nvPr/>
+      </p:nvGrpSpPr>
+      <p:grpSpPr>
+        <a:xfrm>
+          <a:off x="0" y="0"/>
+          <a:ext cx="0" cy="0"/>
+          <a:chOff x="0" y="0"/>
+          <a:chExt cx="0" cy="0"/>
+        </a:xfrm>
+      </p:grpSpPr>
+      <p:sp>
+        <p:nvSpPr>
+          <p:cNvPr id="2" name="Slide Image Placeholder 1"/>
+          <p:cNvSpPr>
+            <a:spLocks noGrp="1" noRot="1" noChangeAspect="1"/>
+          </p:cNvSpPr>
+          <p:nvPr>
+            <p:ph type="sldImg"/>
+          </p:nvPr>
+        </p:nvSpPr>
+        <p:spPr/>
+      </p:sp>
+      <p:sp>
+        <p:nvSpPr>
+          <p:cNvPr id="3" name="Notes Placeholder 2"/>
+          <p:cNvSpPr>
+            <a:spLocks noGrp="1"/>
+          </p:cNvSpPr>
+          <p:nvPr>
+            <p:ph type="body" idx="1"/>
+          </p:nvPr>
+        </p:nvSpPr>
+        <p:spPr/>
+        <p:txBody>
+          <a:bodyPr/>
+          <a:lstStyle/>
+          <a:p>
+            <a:r>
+              <a:rPr lang="en-US" dirty="0"/>
+              <a:t>[30s] ROC curves: SVM best (11.4%). Right chart: the collapse. 11→21% vs 9→55%. Not SOTA but explainable.</a:t>
+            </a:r>
+            <a:endParaRPr lang="en-US" dirty="0"/>
+          </a:p>
+        </p:txBody>
+      </p:sp>
+      <p:sp>
+        <p:nvSpPr>
+          <p:cNvPr id="4" name="Slide Number Placeholder 3"/>
+          <p:cNvSpPr>
+            <a:spLocks noGrp="1"/>
+          </p:cNvSpPr>
+          <p:nvPr>
+            <p:ph type="sldNum" sz="quarter" idx="10"/>
+          </p:nvPr>
+        </p:nvSpPr>
+        <p:spPr/>
+        <p:txBody>
+          <a:bodyPr/>
+          <a:lstStyle/>
+          <a:p>
+            <a:fld id="{F7021451-1387-4CA6-816F-3879F97B5CBC}" type="slidenum">
+              <a:rPr lang="en-US"/>
+              <a:t>11</a:t>
+            </a:fld>
+            <a:endParaRPr lang="en-US"/>
+          </a:p>
+        </p:txBody>
+      </p:sp>
+    </p:spTree>
+    <p:extLst>
+      <p:ext uri="{BB962C8B-B14F-4D97-AF65-F5344CB8AC3E}">
+        <p14:creationId xmlns:p14="http://schemas.microsoft.com/office/powerpoint/2010/main" val="1024086991"/>
+      </p:ext>
+    </p:extLst>
+  </p:cSld>
+  <p:clrMapOvr>
+    <a:masterClrMapping/>
+  </p:clrMapOvr>
+</p:notes>
+</file>
+
+<file path=ppt/notesSlides/notesSlide12.xml><?xml version="1.0" encoding="utf-8"?>
+<p:notes xmlns:a="http://schemas.openxmlformats.org/drawingml/2006/main" xmlns:r="http://schemas.openxmlformats.org/officeDocument/2006/relationships" xmlns:p="http://schemas.openxmlformats.org/presentationml/2006/main">
+  <p:cSld>
+    <p:spTree>
+      <p:nvGrpSpPr>
+        <p:cNvPr id="1" name=""/>
+        <p:cNvGrpSpPr/>
+        <p:nvPr/>
+      </p:nvGrpSpPr>
+      <p:grpSpPr>
+        <a:xfrm>
+          <a:off x="0" y="0"/>
+          <a:ext cx="0" cy="0"/>
+          <a:chOff x="0" y="0"/>
+          <a:chExt cx="0" cy="0"/>
+        </a:xfrm>
+      </p:grpSpPr>
+      <p:sp>
+        <p:nvSpPr>
+          <p:cNvPr id="2" name="Slide Image Placeholder 1"/>
+          <p:cNvSpPr>
+            <a:spLocks noGrp="1" noRot="1" noChangeAspect="1"/>
+          </p:cNvSpPr>
+          <p:nvPr>
+            <p:ph type="sldImg"/>
+          </p:nvPr>
+        </p:nvSpPr>
+        <p:spPr/>
+      </p:sp>
+      <p:sp>
+        <p:nvSpPr>
+          <p:cNvPr id="3" name="Notes Placeholder 2"/>
+          <p:cNvSpPr>
+            <a:spLocks noGrp="1"/>
+          </p:cNvSpPr>
+          <p:nvPr>
+            <p:ph type="body" idx="1"/>
+          </p:nvPr>
+        </p:nvSpPr>
+        <p:spPr/>
+        <p:txBody>
+          <a:bodyPr/>
+          <a:lstStyle/>
+          <a:p>
+            <a:r>
+              <a:rPr lang="en-US" dirty="0"/>
+              <a:t>[30s] 4 of 36. All F1. 515 vs 361 Hz. Survives codecs. Adding fragile features destroys it. Thank you.</a:t>
+            </a:r>
+            <a:endParaRPr lang="en-US" dirty="0"/>
+          </a:p>
+        </p:txBody>
+      </p:sp>
+      <p:sp>
+        <p:nvSpPr>
+          <p:cNvPr id="4" name="Slide Number Placeholder 3"/>
+          <p:cNvSpPr>
+            <a:spLocks noGrp="1"/>
+          </p:cNvSpPr>
+          <p:nvPr>
+            <p:ph type="sldNum" sz="quarter" idx="10"/>
+          </p:nvPr>
+        </p:nvSpPr>
+        <p:spPr/>
+        <p:txBody>
+          <a:bodyPr/>
+          <a:lstStyle/>
+          <a:p>
+            <a:fld id="{F7021451-1387-4CA6-816F-3879F97B5CBC}" type="slidenum">
+              <a:rPr lang="en-US"/>
+              <a:t>12</a:t>
             </a:fld>
             <a:endParaRPr lang="en-US"/>
           </a:p>
@@ -598,9 +865,7 @@
           <a:p>
             <a:r>
               <a:rPr lang="en-US" dirty="0"/>
-              <a:t>[40s] ASVspoof 2019: 25,380 files, 1:8.8 ratio. 36 features. Lab: 7% error. After codecs: 50%. Which features survive?
-IF ASKED 'codec?' → Compresses audio for transmission.
-IF ASKED '1:8.8?' → Challenge design. We use balanced weights.</a:t>
+              <a:t>[30s] 25,380 files. 1:8.8 ratio. 36 features. Lab: 7%. Codecs: 50%. Which features survive?</a:t>
             </a:r>
             <a:endParaRPr lang="en-US" dirty="0"/>
           </a:p>
@@ -688,8 +953,7 @@
           <a:p>
             <a:r>
               <a:rPr lang="en-US" dirty="0"/>
-              <a:t>[35s] Check distributions before testing. 33/36 near-normal. 3 skewed. Decision: Mann-Whitney for all (safe for normal AND non-normal).
-IF ASKED 'Why not t-test?' → Some features skewed. Mann-Whitney works on ranks, no assumptions.</a:t>
+              <a:t>[30s] 33/36 near-normal. 3 skewed. Decision: Mann-Whitney for all — works on both normal and non-normal.</a:t>
             </a:r>
             <a:endParaRPr lang="en-US" dirty="0"/>
           </a:p>
@@ -777,10 +1041,7 @@
           <a:p>
             <a:r>
               <a:rPr lang="en-US" dirty="0"/>
-              <a:t>[1 min] Mann-Whitney: 33/36 significant after BH-FDR. Cohen's d: only 4 LARGE (d &gt; 0.8). Green bars in chart = the 4 winners.
-IF ASKED 'Why Mann-Whitney?' → Non-parametric, safe for skewed data.
-IF ASKED 'BH-FDR?' → Controls false discovery rate at 5%.
-IF ASKED '33/36 just because large n?' → YES — that's why we need Cohen's d.</a:t>
+              <a:t>[30s] Mann-Whitney: 33/36 significant after correction. Cohen's d: only 4 LARGE. Green bars = the winners.</a:t>
             </a:r>
             <a:endParaRPr lang="en-US" dirty="0"/>
           </a:p>
@@ -868,9 +1129,7 @@
           <a:p>
             <a:r>
               <a:rPr lang="en-US" dirty="0"/>
-              <a:t>[1 min] Table: the 4 winners. Correlation: 0.91 (redundant). PCA: 1 comp = 79%. One signal.
-Kruskal-Wallis: all 4 differ across 6 attacks (H &gt; 10,000). Detects many fake types.
-IF ASKED 'If correlated, why 4?' → They emerged independently. Correlation IS the finding.</a:t>
+              <a:t>[30s] Table: the 4 winners with avg ± spread. All F1 formant. Kruskal-Wallis: differ across 6 attacks.</a:t>
             </a:r>
             <a:endParaRPr lang="en-US" dirty="0"/>
           </a:p>
@@ -958,10 +1217,7 @@
           <a:p>
             <a:r>
               <a:rPr lang="en-US" dirty="0"/>
-              <a:t>[50s] Physics: damping → wide resonances. Vocoders → sharp peaks. Codecs preserve formants for intelligibility.
-Paired test: MP3 5% of gap. G.711 79%.
-IF ASKED 'Is vocoder explanation proven?' → Damping = physics. Vocoders = our hypothesis.
-IF ASKED '79% acceptable?' → No. G.711 detection degrades.</a:t>
+              <a:t>[30s] F1_mean vs F1F2_ratio: r = 0.91. PCA: 1 component = 79%. They're one signal.</a:t>
             </a:r>
             <a:endParaRPr lang="en-US" dirty="0"/>
           </a:p>
@@ -1049,8 +1305,7 @@
           <a:p>
             <a:r>
               <a:rPr lang="en-US" dirty="0"/>
-              <a:t>[40s] Ablation: formants/prosody 21-29%. Anything with PNCC/LFCC → 42-55%.
-IF ASKED 'Why?' → SVM relies on fragile features. Codecs destroy them. Nothing left.</a:t>
+              <a:t>[30s] Real: physical tube, damping, wide resonances 515 Hz. Fake: neural net, no damping, narrow 361 Hz. Codecs preserve formants for intelligibility.</a:t>
             </a:r>
             <a:endParaRPr lang="en-US" dirty="0"/>
           </a:p>
@@ -1138,9 +1393,7 @@
           <a:p>
             <a:r>
               <a:rPr lang="en-US" dirty="0"/>
-              <a:t>[35s] Five classifiers. SVM best: 11% lab, 21% codecs. All degrade gracefully. All-36: 9→55% collapsed.
-IF ASKED 'Why 15 not 4?' → Weak features contribute via interactions.
-IF ASKED 'Why not deep learning?' → 1.9% vs 21%. We compete on explainability.</a:t>
+              <a:t>[30s] Paired test: same file before/after codec. MP3: 5% of 154 Hz gap. G.711: 79%. Formants survive streaming, marginal on telephone.</a:t>
             </a:r>
             <a:endParaRPr lang="en-US" dirty="0"/>
           </a:p>
@@ -1228,12 +1481,7 @@
           <a:p>
             <a:r>
               <a:rPr lang="en-US" dirty="0"/>
-              <a:t>[35s] 4 of 36 detect deepfakes after compression. All F1. Real: 515 Hz. Fake: 361 Hz. Survives MP3/AAC. Adding fragile features destroys detection.
-Thank you. Questions?
-Q&amp;As:
-'p-hacking?' → Effect sizes. Only 4 have d &gt; 0.8.
-'21% not good?' → Trade accuracy for explainability.
-'Selection bias?' → Evaluation on held-out sets.</a:t>
+              <a:t>[30s] Formants alone: 21-29%. Add PNCC/LFCC: 42-55%. PNCC+Formants = 50%. Formants alone = 29%.</a:t>
             </a:r>
             <a:endParaRPr lang="en-US" dirty="0"/>
           </a:p>
@@ -1753,9 +2001,6 @@
                 <a:solidFill>
                   <a:srgbClr val="FFFFFF"/>
                 </a:solidFill>
-                <a:latin typeface="Calibri" pitchFamily="34" charset="0"/>
-                <a:ea typeface="Calibri" pitchFamily="34" charset="-122"/>
-                <a:cs typeface="Calibri" pitchFamily="34" charset="-120"/>
               </a:rPr>
               <a:t>Presented By:</a:t>
             </a:r>
@@ -1770,9 +2015,6 @@
                 <a:solidFill>
                   <a:srgbClr val="FFFFFF"/>
                 </a:solidFill>
-                <a:latin typeface="Calibri" pitchFamily="34" charset="0"/>
-                <a:ea typeface="Calibri" pitchFamily="34" charset="-122"/>
-                <a:cs typeface="Calibri" pitchFamily="34" charset="-120"/>
               </a:rPr>
               <a:t>[Your Name], [Affiliation]</a:t>
             </a:r>
@@ -1809,13 +2051,2375 @@
                 <a:solidFill>
                   <a:srgbClr val="D4A017"/>
                 </a:solidFill>
-                <a:latin typeface="Calibri" pitchFamily="34" charset="0"/>
-                <a:ea typeface="Calibri" pitchFamily="34" charset="-122"/>
-                <a:cs typeface="Calibri" pitchFamily="34" charset="-120"/>
               </a:rPr>
               <a:t>MCCNNY 2026</a:t>
             </a:r>
             <a:endParaRPr lang="en-US" sz="1400" dirty="0"/>
+          </a:p>
+        </p:txBody>
+      </p:sp>
+    </p:spTree>
+  </p:cSld>
+  <p:clrMapOvr>
+    <a:masterClrMapping/>
+  </p:clrMapOvr>
+</p:sld>
+</file>
+
+<file path=ppt/slides/slide10.xml><?xml version="1.0" encoding="utf-8"?>
+<p:sld xmlns:a="http://schemas.openxmlformats.org/drawingml/2006/main" xmlns:r="http://schemas.openxmlformats.org/officeDocument/2006/relationships" xmlns:p="http://schemas.openxmlformats.org/presentationml/2006/main">
+  <p:cSld name="Slide 10">
+    <p:spTree>
+      <p:nvGrpSpPr>
+        <p:cNvPr id="1" name=""/>
+        <p:cNvGrpSpPr/>
+        <p:nvPr/>
+      </p:nvGrpSpPr>
+      <p:grpSpPr>
+        <a:xfrm>
+          <a:off x="0" y="0"/>
+          <a:ext cx="0" cy="0"/>
+          <a:chOff x="0" y="0"/>
+          <a:chExt cx="0" cy="0"/>
+        </a:xfrm>
+      </p:grpSpPr>
+      <p:sp>
+        <p:nvSpPr>
+          <p:cNvPr id="2" name="Text 0"/>
+          <p:cNvSpPr/>
+          <p:nvPr/>
+        </p:nvSpPr>
+        <p:spPr>
+          <a:xfrm>
+            <a:off x="457200" y="137160"/>
+            <a:ext cx="1097280" cy="274320"/>
+          </a:xfrm>
+          <a:prstGeom prst="rect">
+            <a:avLst/>
+          </a:prstGeom>
+          <a:noFill/>
+          <a:ln/>
+        </p:spPr>
+        <p:txBody>
+          <a:bodyPr wrap="square" rtlCol="0" anchor="ctr"/>
+          <a:lstStyle/>
+          <a:p>
+            <a:pPr indent="0" marL="0">
+              <a:buNone/>
+            </a:pPr>
+            <a:r>
+              <a:rPr lang="en-US" sz="1100" b="1" dirty="0">
+                <a:solidFill>
+                  <a:srgbClr val="1B5E3B"/>
+                </a:solidFill>
+              </a:rPr>
+              <a:t>STEP 6</a:t>
+            </a:r>
+            <a:endParaRPr lang="en-US" sz="1100" dirty="0"/>
+          </a:p>
+        </p:txBody>
+      </p:sp>
+      <p:sp>
+        <p:nvSpPr>
+          <p:cNvPr id="3" name="Text 1"/>
+          <p:cNvSpPr/>
+          <p:nvPr/>
+        </p:nvSpPr>
+        <p:spPr>
+          <a:xfrm>
+            <a:off x="457200" y="365760"/>
+            <a:ext cx="10972800" cy="548640"/>
+          </a:xfrm>
+          <a:prstGeom prst="rect">
+            <a:avLst/>
+          </a:prstGeom>
+          <a:noFill/>
+          <a:ln/>
+        </p:spPr>
+        <p:txBody>
+          <a:bodyPr wrap="square" rtlCol="0" anchor="ctr"/>
+          <a:lstStyle/>
+          <a:p>
+            <a:pPr indent="0" marL="0">
+              <a:buNone/>
+            </a:pPr>
+            <a:r>
+              <a:rPr lang="en-US" sz="2800" b="1" dirty="0">
+                <a:solidFill>
+                  <a:srgbClr val="1B5E3B"/>
+                </a:solidFill>
+                <a:latin typeface="Georgia" pitchFamily="34" charset="0"/>
+                <a:ea typeface="Georgia" pitchFamily="34" charset="-122"/>
+                <a:cs typeface="Georgia" pitchFamily="34" charset="-120"/>
+              </a:rPr>
+              <a:t>Classifiers: Which Feature Set Works Best?</a:t>
+            </a:r>
+            <a:endParaRPr lang="en-US" sz="2800" dirty="0"/>
+          </a:p>
+        </p:txBody>
+      </p:sp>
+      <p:graphicFrame>
+        <p:nvGraphicFramePr>
+          <p:cNvPr id="11" name="Table 0"/>
+          <p:cNvGraphicFramePr>
+            <a:graphicFrameLocks noGrp="1"/>
+          </p:cNvGraphicFramePr>
+          <p:nvPr>
+            <p:extLst>
+              <p:ext uri="{D42A27DB-BD31-4B8C-83A1-F6EECF244321}">
+                <p14:modId xmlns:p14="http://schemas.microsoft.com/office/powerpoint/2010/main" val="1579011935"/>
+              </p:ext>
+            </p:extLst>
+          </p:nvPr>
+        </p:nvGraphicFramePr>
+        <p:xfrm>
+          <a:off x="914400" y="1188720"/>
+          <a:ext cx="10058400" cy="914400"/>
+        </p:xfrm>
+        <a:graphic>
+          <a:graphicData uri="http://schemas.openxmlformats.org/drawingml/2006/table">
+            <a:tbl>
+              <a:tblPr/>
+              <a:tblGrid>
+                <a:gridCol w="2743200"/>
+                <a:gridCol w="1371600"/>
+                <a:gridCol w="1828800"/>
+                <a:gridCol w="1828800"/>
+                <a:gridCol w="1371600"/>
+              </a:tblGrid>
+              <a:tr h="502920">
+                <a:tc>
+                  <a:txBody>
+                    <a:bodyPr/>
+                    <a:lstStyle/>
+                    <a:p>
+                      <a:pPr algn="ctr" indent="0" marL="0">
+                        <a:buNone/>
+                      </a:pPr>
+                      <a:r>
+                        <a:rPr lang="en-US" sz="1600" b="1" dirty="0">
+                          <a:solidFill>
+                            <a:srgbClr val="FFFFFF"/>
+                          </a:solidFill>
+                        </a:rPr>
+                        <a:t>Feature Set</a:t>
+                      </a:r>
+                      <a:endParaRPr lang="en-US" sz="1600" dirty="0"/>
+                    </a:p>
+                  </a:txBody>
+                  <a:tcPr marL="91440" marR="91440" marT="45720" marB="45720">
+                    <a:lnL w="6350" cap="flat" cmpd="sng" algn="ctr">
+                      <a:solidFill>
+                        <a:srgbClr val="DDDDDD"/>
+                      </a:solidFill>
+                      <a:prstDash val="solid"/>
+                      <a:round/>
+                      <a:headEnd type="none" w="med" len="med"/>
+                      <a:tailEnd type="none" w="med" len="med"/>
+                    </a:lnL>
+                    <a:lnR w="6350" cap="flat" cmpd="sng" algn="ctr">
+                      <a:solidFill>
+                        <a:srgbClr val="DDDDDD"/>
+                      </a:solidFill>
+                      <a:prstDash val="solid"/>
+                      <a:round/>
+                      <a:headEnd type="none" w="med" len="med"/>
+                      <a:tailEnd type="none" w="med" len="med"/>
+                    </a:lnR>
+                    <a:lnT w="6350" cap="flat" cmpd="sng" algn="ctr">
+                      <a:solidFill>
+                        <a:srgbClr val="DDDDDD"/>
+                      </a:solidFill>
+                      <a:prstDash val="solid"/>
+                      <a:round/>
+                      <a:headEnd type="none" w="med" len="med"/>
+                      <a:tailEnd type="none" w="med" len="med"/>
+                    </a:lnT>
+                    <a:lnB w="6350" cap="flat" cmpd="sng" algn="ctr">
+                      <a:solidFill>
+                        <a:srgbClr val="DDDDDD"/>
+                      </a:solidFill>
+                      <a:prstDash val="solid"/>
+                      <a:round/>
+                      <a:headEnd type="none" w="med" len="med"/>
+                      <a:tailEnd type="none" w="med" len="med"/>
+                    </a:lnB>
+                    <a:solidFill>
+                      <a:srgbClr val="1B5E3B"/>
+                    </a:solidFill>
+                  </a:tcPr>
+                </a:tc>
+                <a:tc>
+                  <a:txBody>
+                    <a:bodyPr/>
+                    <a:lstStyle/>
+                    <a:p>
+                      <a:pPr algn="ctr" indent="0" marL="0">
+                        <a:buNone/>
+                      </a:pPr>
+                      <a:r>
+                        <a:rPr lang="en-US" sz="1600" b="1" dirty="0">
+                          <a:solidFill>
+                            <a:srgbClr val="FFFFFF"/>
+                          </a:solidFill>
+                        </a:rPr>
+                        <a:t># Features</a:t>
+                      </a:r>
+                      <a:endParaRPr lang="en-US" sz="1600" dirty="0"/>
+                    </a:p>
+                  </a:txBody>
+                  <a:tcPr marL="91440" marR="91440" marT="45720" marB="45720">
+                    <a:lnL w="6350" cap="flat" cmpd="sng" algn="ctr">
+                      <a:solidFill>
+                        <a:srgbClr val="DDDDDD"/>
+                      </a:solidFill>
+                      <a:prstDash val="solid"/>
+                      <a:round/>
+                      <a:headEnd type="none" w="med" len="med"/>
+                      <a:tailEnd type="none" w="med" len="med"/>
+                    </a:lnL>
+                    <a:lnR w="6350" cap="flat" cmpd="sng" algn="ctr">
+                      <a:solidFill>
+                        <a:srgbClr val="DDDDDD"/>
+                      </a:solidFill>
+                      <a:prstDash val="solid"/>
+                      <a:round/>
+                      <a:headEnd type="none" w="med" len="med"/>
+                      <a:tailEnd type="none" w="med" len="med"/>
+                    </a:lnR>
+                    <a:lnT w="6350" cap="flat" cmpd="sng" algn="ctr">
+                      <a:solidFill>
+                        <a:srgbClr val="DDDDDD"/>
+                      </a:solidFill>
+                      <a:prstDash val="solid"/>
+                      <a:round/>
+                      <a:headEnd type="none" w="med" len="med"/>
+                      <a:tailEnd type="none" w="med" len="med"/>
+                    </a:lnT>
+                    <a:lnB w="6350" cap="flat" cmpd="sng" algn="ctr">
+                      <a:solidFill>
+                        <a:srgbClr val="DDDDDD"/>
+                      </a:solidFill>
+                      <a:prstDash val="solid"/>
+                      <a:round/>
+                      <a:headEnd type="none" w="med" len="med"/>
+                      <a:tailEnd type="none" w="med" len="med"/>
+                    </a:lnB>
+                    <a:solidFill>
+                      <a:srgbClr val="1B5E3B"/>
+                    </a:solidFill>
+                  </a:tcPr>
+                </a:tc>
+                <a:tc>
+                  <a:txBody>
+                    <a:bodyPr/>
+                    <a:lstStyle/>
+                    <a:p>
+                      <a:pPr algn="ctr" indent="0" marL="0">
+                        <a:buNone/>
+                      </a:pPr>
+                      <a:r>
+                        <a:rPr lang="en-US" sz="1600" b="1" dirty="0">
+                          <a:solidFill>
+                            <a:srgbClr val="FFFFFF"/>
+                          </a:solidFill>
+                        </a:rPr>
+                        <a:t>Lab Error</a:t>
+                      </a:r>
+                      <a:endParaRPr lang="en-US" sz="1600" dirty="0"/>
+                    </a:p>
+                  </a:txBody>
+                  <a:tcPr marL="91440" marR="91440" marT="45720" marB="45720">
+                    <a:lnL w="6350" cap="flat" cmpd="sng" algn="ctr">
+                      <a:solidFill>
+                        <a:srgbClr val="DDDDDD"/>
+                      </a:solidFill>
+                      <a:prstDash val="solid"/>
+                      <a:round/>
+                      <a:headEnd type="none" w="med" len="med"/>
+                      <a:tailEnd type="none" w="med" len="med"/>
+                    </a:lnL>
+                    <a:lnR w="6350" cap="flat" cmpd="sng" algn="ctr">
+                      <a:solidFill>
+                        <a:srgbClr val="DDDDDD"/>
+                      </a:solidFill>
+                      <a:prstDash val="solid"/>
+                      <a:round/>
+                      <a:headEnd type="none" w="med" len="med"/>
+                      <a:tailEnd type="none" w="med" len="med"/>
+                    </a:lnR>
+                    <a:lnT w="6350" cap="flat" cmpd="sng" algn="ctr">
+                      <a:solidFill>
+                        <a:srgbClr val="DDDDDD"/>
+                      </a:solidFill>
+                      <a:prstDash val="solid"/>
+                      <a:round/>
+                      <a:headEnd type="none" w="med" len="med"/>
+                      <a:tailEnd type="none" w="med" len="med"/>
+                    </a:lnT>
+                    <a:lnB w="6350" cap="flat" cmpd="sng" algn="ctr">
+                      <a:solidFill>
+                        <a:srgbClr val="DDDDDD"/>
+                      </a:solidFill>
+                      <a:prstDash val="solid"/>
+                      <a:round/>
+                      <a:headEnd type="none" w="med" len="med"/>
+                      <a:tailEnd type="none" w="med" len="med"/>
+                    </a:lnB>
+                    <a:solidFill>
+                      <a:srgbClr val="1B5E3B"/>
+                    </a:solidFill>
+                  </a:tcPr>
+                </a:tc>
+                <a:tc>
+                  <a:txBody>
+                    <a:bodyPr/>
+                    <a:lstStyle/>
+                    <a:p>
+                      <a:pPr algn="ctr" indent="0" marL="0">
+                        <a:buNone/>
+                      </a:pPr>
+                      <a:r>
+                        <a:rPr lang="en-US" sz="1600" b="1" dirty="0">
+                          <a:solidFill>
+                            <a:srgbClr val="FFFFFF"/>
+                          </a:solidFill>
+                        </a:rPr>
+                        <a:t>After Codecs</a:t>
+                      </a:r>
+                      <a:endParaRPr lang="en-US" sz="1600" dirty="0"/>
+                    </a:p>
+                  </a:txBody>
+                  <a:tcPr marL="91440" marR="91440" marT="45720" marB="45720">
+                    <a:lnL w="6350" cap="flat" cmpd="sng" algn="ctr">
+                      <a:solidFill>
+                        <a:srgbClr val="DDDDDD"/>
+                      </a:solidFill>
+                      <a:prstDash val="solid"/>
+                      <a:round/>
+                      <a:headEnd type="none" w="med" len="med"/>
+                      <a:tailEnd type="none" w="med" len="med"/>
+                    </a:lnL>
+                    <a:lnR w="6350" cap="flat" cmpd="sng" algn="ctr">
+                      <a:solidFill>
+                        <a:srgbClr val="DDDDDD"/>
+                      </a:solidFill>
+                      <a:prstDash val="solid"/>
+                      <a:round/>
+                      <a:headEnd type="none" w="med" len="med"/>
+                      <a:tailEnd type="none" w="med" len="med"/>
+                    </a:lnR>
+                    <a:lnT w="6350" cap="flat" cmpd="sng" algn="ctr">
+                      <a:solidFill>
+                        <a:srgbClr val="DDDDDD"/>
+                      </a:solidFill>
+                      <a:prstDash val="solid"/>
+                      <a:round/>
+                      <a:headEnd type="none" w="med" len="med"/>
+                      <a:tailEnd type="none" w="med" len="med"/>
+                    </a:lnT>
+                    <a:lnB w="6350" cap="flat" cmpd="sng" algn="ctr">
+                      <a:solidFill>
+                        <a:srgbClr val="DDDDDD"/>
+                      </a:solidFill>
+                      <a:prstDash val="solid"/>
+                      <a:round/>
+                      <a:headEnd type="none" w="med" len="med"/>
+                      <a:tailEnd type="none" w="med" len="med"/>
+                    </a:lnB>
+                    <a:solidFill>
+                      <a:srgbClr val="1B5E3B"/>
+                    </a:solidFill>
+                  </a:tcPr>
+                </a:tc>
+                <a:tc>
+                  <a:txBody>
+                    <a:bodyPr/>
+                    <a:lstStyle/>
+                    <a:p>
+                      <a:pPr algn="ctr" indent="0" marL="0">
+                        <a:buNone/>
+                      </a:pPr>
+                      <a:r>
+                        <a:rPr lang="en-US" sz="1600" b="1" dirty="0">
+                          <a:solidFill>
+                            <a:srgbClr val="FFFFFF"/>
+                          </a:solidFill>
+                        </a:rPr>
+                        <a:t>Collapse?</a:t>
+                      </a:r>
+                      <a:endParaRPr lang="en-US" sz="1600" dirty="0"/>
+                    </a:p>
+                  </a:txBody>
+                  <a:tcPr marL="91440" marR="91440" marT="45720" marB="45720">
+                    <a:lnL w="6350" cap="flat" cmpd="sng" algn="ctr">
+                      <a:solidFill>
+                        <a:srgbClr val="DDDDDD"/>
+                      </a:solidFill>
+                      <a:prstDash val="solid"/>
+                      <a:round/>
+                      <a:headEnd type="none" w="med" len="med"/>
+                      <a:tailEnd type="none" w="med" len="med"/>
+                    </a:lnL>
+                    <a:lnR w="6350" cap="flat" cmpd="sng" algn="ctr">
+                      <a:solidFill>
+                        <a:srgbClr val="DDDDDD"/>
+                      </a:solidFill>
+                      <a:prstDash val="solid"/>
+                      <a:round/>
+                      <a:headEnd type="none" w="med" len="med"/>
+                      <a:tailEnd type="none" w="med" len="med"/>
+                    </a:lnR>
+                    <a:lnT w="6350" cap="flat" cmpd="sng" algn="ctr">
+                      <a:solidFill>
+                        <a:srgbClr val="DDDDDD"/>
+                      </a:solidFill>
+                      <a:prstDash val="solid"/>
+                      <a:round/>
+                      <a:headEnd type="none" w="med" len="med"/>
+                      <a:tailEnd type="none" w="med" len="med"/>
+                    </a:lnT>
+                    <a:lnB w="6350" cap="flat" cmpd="sng" algn="ctr">
+                      <a:solidFill>
+                        <a:srgbClr val="DDDDDD"/>
+                      </a:solidFill>
+                      <a:prstDash val="solid"/>
+                      <a:round/>
+                      <a:headEnd type="none" w="med" len="med"/>
+                      <a:tailEnd type="none" w="med" len="med"/>
+                    </a:lnB>
+                    <a:solidFill>
+                      <a:srgbClr val="1B5E3B"/>
+                    </a:solidFill>
+                  </a:tcPr>
+                </a:tc>
+              </a:tr>
+              <a:tr h="502920">
+                <a:tc>
+                  <a:txBody>
+                    <a:bodyPr/>
+                    <a:lstStyle/>
+                    <a:p>
+                      <a:pPr algn="ctr" indent="0" marL="0">
+                        <a:buNone/>
+                      </a:pPr>
+                      <a:r>
+                        <a:rPr lang="en-US" sz="1600" dirty="0">
+                          <a:solidFill>
+                            <a:srgbClr val="000000"/>
+                          </a:solidFill>
+                        </a:rPr>
+                        <a:t>F1_bw alone</a:t>
+                      </a:r>
+                      <a:endParaRPr lang="en-US" sz="1600" dirty="0"/>
+                    </a:p>
+                  </a:txBody>
+                  <a:tcPr marL="91440" marR="91440" marT="45720" marB="45720">
+                    <a:lnL w="6350" cap="flat" cmpd="sng" algn="ctr">
+                      <a:solidFill>
+                        <a:srgbClr val="DDDDDD"/>
+                      </a:solidFill>
+                      <a:prstDash val="solid"/>
+                      <a:round/>
+                      <a:headEnd type="none" w="med" len="med"/>
+                      <a:tailEnd type="none" w="med" len="med"/>
+                    </a:lnL>
+                    <a:lnR w="6350" cap="flat" cmpd="sng" algn="ctr">
+                      <a:solidFill>
+                        <a:srgbClr val="DDDDDD"/>
+                      </a:solidFill>
+                      <a:prstDash val="solid"/>
+                      <a:round/>
+                      <a:headEnd type="none" w="med" len="med"/>
+                      <a:tailEnd type="none" w="med" len="med"/>
+                    </a:lnR>
+                    <a:lnT w="6350" cap="flat" cmpd="sng" algn="ctr">
+                      <a:solidFill>
+                        <a:srgbClr val="DDDDDD"/>
+                      </a:solidFill>
+                      <a:prstDash val="solid"/>
+                      <a:round/>
+                      <a:headEnd type="none" w="med" len="med"/>
+                      <a:tailEnd type="none" w="med" len="med"/>
+                    </a:lnT>
+                    <a:lnB w="6350" cap="flat" cmpd="sng" algn="ctr">
+                      <a:solidFill>
+                        <a:srgbClr val="DDDDDD"/>
+                      </a:solidFill>
+                      <a:prstDash val="solid"/>
+                      <a:round/>
+                      <a:headEnd type="none" w="med" len="med"/>
+                      <a:tailEnd type="none" w="med" len="med"/>
+                    </a:lnB>
+                  </a:tcPr>
+                </a:tc>
+                <a:tc>
+                  <a:txBody>
+                    <a:bodyPr/>
+                    <a:lstStyle/>
+                    <a:p>
+                      <a:pPr algn="ctr" indent="0" marL="0">
+                        <a:buNone/>
+                      </a:pPr>
+                      <a:r>
+                        <a:rPr lang="en-US" sz="1600" dirty="0">
+                          <a:solidFill>
+                            <a:srgbClr val="000000"/>
+                          </a:solidFill>
+                        </a:rPr>
+                        <a:t>1</a:t>
+                      </a:r>
+                      <a:endParaRPr lang="en-US" sz="1600" dirty="0"/>
+                    </a:p>
+                  </a:txBody>
+                  <a:tcPr marL="91440" marR="91440" marT="45720" marB="45720">
+                    <a:lnL w="6350" cap="flat" cmpd="sng" algn="ctr">
+                      <a:solidFill>
+                        <a:srgbClr val="DDDDDD"/>
+                      </a:solidFill>
+                      <a:prstDash val="solid"/>
+                      <a:round/>
+                      <a:headEnd type="none" w="med" len="med"/>
+                      <a:tailEnd type="none" w="med" len="med"/>
+                    </a:lnL>
+                    <a:lnR w="6350" cap="flat" cmpd="sng" algn="ctr">
+                      <a:solidFill>
+                        <a:srgbClr val="DDDDDD"/>
+                      </a:solidFill>
+                      <a:prstDash val="solid"/>
+                      <a:round/>
+                      <a:headEnd type="none" w="med" len="med"/>
+                      <a:tailEnd type="none" w="med" len="med"/>
+                    </a:lnR>
+                    <a:lnT w="6350" cap="flat" cmpd="sng" algn="ctr">
+                      <a:solidFill>
+                        <a:srgbClr val="DDDDDD"/>
+                      </a:solidFill>
+                      <a:prstDash val="solid"/>
+                      <a:round/>
+                      <a:headEnd type="none" w="med" len="med"/>
+                      <a:tailEnd type="none" w="med" len="med"/>
+                    </a:lnT>
+                    <a:lnB w="6350" cap="flat" cmpd="sng" algn="ctr">
+                      <a:solidFill>
+                        <a:srgbClr val="DDDDDD"/>
+                      </a:solidFill>
+                      <a:prstDash val="solid"/>
+                      <a:round/>
+                      <a:headEnd type="none" w="med" len="med"/>
+                      <a:tailEnd type="none" w="med" len="med"/>
+                    </a:lnB>
+                  </a:tcPr>
+                </a:tc>
+                <a:tc>
+                  <a:txBody>
+                    <a:bodyPr/>
+                    <a:lstStyle/>
+                    <a:p>
+                      <a:pPr algn="ctr" indent="0" marL="0">
+                        <a:buNone/>
+                      </a:pPr>
+                      <a:r>
+                        <a:rPr lang="en-US" sz="1600" dirty="0">
+                          <a:solidFill>
+                            <a:srgbClr val="000000"/>
+                          </a:solidFill>
+                        </a:rPr>
+                        <a:t>18.0%</a:t>
+                      </a:r>
+                      <a:endParaRPr lang="en-US" sz="1600" dirty="0"/>
+                    </a:p>
+                  </a:txBody>
+                  <a:tcPr marL="91440" marR="91440" marT="45720" marB="45720">
+                    <a:lnL w="6350" cap="flat" cmpd="sng" algn="ctr">
+                      <a:solidFill>
+                        <a:srgbClr val="DDDDDD"/>
+                      </a:solidFill>
+                      <a:prstDash val="solid"/>
+                      <a:round/>
+                      <a:headEnd type="none" w="med" len="med"/>
+                      <a:tailEnd type="none" w="med" len="med"/>
+                    </a:lnL>
+                    <a:lnR w="6350" cap="flat" cmpd="sng" algn="ctr">
+                      <a:solidFill>
+                        <a:srgbClr val="DDDDDD"/>
+                      </a:solidFill>
+                      <a:prstDash val="solid"/>
+                      <a:round/>
+                      <a:headEnd type="none" w="med" len="med"/>
+                      <a:tailEnd type="none" w="med" len="med"/>
+                    </a:lnR>
+                    <a:lnT w="6350" cap="flat" cmpd="sng" algn="ctr">
+                      <a:solidFill>
+                        <a:srgbClr val="DDDDDD"/>
+                      </a:solidFill>
+                      <a:prstDash val="solid"/>
+                      <a:round/>
+                      <a:headEnd type="none" w="med" len="med"/>
+                      <a:tailEnd type="none" w="med" len="med"/>
+                    </a:lnT>
+                    <a:lnB w="6350" cap="flat" cmpd="sng" algn="ctr">
+                      <a:solidFill>
+                        <a:srgbClr val="DDDDDD"/>
+                      </a:solidFill>
+                      <a:prstDash val="solid"/>
+                      <a:round/>
+                      <a:headEnd type="none" w="med" len="med"/>
+                      <a:tailEnd type="none" w="med" len="med"/>
+                    </a:lnB>
+                  </a:tcPr>
+                </a:tc>
+                <a:tc>
+                  <a:txBody>
+                    <a:bodyPr/>
+                    <a:lstStyle/>
+                    <a:p>
+                      <a:pPr algn="ctr" indent="0" marL="0">
+                        <a:buNone/>
+                      </a:pPr>
+                      <a:r>
+                        <a:rPr lang="en-US" sz="1600" dirty="0">
+                          <a:solidFill>
+                            <a:srgbClr val="000000"/>
+                          </a:solidFill>
+                        </a:rPr>
+                        <a:t>24.3%</a:t>
+                      </a:r>
+                      <a:endParaRPr lang="en-US" sz="1600" dirty="0"/>
+                    </a:p>
+                  </a:txBody>
+                  <a:tcPr marL="91440" marR="91440" marT="45720" marB="45720">
+                    <a:lnL w="6350" cap="flat" cmpd="sng" algn="ctr">
+                      <a:solidFill>
+                        <a:srgbClr val="DDDDDD"/>
+                      </a:solidFill>
+                      <a:prstDash val="solid"/>
+                      <a:round/>
+                      <a:headEnd type="none" w="med" len="med"/>
+                      <a:tailEnd type="none" w="med" len="med"/>
+                    </a:lnL>
+                    <a:lnR w="6350" cap="flat" cmpd="sng" algn="ctr">
+                      <a:solidFill>
+                        <a:srgbClr val="DDDDDD"/>
+                      </a:solidFill>
+                      <a:prstDash val="solid"/>
+                      <a:round/>
+                      <a:headEnd type="none" w="med" len="med"/>
+                      <a:tailEnd type="none" w="med" len="med"/>
+                    </a:lnR>
+                    <a:lnT w="6350" cap="flat" cmpd="sng" algn="ctr">
+                      <a:solidFill>
+                        <a:srgbClr val="DDDDDD"/>
+                      </a:solidFill>
+                      <a:prstDash val="solid"/>
+                      <a:round/>
+                      <a:headEnd type="none" w="med" len="med"/>
+                      <a:tailEnd type="none" w="med" len="med"/>
+                    </a:lnT>
+                    <a:lnB w="6350" cap="flat" cmpd="sng" algn="ctr">
+                      <a:solidFill>
+                        <a:srgbClr val="DDDDDD"/>
+                      </a:solidFill>
+                      <a:prstDash val="solid"/>
+                      <a:round/>
+                      <a:headEnd type="none" w="med" len="med"/>
+                      <a:tailEnd type="none" w="med" len="med"/>
+                    </a:lnB>
+                  </a:tcPr>
+                </a:tc>
+                <a:tc>
+                  <a:txBody>
+                    <a:bodyPr/>
+                    <a:lstStyle/>
+                    <a:p>
+                      <a:pPr algn="ctr" indent="0" marL="0">
+                        <a:buNone/>
+                      </a:pPr>
+                      <a:r>
+                        <a:rPr lang="en-US" sz="1600" dirty="0">
+                          <a:solidFill>
+                            <a:srgbClr val="000000"/>
+                          </a:solidFill>
+                        </a:rPr>
+                        <a:t>No</a:t>
+                      </a:r>
+                      <a:endParaRPr lang="en-US" sz="1600" dirty="0"/>
+                    </a:p>
+                  </a:txBody>
+                  <a:tcPr marL="91440" marR="91440" marT="45720" marB="45720">
+                    <a:lnL w="6350" cap="flat" cmpd="sng" algn="ctr">
+                      <a:solidFill>
+                        <a:srgbClr val="DDDDDD"/>
+                      </a:solidFill>
+                      <a:prstDash val="solid"/>
+                      <a:round/>
+                      <a:headEnd type="none" w="med" len="med"/>
+                      <a:tailEnd type="none" w="med" len="med"/>
+                    </a:lnL>
+                    <a:lnR w="6350" cap="flat" cmpd="sng" algn="ctr">
+                      <a:solidFill>
+                        <a:srgbClr val="DDDDDD"/>
+                      </a:solidFill>
+                      <a:prstDash val="solid"/>
+                      <a:round/>
+                      <a:headEnd type="none" w="med" len="med"/>
+                      <a:tailEnd type="none" w="med" len="med"/>
+                    </a:lnR>
+                    <a:lnT w="6350" cap="flat" cmpd="sng" algn="ctr">
+                      <a:solidFill>
+                        <a:srgbClr val="DDDDDD"/>
+                      </a:solidFill>
+                      <a:prstDash val="solid"/>
+                      <a:round/>
+                      <a:headEnd type="none" w="med" len="med"/>
+                      <a:tailEnd type="none" w="med" len="med"/>
+                    </a:lnT>
+                    <a:lnB w="6350" cap="flat" cmpd="sng" algn="ctr">
+                      <a:solidFill>
+                        <a:srgbClr val="DDDDDD"/>
+                      </a:solidFill>
+                      <a:prstDash val="solid"/>
+                      <a:round/>
+                      <a:headEnd type="none" w="med" len="med"/>
+                      <a:tailEnd type="none" w="med" len="med"/>
+                    </a:lnB>
+                  </a:tcPr>
+                </a:tc>
+              </a:tr>
+              <a:tr h="502920">
+                <a:tc>
+                  <a:txBody>
+                    <a:bodyPr/>
+                    <a:lstStyle/>
+                    <a:p>
+                      <a:pPr algn="ctr" indent="0" marL="0">
+                        <a:buNone/>
+                      </a:pPr>
+                      <a:r>
+                        <a:rPr lang="en-US" sz="1600" dirty="0">
+                          <a:solidFill>
+                            <a:srgbClr val="000000"/>
+                          </a:solidFill>
+                        </a:rPr>
+                        <a:t>Top 4 F1 features</a:t>
+                      </a:r>
+                      <a:endParaRPr lang="en-US" sz="1600" dirty="0"/>
+                    </a:p>
+                  </a:txBody>
+                  <a:tcPr marL="91440" marR="91440" marT="45720" marB="45720">
+                    <a:lnL w="6350" cap="flat" cmpd="sng" algn="ctr">
+                      <a:solidFill>
+                        <a:srgbClr val="DDDDDD"/>
+                      </a:solidFill>
+                      <a:prstDash val="solid"/>
+                      <a:round/>
+                      <a:headEnd type="none" w="med" len="med"/>
+                      <a:tailEnd type="none" w="med" len="med"/>
+                    </a:lnL>
+                    <a:lnR w="6350" cap="flat" cmpd="sng" algn="ctr">
+                      <a:solidFill>
+                        <a:srgbClr val="DDDDDD"/>
+                      </a:solidFill>
+                      <a:prstDash val="solid"/>
+                      <a:round/>
+                      <a:headEnd type="none" w="med" len="med"/>
+                      <a:tailEnd type="none" w="med" len="med"/>
+                    </a:lnR>
+                    <a:lnT w="6350" cap="flat" cmpd="sng" algn="ctr">
+                      <a:solidFill>
+                        <a:srgbClr val="DDDDDD"/>
+                      </a:solidFill>
+                      <a:prstDash val="solid"/>
+                      <a:round/>
+                      <a:headEnd type="none" w="med" len="med"/>
+                      <a:tailEnd type="none" w="med" len="med"/>
+                    </a:lnT>
+                    <a:lnB w="6350" cap="flat" cmpd="sng" algn="ctr">
+                      <a:solidFill>
+                        <a:srgbClr val="DDDDDD"/>
+                      </a:solidFill>
+                      <a:prstDash val="solid"/>
+                      <a:round/>
+                      <a:headEnd type="none" w="med" len="med"/>
+                      <a:tailEnd type="none" w="med" len="med"/>
+                    </a:lnB>
+                  </a:tcPr>
+                </a:tc>
+                <a:tc>
+                  <a:txBody>
+                    <a:bodyPr/>
+                    <a:lstStyle/>
+                    <a:p>
+                      <a:pPr algn="ctr" indent="0" marL="0">
+                        <a:buNone/>
+                      </a:pPr>
+                      <a:r>
+                        <a:rPr lang="en-US" sz="1600" dirty="0">
+                          <a:solidFill>
+                            <a:srgbClr val="000000"/>
+                          </a:solidFill>
+                        </a:rPr>
+                        <a:t>4</a:t>
+                      </a:r>
+                      <a:endParaRPr lang="en-US" sz="1600" dirty="0"/>
+                    </a:p>
+                  </a:txBody>
+                  <a:tcPr marL="91440" marR="91440" marT="45720" marB="45720">
+                    <a:lnL w="6350" cap="flat" cmpd="sng" algn="ctr">
+                      <a:solidFill>
+                        <a:srgbClr val="DDDDDD"/>
+                      </a:solidFill>
+                      <a:prstDash val="solid"/>
+                      <a:round/>
+                      <a:headEnd type="none" w="med" len="med"/>
+                      <a:tailEnd type="none" w="med" len="med"/>
+                    </a:lnL>
+                    <a:lnR w="6350" cap="flat" cmpd="sng" algn="ctr">
+                      <a:solidFill>
+                        <a:srgbClr val="DDDDDD"/>
+                      </a:solidFill>
+                      <a:prstDash val="solid"/>
+                      <a:round/>
+                      <a:headEnd type="none" w="med" len="med"/>
+                      <a:tailEnd type="none" w="med" len="med"/>
+                    </a:lnR>
+                    <a:lnT w="6350" cap="flat" cmpd="sng" algn="ctr">
+                      <a:solidFill>
+                        <a:srgbClr val="DDDDDD"/>
+                      </a:solidFill>
+                      <a:prstDash val="solid"/>
+                      <a:round/>
+                      <a:headEnd type="none" w="med" len="med"/>
+                      <a:tailEnd type="none" w="med" len="med"/>
+                    </a:lnT>
+                    <a:lnB w="6350" cap="flat" cmpd="sng" algn="ctr">
+                      <a:solidFill>
+                        <a:srgbClr val="DDDDDD"/>
+                      </a:solidFill>
+                      <a:prstDash val="solid"/>
+                      <a:round/>
+                      <a:headEnd type="none" w="med" len="med"/>
+                      <a:tailEnd type="none" w="med" len="med"/>
+                    </a:lnB>
+                  </a:tcPr>
+                </a:tc>
+                <a:tc>
+                  <a:txBody>
+                    <a:bodyPr/>
+                    <a:lstStyle/>
+                    <a:p>
+                      <a:pPr algn="ctr" indent="0" marL="0">
+                        <a:buNone/>
+                      </a:pPr>
+                      <a:r>
+                        <a:rPr lang="en-US" sz="1600" dirty="0">
+                          <a:solidFill>
+                            <a:srgbClr val="000000"/>
+                          </a:solidFill>
+                        </a:rPr>
+                        <a:t>17.3%</a:t>
+                      </a:r>
+                      <a:endParaRPr lang="en-US" sz="1600" dirty="0"/>
+                    </a:p>
+                  </a:txBody>
+                  <a:tcPr marL="91440" marR="91440" marT="45720" marB="45720">
+                    <a:lnL w="6350" cap="flat" cmpd="sng" algn="ctr">
+                      <a:solidFill>
+                        <a:srgbClr val="DDDDDD"/>
+                      </a:solidFill>
+                      <a:prstDash val="solid"/>
+                      <a:round/>
+                      <a:headEnd type="none" w="med" len="med"/>
+                      <a:tailEnd type="none" w="med" len="med"/>
+                    </a:lnL>
+                    <a:lnR w="6350" cap="flat" cmpd="sng" algn="ctr">
+                      <a:solidFill>
+                        <a:srgbClr val="DDDDDD"/>
+                      </a:solidFill>
+                      <a:prstDash val="solid"/>
+                      <a:round/>
+                      <a:headEnd type="none" w="med" len="med"/>
+                      <a:tailEnd type="none" w="med" len="med"/>
+                    </a:lnR>
+                    <a:lnT w="6350" cap="flat" cmpd="sng" algn="ctr">
+                      <a:solidFill>
+                        <a:srgbClr val="DDDDDD"/>
+                      </a:solidFill>
+                      <a:prstDash val="solid"/>
+                      <a:round/>
+                      <a:headEnd type="none" w="med" len="med"/>
+                      <a:tailEnd type="none" w="med" len="med"/>
+                    </a:lnT>
+                    <a:lnB w="6350" cap="flat" cmpd="sng" algn="ctr">
+                      <a:solidFill>
+                        <a:srgbClr val="DDDDDD"/>
+                      </a:solidFill>
+                      <a:prstDash val="solid"/>
+                      <a:round/>
+                      <a:headEnd type="none" w="med" len="med"/>
+                      <a:tailEnd type="none" w="med" len="med"/>
+                    </a:lnB>
+                  </a:tcPr>
+                </a:tc>
+                <a:tc>
+                  <a:txBody>
+                    <a:bodyPr/>
+                    <a:lstStyle/>
+                    <a:p>
+                      <a:pPr algn="ctr" indent="0" marL="0">
+                        <a:buNone/>
+                      </a:pPr>
+                      <a:r>
+                        <a:rPr lang="en-US" sz="1600" dirty="0">
+                          <a:solidFill>
+                            <a:srgbClr val="000000"/>
+                          </a:solidFill>
+                        </a:rPr>
+                        <a:t>23.2%</a:t>
+                      </a:r>
+                      <a:endParaRPr lang="en-US" sz="1600" dirty="0"/>
+                    </a:p>
+                  </a:txBody>
+                  <a:tcPr marL="91440" marR="91440" marT="45720" marB="45720">
+                    <a:lnL w="6350" cap="flat" cmpd="sng" algn="ctr">
+                      <a:solidFill>
+                        <a:srgbClr val="DDDDDD"/>
+                      </a:solidFill>
+                      <a:prstDash val="solid"/>
+                      <a:round/>
+                      <a:headEnd type="none" w="med" len="med"/>
+                      <a:tailEnd type="none" w="med" len="med"/>
+                    </a:lnL>
+                    <a:lnR w="6350" cap="flat" cmpd="sng" algn="ctr">
+                      <a:solidFill>
+                        <a:srgbClr val="DDDDDD"/>
+                      </a:solidFill>
+                      <a:prstDash val="solid"/>
+                      <a:round/>
+                      <a:headEnd type="none" w="med" len="med"/>
+                      <a:tailEnd type="none" w="med" len="med"/>
+                    </a:lnR>
+                    <a:lnT w="6350" cap="flat" cmpd="sng" algn="ctr">
+                      <a:solidFill>
+                        <a:srgbClr val="DDDDDD"/>
+                      </a:solidFill>
+                      <a:prstDash val="solid"/>
+                      <a:round/>
+                      <a:headEnd type="none" w="med" len="med"/>
+                      <a:tailEnd type="none" w="med" len="med"/>
+                    </a:lnT>
+                    <a:lnB w="6350" cap="flat" cmpd="sng" algn="ctr">
+                      <a:solidFill>
+                        <a:srgbClr val="DDDDDD"/>
+                      </a:solidFill>
+                      <a:prstDash val="solid"/>
+                      <a:round/>
+                      <a:headEnd type="none" w="med" len="med"/>
+                      <a:tailEnd type="none" w="med" len="med"/>
+                    </a:lnB>
+                  </a:tcPr>
+                </a:tc>
+                <a:tc>
+                  <a:txBody>
+                    <a:bodyPr/>
+                    <a:lstStyle/>
+                    <a:p>
+                      <a:pPr algn="ctr" indent="0" marL="0">
+                        <a:buNone/>
+                      </a:pPr>
+                      <a:r>
+                        <a:rPr lang="en-US" sz="1600" dirty="0">
+                          <a:solidFill>
+                            <a:srgbClr val="000000"/>
+                          </a:solidFill>
+                        </a:rPr>
+                        <a:t>No</a:t>
+                      </a:r>
+                      <a:endParaRPr lang="en-US" sz="1600" dirty="0"/>
+                    </a:p>
+                  </a:txBody>
+                  <a:tcPr marL="91440" marR="91440" marT="45720" marB="45720">
+                    <a:lnL w="6350" cap="flat" cmpd="sng" algn="ctr">
+                      <a:solidFill>
+                        <a:srgbClr val="DDDDDD"/>
+                      </a:solidFill>
+                      <a:prstDash val="solid"/>
+                      <a:round/>
+                      <a:headEnd type="none" w="med" len="med"/>
+                      <a:tailEnd type="none" w="med" len="med"/>
+                    </a:lnL>
+                    <a:lnR w="6350" cap="flat" cmpd="sng" algn="ctr">
+                      <a:solidFill>
+                        <a:srgbClr val="DDDDDD"/>
+                      </a:solidFill>
+                      <a:prstDash val="solid"/>
+                      <a:round/>
+                      <a:headEnd type="none" w="med" len="med"/>
+                      <a:tailEnd type="none" w="med" len="med"/>
+                    </a:lnR>
+                    <a:lnT w="6350" cap="flat" cmpd="sng" algn="ctr">
+                      <a:solidFill>
+                        <a:srgbClr val="DDDDDD"/>
+                      </a:solidFill>
+                      <a:prstDash val="solid"/>
+                      <a:round/>
+                      <a:headEnd type="none" w="med" len="med"/>
+                      <a:tailEnd type="none" w="med" len="med"/>
+                    </a:lnT>
+                    <a:lnB w="6350" cap="flat" cmpd="sng" algn="ctr">
+                      <a:solidFill>
+                        <a:srgbClr val="DDDDDD"/>
+                      </a:solidFill>
+                      <a:prstDash val="solid"/>
+                      <a:round/>
+                      <a:headEnd type="none" w="med" len="med"/>
+                      <a:tailEnd type="none" w="med" len="med"/>
+                    </a:lnB>
+                  </a:tcPr>
+                </a:tc>
+              </a:tr>
+              <a:tr h="502920">
+                <a:tc>
+                  <a:txBody>
+                    <a:bodyPr/>
+                    <a:lstStyle/>
+                    <a:p>
+                      <a:pPr algn="ctr" indent="0" marL="0">
+                        <a:buNone/>
+                      </a:pPr>
+                      <a:r>
+                        <a:rPr lang="en-US" sz="1600" dirty="0">
+                          <a:solidFill>
+                            <a:srgbClr val="000000"/>
+                          </a:solidFill>
+                        </a:rPr>
+                        <a:t>Formants + Prosody</a:t>
+                      </a:r>
+                      <a:endParaRPr lang="en-US" sz="1600" dirty="0"/>
+                    </a:p>
+                  </a:txBody>
+                  <a:tcPr marL="91440" marR="91440" marT="45720" marB="45720">
+                    <a:lnL w="6350" cap="flat" cmpd="sng" algn="ctr">
+                      <a:solidFill>
+                        <a:srgbClr val="DDDDDD"/>
+                      </a:solidFill>
+                      <a:prstDash val="solid"/>
+                      <a:round/>
+                      <a:headEnd type="none" w="med" len="med"/>
+                      <a:tailEnd type="none" w="med" len="med"/>
+                    </a:lnL>
+                    <a:lnR w="6350" cap="flat" cmpd="sng" algn="ctr">
+                      <a:solidFill>
+                        <a:srgbClr val="DDDDDD"/>
+                      </a:solidFill>
+                      <a:prstDash val="solid"/>
+                      <a:round/>
+                      <a:headEnd type="none" w="med" len="med"/>
+                      <a:tailEnd type="none" w="med" len="med"/>
+                    </a:lnR>
+                    <a:lnT w="6350" cap="flat" cmpd="sng" algn="ctr">
+                      <a:solidFill>
+                        <a:srgbClr val="DDDDDD"/>
+                      </a:solidFill>
+                      <a:prstDash val="solid"/>
+                      <a:round/>
+                      <a:headEnd type="none" w="med" len="med"/>
+                      <a:tailEnd type="none" w="med" len="med"/>
+                    </a:lnT>
+                    <a:lnB w="6350" cap="flat" cmpd="sng" algn="ctr">
+                      <a:solidFill>
+                        <a:srgbClr val="DDDDDD"/>
+                      </a:solidFill>
+                      <a:prstDash val="solid"/>
+                      <a:round/>
+                      <a:headEnd type="none" w="med" len="med"/>
+                      <a:tailEnd type="none" w="med" len="med"/>
+                    </a:lnB>
+                  </a:tcPr>
+                </a:tc>
+                <a:tc>
+                  <a:txBody>
+                    <a:bodyPr/>
+                    <a:lstStyle/>
+                    <a:p>
+                      <a:pPr algn="ctr" indent="0" marL="0">
+                        <a:buNone/>
+                      </a:pPr>
+                      <a:r>
+                        <a:rPr lang="en-US" sz="1600" dirty="0">
+                          <a:solidFill>
+                            <a:srgbClr val="000000"/>
+                          </a:solidFill>
+                        </a:rPr>
+                        <a:t>15</a:t>
+                      </a:r>
+                      <a:endParaRPr lang="en-US" sz="1600" dirty="0"/>
+                    </a:p>
+                  </a:txBody>
+                  <a:tcPr marL="91440" marR="91440" marT="45720" marB="45720">
+                    <a:lnL w="6350" cap="flat" cmpd="sng" algn="ctr">
+                      <a:solidFill>
+                        <a:srgbClr val="DDDDDD"/>
+                      </a:solidFill>
+                      <a:prstDash val="solid"/>
+                      <a:round/>
+                      <a:headEnd type="none" w="med" len="med"/>
+                      <a:tailEnd type="none" w="med" len="med"/>
+                    </a:lnL>
+                    <a:lnR w="6350" cap="flat" cmpd="sng" algn="ctr">
+                      <a:solidFill>
+                        <a:srgbClr val="DDDDDD"/>
+                      </a:solidFill>
+                      <a:prstDash val="solid"/>
+                      <a:round/>
+                      <a:headEnd type="none" w="med" len="med"/>
+                      <a:tailEnd type="none" w="med" len="med"/>
+                    </a:lnR>
+                    <a:lnT w="6350" cap="flat" cmpd="sng" algn="ctr">
+                      <a:solidFill>
+                        <a:srgbClr val="DDDDDD"/>
+                      </a:solidFill>
+                      <a:prstDash val="solid"/>
+                      <a:round/>
+                      <a:headEnd type="none" w="med" len="med"/>
+                      <a:tailEnd type="none" w="med" len="med"/>
+                    </a:lnT>
+                    <a:lnB w="6350" cap="flat" cmpd="sng" algn="ctr">
+                      <a:solidFill>
+                        <a:srgbClr val="DDDDDD"/>
+                      </a:solidFill>
+                      <a:prstDash val="solid"/>
+                      <a:round/>
+                      <a:headEnd type="none" w="med" len="med"/>
+                      <a:tailEnd type="none" w="med" len="med"/>
+                    </a:lnB>
+                  </a:tcPr>
+                </a:tc>
+                <a:tc>
+                  <a:txBody>
+                    <a:bodyPr/>
+                    <a:lstStyle/>
+                    <a:p>
+                      <a:pPr algn="ctr" indent="0" marL="0">
+                        <a:buNone/>
+                      </a:pPr>
+                      <a:r>
+                        <a:rPr lang="en-US" sz="1600" dirty="0">
+                          <a:solidFill>
+                            <a:srgbClr val="000000"/>
+                          </a:solidFill>
+                        </a:rPr>
+                        <a:t>11.4%</a:t>
+                      </a:r>
+                      <a:endParaRPr lang="en-US" sz="1600" dirty="0"/>
+                    </a:p>
+                  </a:txBody>
+                  <a:tcPr marL="91440" marR="91440" marT="45720" marB="45720">
+                    <a:lnL w="6350" cap="flat" cmpd="sng" algn="ctr">
+                      <a:solidFill>
+                        <a:srgbClr val="DDDDDD"/>
+                      </a:solidFill>
+                      <a:prstDash val="solid"/>
+                      <a:round/>
+                      <a:headEnd type="none" w="med" len="med"/>
+                      <a:tailEnd type="none" w="med" len="med"/>
+                    </a:lnL>
+                    <a:lnR w="6350" cap="flat" cmpd="sng" algn="ctr">
+                      <a:solidFill>
+                        <a:srgbClr val="DDDDDD"/>
+                      </a:solidFill>
+                      <a:prstDash val="solid"/>
+                      <a:round/>
+                      <a:headEnd type="none" w="med" len="med"/>
+                      <a:tailEnd type="none" w="med" len="med"/>
+                    </a:lnR>
+                    <a:lnT w="6350" cap="flat" cmpd="sng" algn="ctr">
+                      <a:solidFill>
+                        <a:srgbClr val="DDDDDD"/>
+                      </a:solidFill>
+                      <a:prstDash val="solid"/>
+                      <a:round/>
+                      <a:headEnd type="none" w="med" len="med"/>
+                      <a:tailEnd type="none" w="med" len="med"/>
+                    </a:lnT>
+                    <a:lnB w="6350" cap="flat" cmpd="sng" algn="ctr">
+                      <a:solidFill>
+                        <a:srgbClr val="DDDDDD"/>
+                      </a:solidFill>
+                      <a:prstDash val="solid"/>
+                      <a:round/>
+                      <a:headEnd type="none" w="med" len="med"/>
+                      <a:tailEnd type="none" w="med" len="med"/>
+                    </a:lnB>
+                  </a:tcPr>
+                </a:tc>
+                <a:tc>
+                  <a:txBody>
+                    <a:bodyPr/>
+                    <a:lstStyle/>
+                    <a:p>
+                      <a:pPr algn="ctr" indent="0" marL="0">
+                        <a:buNone/>
+                      </a:pPr>
+                      <a:r>
+                        <a:rPr lang="en-US" sz="1600" dirty="0">
+                          <a:solidFill>
+                            <a:srgbClr val="000000"/>
+                          </a:solidFill>
+                        </a:rPr>
+                        <a:t>21.5%</a:t>
+                      </a:r>
+                      <a:endParaRPr lang="en-US" sz="1600" dirty="0"/>
+                    </a:p>
+                  </a:txBody>
+                  <a:tcPr marL="91440" marR="91440" marT="45720" marB="45720">
+                    <a:lnL w="6350" cap="flat" cmpd="sng" algn="ctr">
+                      <a:solidFill>
+                        <a:srgbClr val="DDDDDD"/>
+                      </a:solidFill>
+                      <a:prstDash val="solid"/>
+                      <a:round/>
+                      <a:headEnd type="none" w="med" len="med"/>
+                      <a:tailEnd type="none" w="med" len="med"/>
+                    </a:lnL>
+                    <a:lnR w="6350" cap="flat" cmpd="sng" algn="ctr">
+                      <a:solidFill>
+                        <a:srgbClr val="DDDDDD"/>
+                      </a:solidFill>
+                      <a:prstDash val="solid"/>
+                      <a:round/>
+                      <a:headEnd type="none" w="med" len="med"/>
+                      <a:tailEnd type="none" w="med" len="med"/>
+                    </a:lnR>
+                    <a:lnT w="6350" cap="flat" cmpd="sng" algn="ctr">
+                      <a:solidFill>
+                        <a:srgbClr val="DDDDDD"/>
+                      </a:solidFill>
+                      <a:prstDash val="solid"/>
+                      <a:round/>
+                      <a:headEnd type="none" w="med" len="med"/>
+                      <a:tailEnd type="none" w="med" len="med"/>
+                    </a:lnT>
+                    <a:lnB w="6350" cap="flat" cmpd="sng" algn="ctr">
+                      <a:solidFill>
+                        <a:srgbClr val="DDDDDD"/>
+                      </a:solidFill>
+                      <a:prstDash val="solid"/>
+                      <a:round/>
+                      <a:headEnd type="none" w="med" len="med"/>
+                      <a:tailEnd type="none" w="med" len="med"/>
+                    </a:lnB>
+                  </a:tcPr>
+                </a:tc>
+                <a:tc>
+                  <a:txBody>
+                    <a:bodyPr/>
+                    <a:lstStyle/>
+                    <a:p>
+                      <a:pPr algn="ctr" indent="0" marL="0">
+                        <a:buNone/>
+                      </a:pPr>
+                      <a:r>
+                        <a:rPr lang="en-US" sz="1600" dirty="0">
+                          <a:solidFill>
+                            <a:srgbClr val="000000"/>
+                          </a:solidFill>
+                        </a:rPr>
+                        <a:t>No</a:t>
+                      </a:r>
+                      <a:endParaRPr lang="en-US" sz="1600" dirty="0"/>
+                    </a:p>
+                  </a:txBody>
+                  <a:tcPr marL="91440" marR="91440" marT="45720" marB="45720">
+                    <a:lnL w="6350" cap="flat" cmpd="sng" algn="ctr">
+                      <a:solidFill>
+                        <a:srgbClr val="DDDDDD"/>
+                      </a:solidFill>
+                      <a:prstDash val="solid"/>
+                      <a:round/>
+                      <a:headEnd type="none" w="med" len="med"/>
+                      <a:tailEnd type="none" w="med" len="med"/>
+                    </a:lnL>
+                    <a:lnR w="6350" cap="flat" cmpd="sng" algn="ctr">
+                      <a:solidFill>
+                        <a:srgbClr val="DDDDDD"/>
+                      </a:solidFill>
+                      <a:prstDash val="solid"/>
+                      <a:round/>
+                      <a:headEnd type="none" w="med" len="med"/>
+                      <a:tailEnd type="none" w="med" len="med"/>
+                    </a:lnR>
+                    <a:lnT w="6350" cap="flat" cmpd="sng" algn="ctr">
+                      <a:solidFill>
+                        <a:srgbClr val="DDDDDD"/>
+                      </a:solidFill>
+                      <a:prstDash val="solid"/>
+                      <a:round/>
+                      <a:headEnd type="none" w="med" len="med"/>
+                      <a:tailEnd type="none" w="med" len="med"/>
+                    </a:lnT>
+                    <a:lnB w="6350" cap="flat" cmpd="sng" algn="ctr">
+                      <a:solidFill>
+                        <a:srgbClr val="DDDDDD"/>
+                      </a:solidFill>
+                      <a:prstDash val="solid"/>
+                      <a:round/>
+                      <a:headEnd type="none" w="med" len="med"/>
+                      <a:tailEnd type="none" w="med" len="med"/>
+                    </a:lnB>
+                  </a:tcPr>
+                </a:tc>
+              </a:tr>
+              <a:tr h="502920">
+                <a:tc>
+                  <a:txBody>
+                    <a:bodyPr/>
+                    <a:lstStyle/>
+                    <a:p>
+                      <a:pPr algn="ctr" indent="0" marL="0">
+                        <a:buNone/>
+                      </a:pPr>
+                      <a:r>
+                        <a:rPr lang="en-US" sz="1600" dirty="0">
+                          <a:solidFill>
+                            <a:srgbClr val="C5221F"/>
+                          </a:solidFill>
+                        </a:rPr>
+                        <a:t>All 36 features</a:t>
+                      </a:r>
+                      <a:endParaRPr lang="en-US" sz="1600" dirty="0"/>
+                    </a:p>
+                  </a:txBody>
+                  <a:tcPr marL="91440" marR="91440" marT="45720" marB="45720">
+                    <a:lnL w="6350" cap="flat" cmpd="sng" algn="ctr">
+                      <a:solidFill>
+                        <a:srgbClr val="DDDDDD"/>
+                      </a:solidFill>
+                      <a:prstDash val="solid"/>
+                      <a:round/>
+                      <a:headEnd type="none" w="med" len="med"/>
+                      <a:tailEnd type="none" w="med" len="med"/>
+                    </a:lnL>
+                    <a:lnR w="6350" cap="flat" cmpd="sng" algn="ctr">
+                      <a:solidFill>
+                        <a:srgbClr val="DDDDDD"/>
+                      </a:solidFill>
+                      <a:prstDash val="solid"/>
+                      <a:round/>
+                      <a:headEnd type="none" w="med" len="med"/>
+                      <a:tailEnd type="none" w="med" len="med"/>
+                    </a:lnR>
+                    <a:lnT w="6350" cap="flat" cmpd="sng" algn="ctr">
+                      <a:solidFill>
+                        <a:srgbClr val="DDDDDD"/>
+                      </a:solidFill>
+                      <a:prstDash val="solid"/>
+                      <a:round/>
+                      <a:headEnd type="none" w="med" len="med"/>
+                      <a:tailEnd type="none" w="med" len="med"/>
+                    </a:lnT>
+                    <a:lnB w="6350" cap="flat" cmpd="sng" algn="ctr">
+                      <a:solidFill>
+                        <a:srgbClr val="DDDDDD"/>
+                      </a:solidFill>
+                      <a:prstDash val="solid"/>
+                      <a:round/>
+                      <a:headEnd type="none" w="med" len="med"/>
+                      <a:tailEnd type="none" w="med" len="med"/>
+                    </a:lnB>
+                  </a:tcPr>
+                </a:tc>
+                <a:tc>
+                  <a:txBody>
+                    <a:bodyPr/>
+                    <a:lstStyle/>
+                    <a:p>
+                      <a:pPr algn="ctr" indent="0" marL="0">
+                        <a:buNone/>
+                      </a:pPr>
+                      <a:r>
+                        <a:rPr lang="en-US" sz="1600" dirty="0">
+                          <a:solidFill>
+                            <a:srgbClr val="C5221F"/>
+                          </a:solidFill>
+                        </a:rPr>
+                        <a:t>36</a:t>
+                      </a:r>
+                      <a:endParaRPr lang="en-US" sz="1600" dirty="0"/>
+                    </a:p>
+                  </a:txBody>
+                  <a:tcPr marL="91440" marR="91440" marT="45720" marB="45720">
+                    <a:lnL w="6350" cap="flat" cmpd="sng" algn="ctr">
+                      <a:solidFill>
+                        <a:srgbClr val="DDDDDD"/>
+                      </a:solidFill>
+                      <a:prstDash val="solid"/>
+                      <a:round/>
+                      <a:headEnd type="none" w="med" len="med"/>
+                      <a:tailEnd type="none" w="med" len="med"/>
+                    </a:lnL>
+                    <a:lnR w="6350" cap="flat" cmpd="sng" algn="ctr">
+                      <a:solidFill>
+                        <a:srgbClr val="DDDDDD"/>
+                      </a:solidFill>
+                      <a:prstDash val="solid"/>
+                      <a:round/>
+                      <a:headEnd type="none" w="med" len="med"/>
+                      <a:tailEnd type="none" w="med" len="med"/>
+                    </a:lnR>
+                    <a:lnT w="6350" cap="flat" cmpd="sng" algn="ctr">
+                      <a:solidFill>
+                        <a:srgbClr val="DDDDDD"/>
+                      </a:solidFill>
+                      <a:prstDash val="solid"/>
+                      <a:round/>
+                      <a:headEnd type="none" w="med" len="med"/>
+                      <a:tailEnd type="none" w="med" len="med"/>
+                    </a:lnT>
+                    <a:lnB w="6350" cap="flat" cmpd="sng" algn="ctr">
+                      <a:solidFill>
+                        <a:srgbClr val="DDDDDD"/>
+                      </a:solidFill>
+                      <a:prstDash val="solid"/>
+                      <a:round/>
+                      <a:headEnd type="none" w="med" len="med"/>
+                      <a:tailEnd type="none" w="med" len="med"/>
+                    </a:lnB>
+                  </a:tcPr>
+                </a:tc>
+                <a:tc>
+                  <a:txBody>
+                    <a:bodyPr/>
+                    <a:lstStyle/>
+                    <a:p>
+                      <a:pPr algn="ctr" indent="0" marL="0">
+                        <a:buNone/>
+                      </a:pPr>
+                      <a:r>
+                        <a:rPr lang="en-US" sz="1600" dirty="0">
+                          <a:solidFill>
+                            <a:srgbClr val="C5221F"/>
+                          </a:solidFill>
+                        </a:rPr>
+                        <a:t>9.2%</a:t>
+                      </a:r>
+                      <a:endParaRPr lang="en-US" sz="1600" dirty="0"/>
+                    </a:p>
+                  </a:txBody>
+                  <a:tcPr marL="91440" marR="91440" marT="45720" marB="45720">
+                    <a:lnL w="6350" cap="flat" cmpd="sng" algn="ctr">
+                      <a:solidFill>
+                        <a:srgbClr val="DDDDDD"/>
+                      </a:solidFill>
+                      <a:prstDash val="solid"/>
+                      <a:round/>
+                      <a:headEnd type="none" w="med" len="med"/>
+                      <a:tailEnd type="none" w="med" len="med"/>
+                    </a:lnL>
+                    <a:lnR w="6350" cap="flat" cmpd="sng" algn="ctr">
+                      <a:solidFill>
+                        <a:srgbClr val="DDDDDD"/>
+                      </a:solidFill>
+                      <a:prstDash val="solid"/>
+                      <a:round/>
+                      <a:headEnd type="none" w="med" len="med"/>
+                      <a:tailEnd type="none" w="med" len="med"/>
+                    </a:lnR>
+                    <a:lnT w="6350" cap="flat" cmpd="sng" algn="ctr">
+                      <a:solidFill>
+                        <a:srgbClr val="DDDDDD"/>
+                      </a:solidFill>
+                      <a:prstDash val="solid"/>
+                      <a:round/>
+                      <a:headEnd type="none" w="med" len="med"/>
+                      <a:tailEnd type="none" w="med" len="med"/>
+                    </a:lnT>
+                    <a:lnB w="6350" cap="flat" cmpd="sng" algn="ctr">
+                      <a:solidFill>
+                        <a:srgbClr val="DDDDDD"/>
+                      </a:solidFill>
+                      <a:prstDash val="solid"/>
+                      <a:round/>
+                      <a:headEnd type="none" w="med" len="med"/>
+                      <a:tailEnd type="none" w="med" len="med"/>
+                    </a:lnB>
+                  </a:tcPr>
+                </a:tc>
+                <a:tc>
+                  <a:txBody>
+                    <a:bodyPr/>
+                    <a:lstStyle/>
+                    <a:p>
+                      <a:pPr algn="ctr" indent="0" marL="0">
+                        <a:buNone/>
+                      </a:pPr>
+                      <a:r>
+                        <a:rPr lang="en-US" sz="1600" b="1" dirty="0">
+                          <a:solidFill>
+                            <a:srgbClr val="C5221F"/>
+                          </a:solidFill>
+                        </a:rPr>
+                        <a:t>54.8%</a:t>
+                      </a:r>
+                      <a:endParaRPr lang="en-US" sz="1600" dirty="0"/>
+                    </a:p>
+                  </a:txBody>
+                  <a:tcPr marL="91440" marR="91440" marT="45720" marB="45720">
+                    <a:lnL w="6350" cap="flat" cmpd="sng" algn="ctr">
+                      <a:solidFill>
+                        <a:srgbClr val="DDDDDD"/>
+                      </a:solidFill>
+                      <a:prstDash val="solid"/>
+                      <a:round/>
+                      <a:headEnd type="none" w="med" len="med"/>
+                      <a:tailEnd type="none" w="med" len="med"/>
+                    </a:lnL>
+                    <a:lnR w="6350" cap="flat" cmpd="sng" algn="ctr">
+                      <a:solidFill>
+                        <a:srgbClr val="DDDDDD"/>
+                      </a:solidFill>
+                      <a:prstDash val="solid"/>
+                      <a:round/>
+                      <a:headEnd type="none" w="med" len="med"/>
+                      <a:tailEnd type="none" w="med" len="med"/>
+                    </a:lnR>
+                    <a:lnT w="6350" cap="flat" cmpd="sng" algn="ctr">
+                      <a:solidFill>
+                        <a:srgbClr val="DDDDDD"/>
+                      </a:solidFill>
+                      <a:prstDash val="solid"/>
+                      <a:round/>
+                      <a:headEnd type="none" w="med" len="med"/>
+                      <a:tailEnd type="none" w="med" len="med"/>
+                    </a:lnT>
+                    <a:lnB w="6350" cap="flat" cmpd="sng" algn="ctr">
+                      <a:solidFill>
+                        <a:srgbClr val="DDDDDD"/>
+                      </a:solidFill>
+                      <a:prstDash val="solid"/>
+                      <a:round/>
+                      <a:headEnd type="none" w="med" len="med"/>
+                      <a:tailEnd type="none" w="med" len="med"/>
+                    </a:lnB>
+                  </a:tcPr>
+                </a:tc>
+                <a:tc>
+                  <a:txBody>
+                    <a:bodyPr/>
+                    <a:lstStyle/>
+                    <a:p>
+                      <a:pPr algn="ctr" indent="0" marL="0">
+                        <a:buNone/>
+                      </a:pPr>
+                      <a:r>
+                        <a:rPr lang="en-US" sz="1600" b="1" dirty="0">
+                          <a:solidFill>
+                            <a:srgbClr val="C5221F"/>
+                          </a:solidFill>
+                        </a:rPr>
+                        <a:t>YES!</a:t>
+                      </a:r>
+                      <a:endParaRPr lang="en-US" sz="1600" dirty="0"/>
+                    </a:p>
+                  </a:txBody>
+                  <a:tcPr marL="91440" marR="91440" marT="45720" marB="45720">
+                    <a:lnL w="6350" cap="flat" cmpd="sng" algn="ctr">
+                      <a:solidFill>
+                        <a:srgbClr val="DDDDDD"/>
+                      </a:solidFill>
+                      <a:prstDash val="solid"/>
+                      <a:round/>
+                      <a:headEnd type="none" w="med" len="med"/>
+                      <a:tailEnd type="none" w="med" len="med"/>
+                    </a:lnL>
+                    <a:lnR w="6350" cap="flat" cmpd="sng" algn="ctr">
+                      <a:solidFill>
+                        <a:srgbClr val="DDDDDD"/>
+                      </a:solidFill>
+                      <a:prstDash val="solid"/>
+                      <a:round/>
+                      <a:headEnd type="none" w="med" len="med"/>
+                      <a:tailEnd type="none" w="med" len="med"/>
+                    </a:lnR>
+                    <a:lnT w="6350" cap="flat" cmpd="sng" algn="ctr">
+                      <a:solidFill>
+                        <a:srgbClr val="DDDDDD"/>
+                      </a:solidFill>
+                      <a:prstDash val="solid"/>
+                      <a:round/>
+                      <a:headEnd type="none" w="med" len="med"/>
+                      <a:tailEnd type="none" w="med" len="med"/>
+                    </a:lnT>
+                    <a:lnB w="6350" cap="flat" cmpd="sng" algn="ctr">
+                      <a:solidFill>
+                        <a:srgbClr val="DDDDDD"/>
+                      </a:solidFill>
+                      <a:prstDash val="solid"/>
+                      <a:round/>
+                      <a:headEnd type="none" w="med" len="med"/>
+                      <a:tailEnd type="none" w="med" len="med"/>
+                    </a:lnB>
+                  </a:tcPr>
+                </a:tc>
+              </a:tr>
+            </a:tbl>
+          </a:graphicData>
+        </a:graphic>
+      </p:graphicFrame>
+      <p:sp>
+        <p:nvSpPr>
+          <p:cNvPr id="5" name="Text 2"/>
+          <p:cNvSpPr/>
+          <p:nvPr/>
+        </p:nvSpPr>
+        <p:spPr>
+          <a:xfrm>
+            <a:off x="914400" y="4114800"/>
+            <a:ext cx="10058400" cy="457200"/>
+          </a:xfrm>
+          <a:prstGeom prst="rect">
+            <a:avLst/>
+          </a:prstGeom>
+          <a:noFill/>
+          <a:ln/>
+        </p:spPr>
+        <p:txBody>
+          <a:bodyPr wrap="square" rtlCol="0" anchor="ctr"/>
+          <a:lstStyle/>
+          <a:p>
+            <a:pPr algn="ctr" indent="0" marL="0">
+              <a:buNone/>
+            </a:pPr>
+            <a:r>
+              <a:rPr lang="en-US" sz="1600" b="1" dirty="0">
+                <a:solidFill>
+                  <a:srgbClr val="C5221F"/>
+                </a:solidFill>
+              </a:rPr>
+              <a:t>Best in lab (9%) = worst deployed (55%). Feature selection prevents catastrophic failure.</a:t>
+            </a:r>
+            <a:endParaRPr lang="en-US" sz="1600" dirty="0"/>
+          </a:p>
+        </p:txBody>
+      </p:sp>
+      <p:sp>
+        <p:nvSpPr>
+          <p:cNvPr id="6" name="Text 3"/>
+          <p:cNvSpPr/>
+          <p:nvPr/>
+        </p:nvSpPr>
+        <p:spPr>
+          <a:xfrm>
+            <a:off x="914400" y="4754880"/>
+            <a:ext cx="10058400" cy="274320"/>
+          </a:xfrm>
+          <a:prstGeom prst="rect">
+            <a:avLst/>
+          </a:prstGeom>
+          <a:noFill/>
+          <a:ln/>
+        </p:spPr>
+        <p:txBody>
+          <a:bodyPr wrap="square" rtlCol="0" anchor="ctr"/>
+          <a:lstStyle/>
+          <a:p>
+            <a:pPr algn="ctr" indent="0" marL="0">
+              <a:buNone/>
+            </a:pPr>
+            <a:r>
+              <a:rPr lang="en-US" sz="1200" dirty="0">
+                <a:solidFill>
+                  <a:srgbClr val="777777"/>
+                </a:solidFill>
+              </a:rPr>
+              <a:t>Using SVM (RBF kernel, balanced class weights) on fixed ASVspoof challenge splits</a:t>
+            </a:r>
+            <a:endParaRPr lang="en-US" sz="1200" dirty="0"/>
+          </a:p>
+        </p:txBody>
+      </p:sp>
+    </p:spTree>
+  </p:cSld>
+  <p:clrMapOvr>
+    <a:masterClrMapping/>
+  </p:clrMapOvr>
+</p:sld>
+</file>
+
+<file path=ppt/slides/slide11.xml><?xml version="1.0" encoding="utf-8"?>
+<p:sld xmlns:a="http://schemas.openxmlformats.org/drawingml/2006/main" xmlns:r="http://schemas.openxmlformats.org/officeDocument/2006/relationships" xmlns:p="http://schemas.openxmlformats.org/presentationml/2006/main">
+  <p:cSld name="Slide 11">
+    <p:spTree>
+      <p:nvGrpSpPr>
+        <p:cNvPr id="1" name=""/>
+        <p:cNvGrpSpPr/>
+        <p:nvPr/>
+      </p:nvGrpSpPr>
+      <p:grpSpPr>
+        <a:xfrm>
+          <a:off x="0" y="0"/>
+          <a:ext cx="0" cy="0"/>
+          <a:chOff x="0" y="0"/>
+          <a:chExt cx="0" cy="0"/>
+        </a:xfrm>
+      </p:grpSpPr>
+      <p:sp>
+        <p:nvSpPr>
+          <p:cNvPr id="2" name="Text 0"/>
+          <p:cNvSpPr/>
+          <p:nvPr/>
+        </p:nvSpPr>
+        <p:spPr>
+          <a:xfrm>
+            <a:off x="457200" y="137160"/>
+            <a:ext cx="1097280" cy="274320"/>
+          </a:xfrm>
+          <a:prstGeom prst="rect">
+            <a:avLst/>
+          </a:prstGeom>
+          <a:noFill/>
+          <a:ln/>
+        </p:spPr>
+        <p:txBody>
+          <a:bodyPr wrap="square" rtlCol="0" anchor="ctr"/>
+          <a:lstStyle/>
+          <a:p>
+            <a:pPr indent="0" marL="0">
+              <a:buNone/>
+            </a:pPr>
+            <a:r>
+              <a:rPr lang="en-US" sz="1100" b="1" dirty="0">
+                <a:solidFill>
+                  <a:srgbClr val="1B5E3B"/>
+                </a:solidFill>
+              </a:rPr>
+              <a:t>STEP 6</a:t>
+            </a:r>
+            <a:endParaRPr lang="en-US" sz="1100" dirty="0"/>
+          </a:p>
+        </p:txBody>
+      </p:sp>
+      <p:sp>
+        <p:nvSpPr>
+          <p:cNvPr id="3" name="Text 1"/>
+          <p:cNvSpPr/>
+          <p:nvPr/>
+        </p:nvSpPr>
+        <p:spPr>
+          <a:xfrm>
+            <a:off x="457200" y="365760"/>
+            <a:ext cx="10972800" cy="548640"/>
+          </a:xfrm>
+          <a:prstGeom prst="rect">
+            <a:avLst/>
+          </a:prstGeom>
+          <a:noFill/>
+          <a:ln/>
+        </p:spPr>
+        <p:txBody>
+          <a:bodyPr wrap="square" rtlCol="0" anchor="ctr"/>
+          <a:lstStyle/>
+          <a:p>
+            <a:pPr indent="0" marL="0">
+              <a:buNone/>
+            </a:pPr>
+            <a:r>
+              <a:rPr lang="en-US" sz="2800" b="1" dirty="0">
+                <a:solidFill>
+                  <a:srgbClr val="1B5E3B"/>
+                </a:solidFill>
+                <a:latin typeface="Georgia" pitchFamily="34" charset="0"/>
+                <a:ea typeface="Georgia" pitchFamily="34" charset="-122"/>
+                <a:cs typeface="Georgia" pitchFamily="34" charset="-120"/>
+              </a:rPr>
+              <a:t>5 Classifiers + The Collapse</a:t>
+            </a:r>
+            <a:endParaRPr lang="en-US" sz="2800" dirty="0"/>
+          </a:p>
+        </p:txBody>
+      </p:sp>
+      <p:pic>
+        <p:nvPicPr>
+          <p:cNvPr id="4" name="Image 0" descr="/home/lab2208/Documents/df_detection/docs/presentation_figures/step6_classifiers_v2.png">    </p:cNvPr>
+          <p:cNvPicPr>
+            <a:picLocks noChangeAspect="1"/>
+          </p:cNvPicPr>
+          <p:nvPr/>
+        </p:nvPicPr>
+        <p:blipFill>
+          <a:blip r:embed="rId1"/>
+          <a:stretch>
+            <a:fillRect/>
+          </a:stretch>
+        </p:blipFill>
+        <p:spPr>
+          <a:xfrm>
+            <a:off x="274320" y="1005840"/>
+            <a:ext cx="11430000" cy="5029200"/>
+          </a:xfrm>
+          <a:prstGeom prst="rect">
+            <a:avLst/>
+          </a:prstGeom>
+        </p:spPr>
+      </p:pic>
+      <p:sp>
+        <p:nvSpPr>
+          <p:cNvPr id="5" name="Shape 2"/>
+          <p:cNvSpPr/>
+          <p:nvPr/>
+        </p:nvSpPr>
+        <p:spPr>
+          <a:xfrm>
+            <a:off x="274320" y="6126480"/>
+            <a:ext cx="11430000" cy="457200"/>
+          </a:xfrm>
+          <a:prstGeom prst="roundRect">
+            <a:avLst>
+              <a:gd name="adj" fmla="val 10000"/>
+            </a:avLst>
+          </a:prstGeom>
+          <a:solidFill>
+            <a:srgbClr val="FFEBEE"/>
+          </a:solidFill>
+          <a:ln/>
+        </p:spPr>
+      </p:sp>
+      <p:sp>
+        <p:nvSpPr>
+          <p:cNvPr id="6" name="Text 3"/>
+          <p:cNvSpPr/>
+          <p:nvPr/>
+        </p:nvSpPr>
+        <p:spPr>
+          <a:xfrm>
+            <a:off x="457200" y="6144768"/>
+            <a:ext cx="10972800" cy="365760"/>
+          </a:xfrm>
+          <a:prstGeom prst="rect">
+            <a:avLst/>
+          </a:prstGeom>
+          <a:noFill/>
+          <a:ln/>
+        </p:spPr>
+        <p:txBody>
+          <a:bodyPr wrap="square" rtlCol="0" anchor="ctr"/>
+          <a:lstStyle/>
+          <a:p>
+            <a:pPr algn="ctr" indent="0" marL="0">
+              <a:buNone/>
+            </a:pPr>
+            <a:r>
+              <a:rPr lang="en-US" sz="1200" b="1" dirty="0">
+                <a:solidFill>
+                  <a:srgbClr val="333333"/>
+                </a:solidFill>
+              </a:rPr>
+              <a:t>Formants+Prosody: 11% → 21% (graceful)  |  All 36: 9% → 55% (COLLAPSED)  |  Not SOTA (1.9%) but explainable</a:t>
+            </a:r>
+            <a:endParaRPr lang="en-US" sz="1200" dirty="0"/>
+          </a:p>
+        </p:txBody>
+      </p:sp>
+    </p:spTree>
+  </p:cSld>
+  <p:clrMapOvr>
+    <a:masterClrMapping/>
+  </p:clrMapOvr>
+</p:sld>
+</file>
+
+<file path=ppt/slides/slide12.xml><?xml version="1.0" encoding="utf-8"?>
+<p:sld xmlns:a="http://schemas.openxmlformats.org/drawingml/2006/main" xmlns:r="http://schemas.openxmlformats.org/officeDocument/2006/relationships" xmlns:p="http://schemas.openxmlformats.org/presentationml/2006/main">
+  <p:cSld name="Slide 12">
+    <p:bg>
+      <p:bgPr>
+        <a:solidFill>
+          <a:srgbClr val="1B5E3B"/>
+        </a:solidFill>
+      </p:bgPr>
+    </p:bg>
+    <p:spTree>
+      <p:nvGrpSpPr>
+        <p:cNvPr id="1" name=""/>
+        <p:cNvGrpSpPr/>
+        <p:nvPr/>
+      </p:nvGrpSpPr>
+      <p:grpSpPr>
+        <a:xfrm>
+          <a:off x="0" y="0"/>
+          <a:ext cx="0" cy="0"/>
+          <a:chOff x="0" y="0"/>
+          <a:chExt cx="0" cy="0"/>
+        </a:xfrm>
+      </p:grpSpPr>
+      <p:sp>
+        <p:nvSpPr>
+          <p:cNvPr id="2" name="Text 0"/>
+          <p:cNvSpPr/>
+          <p:nvPr/>
+        </p:nvSpPr>
+        <p:spPr>
+          <a:xfrm>
+            <a:off x="731520" y="274320"/>
+            <a:ext cx="10058400" cy="548640"/>
+          </a:xfrm>
+          <a:prstGeom prst="rect">
+            <a:avLst/>
+          </a:prstGeom>
+          <a:noFill/>
+          <a:ln/>
+        </p:spPr>
+        <p:txBody>
+          <a:bodyPr wrap="square" rtlCol="0" anchor="ctr"/>
+          <a:lstStyle/>
+          <a:p>
+            <a:pPr indent="0" marL="0">
+              <a:buNone/>
+            </a:pPr>
+            <a:r>
+              <a:rPr lang="en-US" sz="3600" b="1" dirty="0">
+                <a:solidFill>
+                  <a:srgbClr val="FFFFFF"/>
+                </a:solidFill>
+                <a:latin typeface="Georgia" pitchFamily="34" charset="0"/>
+                <a:ea typeface="Georgia" pitchFamily="34" charset="-122"/>
+                <a:cs typeface="Georgia" pitchFamily="34" charset="-120"/>
+              </a:rPr>
+              <a:t>Conclusions</a:t>
+            </a:r>
+            <a:endParaRPr lang="en-US" sz="3600" dirty="0"/>
+          </a:p>
+        </p:txBody>
+      </p:sp>
+      <p:sp>
+        <p:nvSpPr>
+          <p:cNvPr id="3" name="Shape 1"/>
+          <p:cNvSpPr/>
+          <p:nvPr/>
+        </p:nvSpPr>
+        <p:spPr>
+          <a:xfrm>
+            <a:off x="457200" y="914400"/>
+            <a:ext cx="5303520" cy="3474720"/>
+          </a:xfrm>
+          <a:prstGeom prst="roundRect">
+            <a:avLst>
+              <a:gd name="adj" fmla="val 2632"/>
+            </a:avLst>
+          </a:prstGeom>
+          <a:solidFill>
+            <a:srgbClr val="1B7E4B"/>
+          </a:solidFill>
+          <a:ln/>
+        </p:spPr>
+      </p:sp>
+      <p:sp>
+        <p:nvSpPr>
+          <p:cNvPr id="4" name="Text 2"/>
+          <p:cNvSpPr/>
+          <p:nvPr/>
+        </p:nvSpPr>
+        <p:spPr>
+          <a:xfrm>
+            <a:off x="640080" y="960120"/>
+            <a:ext cx="4937760" cy="274320"/>
+          </a:xfrm>
+          <a:prstGeom prst="rect">
+            <a:avLst/>
+          </a:prstGeom>
+          <a:noFill/>
+          <a:ln/>
+        </p:spPr>
+        <p:txBody>
+          <a:bodyPr wrap="square" rtlCol="0" anchor="ctr"/>
+          <a:lstStyle/>
+          <a:p>
+            <a:pPr indent="0" marL="0">
+              <a:buNone/>
+            </a:pPr>
+            <a:r>
+              <a:rPr lang="en-US" sz="1800" b="1" dirty="0">
+                <a:solidFill>
+                  <a:srgbClr val="D4A017"/>
+                </a:solidFill>
+              </a:rPr>
+              <a:t>What We Found</a:t>
+            </a:r>
+            <a:endParaRPr lang="en-US" sz="1800" dirty="0"/>
+          </a:p>
+        </p:txBody>
+      </p:sp>
+      <p:sp>
+        <p:nvSpPr>
+          <p:cNvPr id="5" name="Text 3"/>
+          <p:cNvSpPr/>
+          <p:nvPr/>
+        </p:nvSpPr>
+        <p:spPr>
+          <a:xfrm>
+            <a:off x="640080" y="1280160"/>
+            <a:ext cx="4937760" cy="2743200"/>
+          </a:xfrm>
+          <a:prstGeom prst="rect">
+            <a:avLst/>
+          </a:prstGeom>
+          <a:noFill/>
+          <a:ln/>
+        </p:spPr>
+        <p:txBody>
+          <a:bodyPr wrap="square" rtlCol="0" anchor="ctr"/>
+          <a:lstStyle/>
+          <a:p>
+            <a:pPr indent="0" marL="0">
+              <a:buNone/>
+            </a:pPr>
+            <a:r>
+              <a:rPr lang="en-US" sz="1300" dirty="0">
+                <a:solidFill>
+                  <a:srgbClr val="FFFFFF"/>
+                </a:solidFill>
+              </a:rPr>
+              <a:t>1. Out of 36 features, 4 detect deepfakes after compression. All measure F1 formant.</a:t>
+            </a:r>
+            <a:endParaRPr lang="en-US" sz="1300" dirty="0"/>
+          </a:p>
+          <a:p>
+            <a:pPr indent="0" marL="0">
+              <a:buNone/>
+            </a:pPr>
+            <a:endParaRPr lang="en-US" sz="1300" dirty="0"/>
+          </a:p>
+          <a:p>
+            <a:pPr indent="0" marL="0">
+              <a:buNone/>
+            </a:pPr>
+            <a:r>
+              <a:rPr lang="en-US" sz="1300" dirty="0">
+                <a:solidFill>
+                  <a:srgbClr val="FFFFFF"/>
+                </a:solidFill>
+              </a:rPr>
+              <a:t>2. Confirmed by Mann-Whitney, Cohen's d, Kruskal-Wallis, paired codec test, PCA.</a:t>
+            </a:r>
+            <a:endParaRPr lang="en-US" sz="1300" dirty="0"/>
+          </a:p>
+          <a:p>
+            <a:pPr indent="0" marL="0">
+              <a:buNone/>
+            </a:pPr>
+            <a:endParaRPr lang="en-US" sz="1300" dirty="0"/>
+          </a:p>
+          <a:p>
+            <a:pPr indent="0" marL="0">
+              <a:buNone/>
+            </a:pPr>
+            <a:r>
+              <a:rPr lang="en-US" sz="1300" b="1" dirty="0">
+                <a:solidFill>
+                  <a:srgbClr val="FFFFFF"/>
+                </a:solidFill>
+              </a:rPr>
+              <a:t>3. Adding fragile features DESTROYS the detector: 9% → 55%.</a:t>
+            </a:r>
+            <a:endParaRPr lang="en-US" sz="1300" dirty="0"/>
+          </a:p>
+        </p:txBody>
+      </p:sp>
+      <p:sp>
+        <p:nvSpPr>
+          <p:cNvPr id="6" name="Shape 4"/>
+          <p:cNvSpPr/>
+          <p:nvPr/>
+        </p:nvSpPr>
+        <p:spPr>
+          <a:xfrm>
+            <a:off x="6217920" y="914400"/>
+            <a:ext cx="5303520" cy="3474720"/>
+          </a:xfrm>
+          <a:prstGeom prst="roundRect">
+            <a:avLst>
+              <a:gd name="adj" fmla="val 2632"/>
+            </a:avLst>
+          </a:prstGeom>
+          <a:solidFill>
+            <a:srgbClr val="1B7E4B"/>
+          </a:solidFill>
+          <a:ln/>
+        </p:spPr>
+      </p:sp>
+      <p:sp>
+        <p:nvSpPr>
+          <p:cNvPr id="7" name="Text 5"/>
+          <p:cNvSpPr/>
+          <p:nvPr/>
+        </p:nvSpPr>
+        <p:spPr>
+          <a:xfrm>
+            <a:off x="6400800" y="960120"/>
+            <a:ext cx="4937760" cy="274320"/>
+          </a:xfrm>
+          <a:prstGeom prst="rect">
+            <a:avLst/>
+          </a:prstGeom>
+          <a:noFill/>
+          <a:ln/>
+        </p:spPr>
+        <p:txBody>
+          <a:bodyPr wrap="square" rtlCol="0" anchor="ctr"/>
+          <a:lstStyle/>
+          <a:p>
+            <a:pPr indent="0" marL="0">
+              <a:buNone/>
+            </a:pPr>
+            <a:r>
+              <a:rPr lang="en-US" sz="1800" b="1" dirty="0">
+                <a:solidFill>
+                  <a:srgbClr val="FF9999"/>
+                </a:solidFill>
+              </a:rPr>
+              <a:t>Limitations</a:t>
+            </a:r>
+            <a:endParaRPr lang="en-US" sz="1800" dirty="0"/>
+          </a:p>
+        </p:txBody>
+      </p:sp>
+      <p:sp>
+        <p:nvSpPr>
+          <p:cNvPr id="8" name="Text 6"/>
+          <p:cNvSpPr/>
+          <p:nvPr/>
+        </p:nvSpPr>
+        <p:spPr>
+          <a:xfrm>
+            <a:off x="6400800" y="1280160"/>
+            <a:ext cx="4937760" cy="2743200"/>
+          </a:xfrm>
+          <a:prstGeom prst="rect">
+            <a:avLst/>
+          </a:prstGeom>
+          <a:noFill/>
+          <a:ln/>
+        </p:spPr>
+        <p:txBody>
+          <a:bodyPr wrap="square" rtlCol="0" anchor="ctr"/>
+          <a:lstStyle/>
+          <a:p>
+            <a:pPr indent="0" marL="0">
+              <a:buNone/>
+            </a:pPr>
+            <a:r>
+              <a:rPr lang="en-US" sz="1300" dirty="0">
+                <a:solidFill>
+                  <a:srgbClr val="FFFFFF"/>
+                </a:solidFill>
+              </a:rPr>
+              <a:t>1. 21% error — SOTA neural systems: 1.9%</a:t>
+            </a:r>
+            <a:endParaRPr lang="en-US" sz="1300" dirty="0"/>
+          </a:p>
+          <a:p>
+            <a:pPr indent="0" marL="0">
+              <a:buNone/>
+            </a:pPr>
+            <a:endParaRPr lang="en-US" sz="1300" dirty="0"/>
+          </a:p>
+          <a:p>
+            <a:pPr indent="0" marL="0">
+              <a:buNone/>
+            </a:pPr>
+            <a:r>
+              <a:rPr lang="en-US" sz="1300" dirty="0">
+                <a:solidFill>
+                  <a:srgbClr val="FFFFFF"/>
+                </a:solidFill>
+              </a:rPr>
+              <a:t>2. 4 features are 91% correlated — one signal</a:t>
+            </a:r>
+            <a:endParaRPr lang="en-US" sz="1300" dirty="0"/>
+          </a:p>
+          <a:p>
+            <a:pPr indent="0" marL="0">
+              <a:buNone/>
+            </a:pPr>
+            <a:endParaRPr lang="en-US" sz="1300" dirty="0"/>
+          </a:p>
+          <a:p>
+            <a:pPr indent="0" marL="0">
+              <a:buNone/>
+            </a:pPr>
+            <a:r>
+              <a:rPr lang="en-US" sz="1300" dirty="0">
+                <a:solidFill>
+                  <a:srgbClr val="FFFFFF"/>
+                </a:solidFill>
+              </a:rPr>
+              <a:t>3. Advanced vocoders (A17-A19): error &gt; 48%</a:t>
+            </a:r>
+            <a:endParaRPr lang="en-US" sz="1300" dirty="0"/>
+          </a:p>
+          <a:p>
+            <a:pPr indent="0" marL="0">
+              <a:buNone/>
+            </a:pPr>
+            <a:endParaRPr lang="en-US" sz="1300" dirty="0"/>
+          </a:p>
+          <a:p>
+            <a:pPr indent="0" marL="0">
+              <a:buNone/>
+            </a:pPr>
+            <a:r>
+              <a:rPr lang="en-US" sz="1300" dirty="0">
+                <a:solidFill>
+                  <a:srgbClr val="FFFFFF"/>
+                </a:solidFill>
+              </a:rPr>
+              <a:t>4. G.711 telephone: 79% of signal lost</a:t>
+            </a:r>
+            <a:endParaRPr lang="en-US" sz="1300" dirty="0"/>
+          </a:p>
+        </p:txBody>
+      </p:sp>
+      <p:sp>
+        <p:nvSpPr>
+          <p:cNvPr id="9" name="Shape 7"/>
+          <p:cNvSpPr/>
+          <p:nvPr/>
+        </p:nvSpPr>
+        <p:spPr>
+          <a:xfrm>
+            <a:off x="457200" y="4572000"/>
+            <a:ext cx="10972800" cy="1188720"/>
+          </a:xfrm>
+          <a:prstGeom prst="roundRect">
+            <a:avLst>
+              <a:gd name="adj" fmla="val 7692"/>
+            </a:avLst>
+          </a:prstGeom>
+          <a:solidFill>
+            <a:srgbClr val="FFFFFF"/>
+          </a:solidFill>
+          <a:ln/>
+        </p:spPr>
+      </p:sp>
+      <p:sp>
+        <p:nvSpPr>
+          <p:cNvPr id="10" name="Text 8"/>
+          <p:cNvSpPr/>
+          <p:nvPr/>
+        </p:nvSpPr>
+        <p:spPr>
+          <a:xfrm>
+            <a:off x="640080" y="4663440"/>
+            <a:ext cx="10515600" cy="914400"/>
+          </a:xfrm>
+          <a:prstGeom prst="rect">
+            <a:avLst/>
+          </a:prstGeom>
+          <a:noFill/>
+          <a:ln/>
+        </p:spPr>
+        <p:txBody>
+          <a:bodyPr wrap="square" rtlCol="0" anchor="ctr"/>
+          <a:lstStyle/>
+          <a:p>
+            <a:pPr algn="ctr" indent="0" marL="0">
+              <a:buNone/>
+            </a:pPr>
+            <a:r>
+              <a:rPr lang="en-US" sz="1500" dirty="0">
+                <a:solidFill>
+                  <a:srgbClr val="1B5E3B"/>
+                </a:solidFill>
+              </a:rPr>
+              <a:t>Real speech: F1 bandwidth = 515 ± 87 Hz  |  Fake speech: 361 ± 120 Hz</a:t>
+            </a:r>
+            <a:endParaRPr lang="en-US" sz="1500" dirty="0"/>
+          </a:p>
+          <a:p>
+            <a:pPr algn="ctr" indent="0" marL="0">
+              <a:buNone/>
+            </a:pPr>
+            <a:r>
+              <a:rPr lang="en-US" sz="1500" dirty="0">
+                <a:solidFill>
+                  <a:srgbClr val="1B5E3B"/>
+                </a:solidFill>
+              </a:rPr>
+              <a:t>Gap: 154 Hz  |  Survives MP3/AAC  |  Physical cause: vocal tract damping</a:t>
+            </a:r>
+            <a:endParaRPr lang="en-US" sz="1500" dirty="0"/>
+          </a:p>
+        </p:txBody>
+      </p:sp>
+      <p:sp>
+        <p:nvSpPr>
+          <p:cNvPr id="11" name="Text 9"/>
+          <p:cNvSpPr/>
+          <p:nvPr/>
+        </p:nvSpPr>
+        <p:spPr>
+          <a:xfrm>
+            <a:off x="457200" y="5943600"/>
+            <a:ext cx="10972800" cy="274320"/>
+          </a:xfrm>
+          <a:prstGeom prst="rect">
+            <a:avLst/>
+          </a:prstGeom>
+          <a:noFill/>
+          <a:ln/>
+        </p:spPr>
+        <p:txBody>
+          <a:bodyPr wrap="square" rtlCol="0" anchor="ctr"/>
+          <a:lstStyle/>
+          <a:p>
+            <a:pPr algn="ctr" indent="0" marL="0">
+              <a:buNone/>
+            </a:pPr>
+            <a:r>
+              <a:rPr lang="en-US" sz="1200" dirty="0">
+                <a:solidFill>
+                  <a:srgbClr val="D4A017"/>
+                </a:solidFill>
+              </a:rPr>
+              <a:t>github.com/Yash-Sukhdeve/stats-audio-deepfake-detection</a:t>
+            </a:r>
+            <a:endParaRPr lang="en-US" sz="1200" dirty="0"/>
+          </a:p>
+        </p:txBody>
+      </p:sp>
+      <p:sp>
+        <p:nvSpPr>
+          <p:cNvPr id="12" name="Text 10"/>
+          <p:cNvSpPr/>
+          <p:nvPr/>
+        </p:nvSpPr>
+        <p:spPr>
+          <a:xfrm>
+            <a:off x="457200" y="6309360"/>
+            <a:ext cx="10972800" cy="274320"/>
+          </a:xfrm>
+          <a:prstGeom prst="rect">
+            <a:avLst/>
+          </a:prstGeom>
+          <a:noFill/>
+          <a:ln/>
+        </p:spPr>
+        <p:txBody>
+          <a:bodyPr wrap="square" rtlCol="0" anchor="ctr"/>
+          <a:lstStyle/>
+          <a:p>
+            <a:pPr algn="ctr" indent="0" marL="0">
+              <a:buNone/>
+            </a:pPr>
+            <a:r>
+              <a:rPr lang="en-US" sz="900" dirty="0">
+                <a:solidFill>
+                  <a:srgbClr val="AAAAAA"/>
+                </a:solidFill>
+              </a:rPr>
+              <a:t>Mann &amp; Whitney (1947) | Cohen (1988) | Benjamini &amp; Hochberg (1995) | Kruskal &amp; Wallis (1952) | Kim &amp; Stern (2016)</a:t>
+            </a:r>
+            <a:endParaRPr lang="en-US" sz="900" dirty="0"/>
           </a:p>
         </p:txBody>
       </p:sp>
@@ -1935,8 +4539,8 @@
         </p:blipFill>
         <p:spPr>
           <a:xfrm>
-            <a:off x="274320" y="1005840"/>
-            <a:ext cx="11430000" cy="3200400"/>
+            <a:off x="274320" y="1097280"/>
+            <a:ext cx="11430000" cy="3657600"/>
           </a:xfrm>
           <a:prstGeom prst="rect">
             <a:avLst/>
@@ -1951,12 +4555,12 @@
         </p:nvSpPr>
         <p:spPr>
           <a:xfrm>
-            <a:off x="274320" y="4389120"/>
-            <a:ext cx="5486400" cy="2011680"/>
+            <a:off x="274320" y="4937760"/>
+            <a:ext cx="11430000" cy="1371600"/>
           </a:xfrm>
           <a:prstGeom prst="roundRect">
             <a:avLst>
-              <a:gd name="adj" fmla="val 4545"/>
+              <a:gd name="adj" fmla="val 6667"/>
             </a:avLst>
           </a:prstGeom>
           <a:solidFill>
@@ -1973,8 +4577,8 @@
         </p:nvSpPr>
         <p:spPr>
           <a:xfrm>
-            <a:off x="457200" y="4434840"/>
-            <a:ext cx="5120640" cy="274320"/>
+            <a:off x="457200" y="5029200"/>
+            <a:ext cx="10972800" cy="1097280"/>
           </a:xfrm>
           <a:prstGeom prst="rect">
             <a:avLst/>
@@ -1986,210 +4590,32 @@
           <a:bodyPr wrap="square" rtlCol="0" anchor="ctr"/>
           <a:lstStyle/>
           <a:p>
-            <a:pPr indent="0" marL="0">
+            <a:pPr algn="ctr" indent="0" marL="0">
               <a:buNone/>
             </a:pPr>
             <a:r>
-              <a:rPr lang="en-US" sz="1600" b="1" dirty="0">
-                <a:solidFill>
-                  <a:srgbClr val="C5221F"/>
-                </a:solidFill>
-              </a:rPr>
-              <a:t>The Problem</a:t>
-            </a:r>
-            <a:endParaRPr lang="en-US" sz="1600" dirty="0"/>
-          </a:p>
-        </p:txBody>
-      </p:sp>
-      <p:sp>
-        <p:nvSpPr>
-          <p:cNvPr id="7" name="Text 4"/>
-          <p:cNvSpPr/>
-          <p:nvPr/>
-        </p:nvSpPr>
-        <p:spPr>
-          <a:xfrm>
-            <a:off x="457200" y="4754880"/>
-            <a:ext cx="5120640" cy="1371600"/>
-          </a:xfrm>
-          <a:prstGeom prst="rect">
-            <a:avLst/>
-          </a:prstGeom>
-          <a:noFill/>
-          <a:ln/>
-        </p:spPr>
-        <p:txBody>
-          <a:bodyPr wrap="square" rtlCol="0" anchor="ctr"/>
-          <a:lstStyle/>
-          <a:p>
-            <a:pPr marL="342900" indent="-342900">
-              <a:buSzPct val="100000"/>
-              <a:buChar char="•"/>
-            </a:pPr>
-            <a:r>
-              <a:rPr lang="en-US" sz="1200" dirty="0">
+              <a:rPr lang="en-US" sz="1300" b="1" dirty="0">
                 <a:solidFill>
                   <a:srgbClr val="333333"/>
                 </a:solidFill>
               </a:rPr>
-              <a:t>Train on 25,380 clean files → deploy on phone calls</a:t>
-            </a:r>
-            <a:endParaRPr lang="en-US" sz="1200" dirty="0"/>
-          </a:p>
-          <a:p>
-            <a:pPr marL="342900" indent="-342900">
-              <a:buSzPct val="100000"/>
-              <a:buChar char="•"/>
-            </a:pPr>
-            <a:r>
-              <a:rPr lang="en-US" sz="1200" b="1" dirty="0">
+              <a:t>25,380 files: 2,580 real + 22,800 fake (ratio 1:8.8)  |  36 features per file  |  ASVspoof 2019 LA challenge</a:t>
+            </a:r>
+            <a:endParaRPr lang="en-US" sz="1300" dirty="0"/>
+          </a:p>
+          <a:p>
+            <a:pPr algn="ctr" indent="0" marL="0">
+              <a:buNone/>
+            </a:pPr>
+            <a:r>
+              <a:rPr lang="en-US" sz="1300" dirty="0">
                 <a:solidFill>
                   <a:srgbClr val="333333"/>
                 </a:solidFill>
               </a:rPr>
-              <a:t>Lab: 7% error  |  After codecs: 50% (coin flip)</a:t>
-            </a:r>
-            <a:endParaRPr lang="en-US" sz="1200" dirty="0"/>
-          </a:p>
-          <a:p>
-            <a:pPr marL="342900" indent="-342900">
-              <a:buSzPct val="100000"/>
-              <a:buChar char="•"/>
-            </a:pPr>
-            <a:r>
-              <a:rPr lang="en-US" sz="1200" dirty="0">
-                <a:solidFill>
-                  <a:srgbClr val="333333"/>
-                </a:solidFill>
-              </a:rPr>
-              <a:t>Which of 36 features survive AND detect fakes?</a:t>
-            </a:r>
-            <a:endParaRPr lang="en-US" sz="1200" dirty="0"/>
-          </a:p>
-        </p:txBody>
-      </p:sp>
-      <p:sp>
-        <p:nvSpPr>
-          <p:cNvPr id="8" name="Shape 5"/>
-          <p:cNvSpPr/>
-          <p:nvPr/>
-        </p:nvSpPr>
-        <p:spPr>
-          <a:xfrm>
-            <a:off x="6217920" y="4389120"/>
-            <a:ext cx="5486400" cy="2011680"/>
-          </a:xfrm>
-          <a:prstGeom prst="roundRect">
-            <a:avLst>
-              <a:gd name="adj" fmla="val 4545"/>
-            </a:avLst>
-          </a:prstGeom>
-          <a:solidFill>
-            <a:srgbClr val="F5F5F0"/>
-          </a:solidFill>
-          <a:ln/>
-        </p:spPr>
-      </p:sp>
-      <p:sp>
-        <p:nvSpPr>
-          <p:cNvPr id="9" name="Text 6"/>
-          <p:cNvSpPr/>
-          <p:nvPr/>
-        </p:nvSpPr>
-        <p:spPr>
-          <a:xfrm>
-            <a:off x="6400800" y="4434840"/>
-            <a:ext cx="5120640" cy="274320"/>
-          </a:xfrm>
-          <a:prstGeom prst="rect">
-            <a:avLst/>
-          </a:prstGeom>
-          <a:noFill/>
-          <a:ln/>
-        </p:spPr>
-        <p:txBody>
-          <a:bodyPr wrap="square" rtlCol="0" anchor="ctr"/>
-          <a:lstStyle/>
-          <a:p>
-            <a:pPr indent="0" marL="0">
-              <a:buNone/>
-            </a:pPr>
-            <a:r>
-              <a:rPr lang="en-US" sz="1600" b="1" dirty="0">
-                <a:solidFill>
-                  <a:srgbClr val="1B5E3B"/>
-                </a:solidFill>
-              </a:rPr>
-              <a:t>Key Facts</a:t>
-            </a:r>
-            <a:endParaRPr lang="en-US" sz="1600" dirty="0"/>
-          </a:p>
-        </p:txBody>
-      </p:sp>
-      <p:sp>
-        <p:nvSpPr>
-          <p:cNvPr id="10" name="Text 7"/>
-          <p:cNvSpPr/>
-          <p:nvPr/>
-        </p:nvSpPr>
-        <p:spPr>
-          <a:xfrm>
-            <a:off x="6400800" y="4754880"/>
-            <a:ext cx="5120640" cy="1371600"/>
-          </a:xfrm>
-          <a:prstGeom prst="rect">
-            <a:avLst/>
-          </a:prstGeom>
-          <a:noFill/>
-          <a:ln/>
-        </p:spPr>
-        <p:txBody>
-          <a:bodyPr wrap="square" rtlCol="0" anchor="ctr"/>
-          <a:lstStyle/>
-          <a:p>
-            <a:pPr marL="342900" indent="-342900">
-              <a:buSzPct val="100000"/>
-              <a:buChar char="•"/>
-            </a:pPr>
-            <a:r>
-              <a:rPr lang="en-US" sz="1200" dirty="0">
-                <a:solidFill>
-                  <a:srgbClr val="333333"/>
-                </a:solidFill>
-              </a:rPr>
-              <a:t>ASVspoof 2019 LA: international deepfake challenge</a:t>
-            </a:r>
-            <a:endParaRPr lang="en-US" sz="1200" dirty="0"/>
-          </a:p>
-          <a:p>
-            <a:pPr marL="342900" indent="-342900">
-              <a:buSzPct val="100000"/>
-              <a:buChar char="•"/>
-            </a:pPr>
-            <a:r>
-              <a:rPr lang="en-US" sz="1200" dirty="0">
-                <a:solidFill>
-                  <a:srgbClr val="333333"/>
-                </a:solidFill>
-              </a:rPr>
-              <a:t>2,580 real + 22,800 fake (ratio 1:8.8)</a:t>
-            </a:r>
-            <a:endParaRPr lang="en-US" sz="1200" dirty="0"/>
-          </a:p>
-          <a:p>
-            <a:pPr marL="342900" indent="-342900">
-              <a:buSzPct val="100000"/>
-              <a:buChar char="•"/>
-            </a:pPr>
-            <a:r>
-              <a:rPr lang="en-US" sz="1200" dirty="0">
-                <a:solidFill>
-                  <a:srgbClr val="333333"/>
-                </a:solidFill>
-              </a:rPr>
-              <a:t>6 synthesis methods (A01–A06), 16kHz FLAC</a:t>
-            </a:r>
-            <a:endParaRPr lang="en-US" sz="1200" dirty="0"/>
+              <a:t>Problem: Lab error 7%  →  After codecs: 50% (coin flip). Which features survive AND detect fakes?</a:t>
+            </a:r>
+            <a:endParaRPr lang="en-US" sz="1300" dirty="0"/>
           </a:p>
         </p:txBody>
       </p:sp>
@@ -2310,7 +4736,7 @@
         <p:spPr>
           <a:xfrm>
             <a:off x="274320" y="1005840"/>
-            <a:ext cx="11430000" cy="4572000"/>
+            <a:ext cx="11430000" cy="4846320"/>
           </a:xfrm>
           <a:prstGeom prst="rect">
             <a:avLst/>
@@ -2325,12 +4751,12 @@
         </p:nvSpPr>
         <p:spPr>
           <a:xfrm>
-            <a:off x="274320" y="5760720"/>
-            <a:ext cx="11430000" cy="731520"/>
+            <a:off x="274320" y="5943600"/>
+            <a:ext cx="11430000" cy="640080"/>
           </a:xfrm>
           <a:prstGeom prst="roundRect">
             <a:avLst>
-              <a:gd name="adj" fmla="val 6250"/>
+              <a:gd name="adj" fmla="val 7143"/>
             </a:avLst>
           </a:prstGeom>
           <a:solidFill>
@@ -2347,7 +4773,7 @@
         </p:nvSpPr>
         <p:spPr>
           <a:xfrm>
-            <a:off x="457200" y="5852160"/>
+            <a:off x="457200" y="5989320"/>
             <a:ext cx="10972800" cy="457200"/>
           </a:xfrm>
           <a:prstGeom prst="rect">
@@ -2364,14 +4790,14 @@
               <a:buNone/>
             </a:pPr>
             <a:r>
-              <a:rPr lang="en-US" sz="1200" dirty="0">
+              <a:rPr lang="en-US" sz="1300" b="1" dirty="0">
                 <a:solidFill>
                   <a:srgbClr val="1B5E3B"/>
                 </a:solidFill>
               </a:rPr>
-              <a:t>Result: 33/36 near-normal (skew &lt; 1). 3 skewed (F0_std, PNCC_4, duration). → Use Mann-Whitney (non-parametric) for all tests.</a:t>
-            </a:r>
-            <a:endParaRPr lang="en-US" sz="1200" dirty="0"/>
+              <a:t>33/36 near-normal (skew &lt; 1).  3 skewed.  → Decision: Use Mann-Whitney (non-parametric) for all tests.</a:t>
+            </a:r>
+            <a:endParaRPr lang="en-US" sz="1300" dirty="0"/>
           </a:p>
         </p:txBody>
       </p:sp>
@@ -2461,7 +4887,7 @@
               <a:buNone/>
             </a:pPr>
             <a:r>
-              <a:rPr lang="en-US" sz="2800" b="1" dirty="0">
+              <a:rPr lang="en-US" sz="3200" b="1" dirty="0">
                 <a:solidFill>
                   <a:srgbClr val="1B5E3B"/>
                 </a:solidFill>
@@ -2469,9 +4895,9 @@
                 <a:ea typeface="Georgia" pitchFamily="34" charset="-122"/>
                 <a:cs typeface="Georgia" pitchFamily="34" charset="-120"/>
               </a:rPr>
-              <a:t>Testing: Is the Difference Real and Meaningful?</a:t>
-            </a:r>
-            <a:endParaRPr lang="en-US" sz="2800" dirty="0"/>
+              <a:t>Is the Difference Real and Meaningful?</a:t>
+            </a:r>
+            <a:endParaRPr lang="en-US" sz="3200" dirty="0"/>
           </a:p>
         </p:txBody>
       </p:sp>
@@ -2484,11 +4910,11 @@
         <p:spPr>
           <a:xfrm>
             <a:off x="274320" y="1005840"/>
-            <a:ext cx="5669280" cy="2011680"/>
+            <a:ext cx="5669280" cy="1645920"/>
           </a:xfrm>
           <a:prstGeom prst="roundRect">
             <a:avLst>
-              <a:gd name="adj" fmla="val 4545"/>
+              <a:gd name="adj" fmla="val 5556"/>
             </a:avLst>
           </a:prstGeom>
           <a:solidFill>
@@ -2511,7 +4937,7 @@
         <p:spPr>
           <a:xfrm>
             <a:off x="457200" y="1051560"/>
-            <a:ext cx="5303520" cy="274320"/>
+            <a:ext cx="5303520" cy="228600"/>
           </a:xfrm>
           <a:prstGeom prst="rect">
             <a:avLst/>
@@ -2547,7 +4973,7 @@
         <p:spPr>
           <a:xfrm>
             <a:off x="457200" y="1325880"/>
-            <a:ext cx="5303520" cy="182880"/>
+            <a:ext cx="5303520" cy="1097280"/>
           </a:xfrm>
           <a:prstGeom prst="rect">
             <a:avLst/>
@@ -2559,42 +4985,6 @@
           <a:bodyPr wrap="square" rtlCol="0" anchor="ctr"/>
           <a:lstStyle/>
           <a:p>
-            <a:pPr indent="0" marL="0">
-              <a:buNone/>
-            </a:pPr>
-            <a:r>
-              <a:rPr lang="en-US" sz="1100" i="1" dirty="0">
-                <a:solidFill>
-                  <a:srgbClr val="777777"/>
-                </a:solidFill>
-              </a:rPr>
-              <a:t>Is the real-fake gap statistically significant?</a:t>
-            </a:r>
-            <a:endParaRPr lang="en-US" sz="1100" dirty="0"/>
-          </a:p>
-        </p:txBody>
-      </p:sp>
-      <p:sp>
-        <p:nvSpPr>
-          <p:cNvPr id="7" name="Text 5"/>
-          <p:cNvSpPr/>
-          <p:nvPr/>
-        </p:nvSpPr>
-        <p:spPr>
-          <a:xfrm>
-            <a:off x="457200" y="1554480"/>
-            <a:ext cx="5303520" cy="1188720"/>
-          </a:xfrm>
-          <a:prstGeom prst="rect">
-            <a:avLst/>
-          </a:prstGeom>
-          <a:noFill/>
-          <a:ln/>
-        </p:spPr>
-        <p:txBody>
-          <a:bodyPr wrap="square" rtlCol="0" anchor="ctr"/>
-          <a:lstStyle/>
-          <a:p>
             <a:pPr marL="342900" indent="-342900">
               <a:buSzPct val="100000"/>
               <a:buChar char="•"/>
@@ -2605,7 +4995,7 @@
                   <a:srgbClr val="333333"/>
                 </a:solidFill>
               </a:rPr>
-              <a:t>Non-parametric — no normality assumption</a:t>
+              <a:t>Non-parametric: no normality assumption needed</a:t>
             </a:r>
             <a:endParaRPr lang="en-US" sz="1100" dirty="0"/>
           </a:p>
@@ -2620,22 +5010,7 @@
                   <a:srgbClr val="333333"/>
                 </a:solidFill>
               </a:rPr>
-              <a:t>Corrected for 36 tests (BH-FDR, 5%)</a:t>
-            </a:r>
-            <a:endParaRPr lang="en-US" sz="1100" dirty="0"/>
-          </a:p>
-          <a:p>
-            <a:pPr marL="342900" indent="-342900">
-              <a:buSzPct val="100000"/>
-              <a:buChar char="•"/>
-            </a:pPr>
-            <a:r>
-              <a:rPr lang="en-US" sz="1100" b="1" dirty="0">
-                <a:solidFill>
-                  <a:srgbClr val="333333"/>
-                </a:solidFill>
-              </a:rPr>
-              <a:t>Result: 33/36 significant after correction</a:t>
+              <a:t>Corrected for 36 tests (Benjamini-Hochberg FDR 5%)</a:t>
             </a:r>
             <a:endParaRPr lang="en-US" sz="1100" dirty="0"/>
           </a:p>
@@ -2650,7 +5025,7 @@
                   <a:srgbClr val="1B5E3B"/>
                 </a:solidFill>
               </a:rPr>
-              <a:t>The 4 formant winners: p ≈ 0</a:t>
+              <a:t>Result: 33/36 significant. The 4 formant winners: p ≈ 0</a:t>
             </a:r>
             <a:endParaRPr lang="en-US" sz="1100" dirty="0"/>
           </a:p>
@@ -2658,18 +5033,18 @@
       </p:sp>
       <p:sp>
         <p:nvSpPr>
-          <p:cNvPr id="8" name="Shape 6"/>
+          <p:cNvPr id="7" name="Shape 5"/>
           <p:cNvSpPr/>
           <p:nvPr/>
         </p:nvSpPr>
         <p:spPr>
           <a:xfrm>
             <a:off x="6217920" y="1005840"/>
-            <a:ext cx="5669280" cy="2011680"/>
+            <a:ext cx="5669280" cy="1645920"/>
           </a:xfrm>
           <a:prstGeom prst="roundRect">
             <a:avLst>
-              <a:gd name="adj" fmla="val 4545"/>
+              <a:gd name="adj" fmla="val 5556"/>
             </a:avLst>
           </a:prstGeom>
           <a:solidFill>
@@ -2685,14 +5060,14 @@
       </p:sp>
       <p:sp>
         <p:nvSpPr>
-          <p:cNvPr id="9" name="Text 7"/>
+          <p:cNvPr id="8" name="Text 6"/>
           <p:cNvSpPr/>
           <p:nvPr/>
         </p:nvSpPr>
         <p:spPr>
           <a:xfrm>
             <a:off x="6400800" y="1051560"/>
-            <a:ext cx="5303520" cy="274320"/>
+            <a:ext cx="5303520" cy="228600"/>
           </a:xfrm>
           <a:prstGeom prst="rect">
             <a:avLst/>
@@ -2721,14 +5096,14 @@
       </p:sp>
       <p:sp>
         <p:nvSpPr>
-          <p:cNvPr id="10" name="Text 8"/>
+          <p:cNvPr id="9" name="Text 7"/>
           <p:cNvSpPr/>
           <p:nvPr/>
         </p:nvSpPr>
         <p:spPr>
           <a:xfrm>
             <a:off x="6400800" y="1325880"/>
-            <a:ext cx="5303520" cy="182880"/>
+            <a:ext cx="5303520" cy="1097280"/>
           </a:xfrm>
           <a:prstGeom prst="rect">
             <a:avLst/>
@@ -2740,42 +5115,6 @@
           <a:bodyPr wrap="square" rtlCol="0" anchor="ctr"/>
           <a:lstStyle/>
           <a:p>
-            <a:pPr indent="0" marL="0">
-              <a:buNone/>
-            </a:pPr>
-            <a:r>
-              <a:rPr lang="en-US" sz="1100" i="1" dirty="0">
-                <a:solidFill>
-                  <a:srgbClr val="777777"/>
-                </a:solidFill>
-              </a:rPr>
-              <a:t>Is the gap big enough to matter in practice?</a:t>
-            </a:r>
-            <a:endParaRPr lang="en-US" sz="1100" dirty="0"/>
-          </a:p>
-        </p:txBody>
-      </p:sp>
-      <p:sp>
-        <p:nvSpPr>
-          <p:cNvPr id="11" name="Text 9"/>
-          <p:cNvSpPr/>
-          <p:nvPr/>
-        </p:nvSpPr>
-        <p:spPr>
-          <a:xfrm>
-            <a:off x="6400800" y="1554480"/>
-            <a:ext cx="5303520" cy="1188720"/>
-          </a:xfrm>
-          <a:prstGeom prst="rect">
-            <a:avLst/>
-          </a:prstGeom>
-          <a:noFill/>
-          <a:ln/>
-        </p:spPr>
-        <p:txBody>
-          <a:bodyPr wrap="square" rtlCol="0" anchor="ctr"/>
-          <a:lstStyle/>
-          <a:p>
             <a:pPr marL="342900" indent="-342900">
               <a:buSzPct val="100000"/>
               <a:buChar char="•"/>
@@ -2786,7 +5125,7 @@
                   <a:srgbClr val="333333"/>
                 </a:solidFill>
               </a:rPr>
-              <a:t>With 25,000 files, even tiny gaps are 'significant'</a:t>
+              <a:t>25,000 files → even tiny gaps are 'significant'</a:t>
             </a:r>
             <a:endParaRPr lang="en-US" sz="1100" dirty="0"/>
           </a:p>
@@ -2801,22 +5140,7 @@
                   <a:srgbClr val="333333"/>
                 </a:solidFill>
               </a:rPr>
-              <a:t>Effect size = practical importance</a:t>
-            </a:r>
-            <a:endParaRPr lang="en-US" sz="1100" dirty="0"/>
-          </a:p>
-          <a:p>
-            <a:pPr marL="342900" indent="-342900">
-              <a:buSzPct val="100000"/>
-              <a:buChar char="•"/>
-            </a:pPr>
-            <a:r>
-              <a:rPr lang="en-US" sz="1100" b="1" dirty="0">
-                <a:solidFill>
-                  <a:srgbClr val="333333"/>
-                </a:solidFill>
-              </a:rPr>
-              <a:t>Only 4 features have LARGE effects (d &gt; 0.8):</a:t>
+              <a:t>Effect size measures practical importance</a:t>
             </a:r>
             <a:endParaRPr lang="en-US" sz="1100" dirty="0"/>
           </a:p>
@@ -2831,7 +5155,7 @@
                   <a:srgbClr val="1B5E3B"/>
                 </a:solidFill>
               </a:rPr>
-              <a:t>F1_mean (1.48), F1_bw (1.32), F1F2 (1.29), F1_std (1.13)</a:t>
+              <a:t>Only 4 LARGE (d &gt; 0.8): F1_mean, F1_bw, F1F2, F1_std</a:t>
             </a:r>
             <a:endParaRPr lang="en-US" sz="1100" dirty="0"/>
           </a:p>
@@ -2839,7 +5163,7 @@
       </p:sp>
       <p:pic>
         <p:nvPicPr>
-          <p:cNvPr id="12" name="Image 0" descr="/home/lab2208/Documents/df_detection/docs/presentation_figures/step3_effect_sizes_v2.png">    </p:cNvPr>
+          <p:cNvPr id="10" name="Image 0" descr="/home/lab2208/Documents/df_detection/docs/presentation_figures/step3_effect_sizes_v2.png">    </p:cNvPr>
           <p:cNvPicPr>
             <a:picLocks noChangeAspect="1"/>
           </p:cNvPicPr>
@@ -2853,8 +5177,8 @@
         </p:blipFill>
         <p:spPr>
           <a:xfrm>
-            <a:off x="274320" y="3200400"/>
-            <a:ext cx="11430000" cy="3383280"/>
+            <a:off x="274320" y="2834640"/>
+            <a:ext cx="11430000" cy="3840480"/>
           </a:xfrm>
           <a:prstGeom prst="rect">
             <a:avLst/>
@@ -2947,7 +5271,7 @@
               <a:buNone/>
             </a:pPr>
             <a:r>
-              <a:rPr lang="en-US" sz="2800" b="1" dirty="0">
+              <a:rPr lang="en-US" sz="3200" b="1" dirty="0">
                 <a:solidFill>
                   <a:srgbClr val="1B5E3B"/>
                 </a:solidFill>
@@ -2955,36 +5279,12 @@
                 <a:ea typeface="Georgia" pitchFamily="34" charset="-122"/>
                 <a:cs typeface="Georgia" pitchFamily="34" charset="-120"/>
               </a:rPr>
-              <a:t>The 4 Winning Features + Redundancy Check</a:t>
-            </a:r>
-            <a:endParaRPr lang="en-US" sz="2800" dirty="0"/>
+              <a:t>The 4 Winning Features</a:t>
+            </a:r>
+            <a:endParaRPr lang="en-US" sz="3200" dirty="0"/>
           </a:p>
         </p:txBody>
       </p:sp>
-      <p:pic>
-        <p:nvPicPr>
-          <p:cNvPr id="4" name="Image 0" descr="/home/lab2208/Documents/df_detection/docs/presentation_figures/step4_correlation_pca_v2.png">    </p:cNvPr>
-          <p:cNvPicPr>
-            <a:picLocks noChangeAspect="1"/>
-          </p:cNvPicPr>
-          <p:nvPr/>
-        </p:nvPicPr>
-        <p:blipFill>
-          <a:blip r:embed="rId1"/>
-          <a:stretch>
-            <a:fillRect/>
-          </a:stretch>
-        </p:blipFill>
-        <p:spPr>
-          <a:xfrm>
-            <a:off x="274320" y="914400"/>
-            <a:ext cx="11430000" cy="5029200"/>
-          </a:xfrm>
-          <a:prstGeom prst="rect">
-            <a:avLst/>
-          </a:prstGeom>
-        </p:spPr>
-      </p:pic>
       <p:graphicFrame>
         <p:nvGraphicFramePr>
           <p:cNvPr id="6" name="Table 0"/>
@@ -3000,21 +5300,22 @@
           </p:nvPr>
         </p:nvGraphicFramePr>
         <p:xfrm>
-          <a:off x="274320" y="5943600"/>
-          <a:ext cx="11430000" cy="914400"/>
+          <a:off x="457200" y="1188720"/>
+          <a:ext cx="10972800" cy="914400"/>
         </p:xfrm>
         <a:graphic>
           <a:graphicData uri="http://schemas.openxmlformats.org/drawingml/2006/table">
             <a:tbl>
               <a:tblPr/>
               <a:tblGrid>
-                <a:gridCol w="1645920"/>
-                <a:gridCol w="2286000"/>
-                <a:gridCol w="2286000"/>
+                <a:gridCol w="1828800"/>
+                <a:gridCol w="2011680"/>
+                <a:gridCol w="2011680"/>
+                <a:gridCol w="1188720"/>
+                <a:gridCol w="1828800"/>
                 <a:gridCol w="1371600"/>
-                <a:gridCol w="1645920"/>
               </a:tblGrid>
-              <a:tr h="0">
+              <a:tr h="457200">
                 <a:tc>
                   <a:txBody>
                     <a:bodyPr/>
@@ -3024,14 +5325,14 @@
                         <a:buNone/>
                       </a:pPr>
                       <a:r>
-                        <a:rPr lang="en-US" sz="1000" b="1" dirty="0">
+                        <a:rPr lang="en-US" sz="1400" b="1" dirty="0">
                           <a:solidFill>
                             <a:srgbClr val="FFFFFF"/>
                           </a:solidFill>
                         </a:rPr>
                         <a:t>Feature</a:t>
                       </a:r>
-                      <a:endParaRPr lang="en-US" sz="1000" dirty="0"/>
+                      <a:endParaRPr lang="en-US" sz="1400" dirty="0"/>
                     </a:p>
                   </a:txBody>
                   <a:tcPr marL="91440" marR="91440" marT="45720" marB="45720">
@@ -3085,14 +5386,14 @@
                         <a:buNone/>
                       </a:pPr>
                       <a:r>
-                        <a:rPr lang="en-US" sz="1000" b="1" dirty="0">
+                        <a:rPr lang="en-US" sz="1400" b="1" dirty="0">
                           <a:solidFill>
                             <a:srgbClr val="FFFFFF"/>
                           </a:solidFill>
                         </a:rPr>
                         <a:t>Real (avg ± spread)</a:t>
                       </a:r>
-                      <a:endParaRPr lang="en-US" sz="1000" dirty="0"/>
+                      <a:endParaRPr lang="en-US" sz="1400" dirty="0"/>
                     </a:p>
                   </a:txBody>
                   <a:tcPr marL="91440" marR="91440" marT="45720" marB="45720">
@@ -3146,14 +5447,14 @@
                         <a:buNone/>
                       </a:pPr>
                       <a:r>
-                        <a:rPr lang="en-US" sz="1000" b="1" dirty="0">
+                        <a:rPr lang="en-US" sz="1400" b="1" dirty="0">
                           <a:solidFill>
                             <a:srgbClr val="FFFFFF"/>
                           </a:solidFill>
                         </a:rPr>
                         <a:t>Fake (avg ± spread)</a:t>
                       </a:r>
-                      <a:endParaRPr lang="en-US" sz="1000" dirty="0"/>
+                      <a:endParaRPr lang="en-US" sz="1400" dirty="0"/>
                     </a:p>
                   </a:txBody>
                   <a:tcPr marL="91440" marR="91440" marT="45720" marB="45720">
@@ -3207,14 +5508,14 @@
                         <a:buNone/>
                       </a:pPr>
                       <a:r>
-                        <a:rPr lang="en-US" sz="1000" b="1" dirty="0">
+                        <a:rPr lang="en-US" sz="1400" b="1" dirty="0">
                           <a:solidFill>
                             <a:srgbClr val="FFFFFF"/>
                           </a:solidFill>
                         </a:rPr>
                         <a:t>Gap</a:t>
                       </a:r>
-                      <a:endParaRPr lang="en-US" sz="1000" dirty="0"/>
+                      <a:endParaRPr lang="en-US" sz="1400" dirty="0"/>
                     </a:p>
                   </a:txBody>
                   <a:tcPr marL="91440" marR="91440" marT="45720" marB="45720">
@@ -3268,14 +5569,14 @@
                         <a:buNone/>
                       </a:pPr>
                       <a:r>
-                        <a:rPr lang="en-US" sz="1000" b="1" dirty="0">
+                        <a:rPr lang="en-US" sz="1400" b="1" dirty="0">
                           <a:solidFill>
                             <a:srgbClr val="FFFFFF"/>
                           </a:solidFill>
                         </a:rPr>
-                        <a:t>Effect (d)</a:t>
+                        <a:t>Effect size (d)</a:t>
                       </a:r>
-                      <a:endParaRPr lang="en-US" sz="1000" dirty="0"/>
+                      <a:endParaRPr lang="en-US" sz="1400" dirty="0"/>
                     </a:p>
                   </a:txBody>
                   <a:tcPr marL="91440" marR="91440" marT="45720" marB="45720">
@@ -3320,8 +5621,6 @@
                     </a:solidFill>
                   </a:tcPr>
                 </a:tc>
-              </a:tr>
-              <a:tr h="0">
                 <a:tc>
                   <a:txBody>
                     <a:bodyPr/>
@@ -3331,14 +5630,77 @@
                         <a:buNone/>
                       </a:pPr>
                       <a:r>
-                        <a:rPr lang="en-US" sz="1000" dirty="0">
+                        <a:rPr lang="en-US" sz="1400" b="1" dirty="0">
+                          <a:solidFill>
+                            <a:srgbClr val="FFFFFF"/>
+                          </a:solidFill>
+                        </a:rPr>
+                        <a:t>Error rate alone</a:t>
+                      </a:r>
+                      <a:endParaRPr lang="en-US" sz="1400" dirty="0"/>
+                    </a:p>
+                  </a:txBody>
+                  <a:tcPr marL="91440" marR="91440" marT="45720" marB="45720">
+                    <a:lnL w="6350" cap="flat" cmpd="sng" algn="ctr">
+                      <a:solidFill>
+                        <a:srgbClr val="DDDDDD"/>
+                      </a:solidFill>
+                      <a:prstDash val="solid"/>
+                      <a:round/>
+                      <a:headEnd type="none" w="med" len="med"/>
+                      <a:tailEnd type="none" w="med" len="med"/>
+                    </a:lnL>
+                    <a:lnR w="6350" cap="flat" cmpd="sng" algn="ctr">
+                      <a:solidFill>
+                        <a:srgbClr val="DDDDDD"/>
+                      </a:solidFill>
+                      <a:prstDash val="solid"/>
+                      <a:round/>
+                      <a:headEnd type="none" w="med" len="med"/>
+                      <a:tailEnd type="none" w="med" len="med"/>
+                    </a:lnR>
+                    <a:lnT w="6350" cap="flat" cmpd="sng" algn="ctr">
+                      <a:solidFill>
+                        <a:srgbClr val="DDDDDD"/>
+                      </a:solidFill>
+                      <a:prstDash val="solid"/>
+                      <a:round/>
+                      <a:headEnd type="none" w="med" len="med"/>
+                      <a:tailEnd type="none" w="med" len="med"/>
+                    </a:lnT>
+                    <a:lnB w="6350" cap="flat" cmpd="sng" algn="ctr">
+                      <a:solidFill>
+                        <a:srgbClr val="DDDDDD"/>
+                      </a:solidFill>
+                      <a:prstDash val="solid"/>
+                      <a:round/>
+                      <a:headEnd type="none" w="med" len="med"/>
+                      <a:tailEnd type="none" w="med" len="med"/>
+                    </a:lnB>
+                    <a:solidFill>
+                      <a:srgbClr val="1B5E3B"/>
+                    </a:solidFill>
+                  </a:tcPr>
+                </a:tc>
+              </a:tr>
+              <a:tr h="457200">
+                <a:tc>
+                  <a:txBody>
+                    <a:bodyPr/>
+                    <a:lstStyle/>
+                    <a:p>
+                      <a:pPr algn="ctr" indent="0" marL="0">
+                        <a:buNone/>
+                      </a:pPr>
+                      <a:r>
+                        <a:rPr lang="en-US" sz="1400" dirty="0">
                           <a:solidFill>
                             <a:srgbClr val="000000"/>
                           </a:solidFill>
                         </a:rPr>
                         <a:t>F1 bandwidth</a:t>
                       </a:r>
-                      <a:endParaRPr lang="en-US" sz="1000" dirty="0"/>
+                      <a:endParaRPr lang="en-US" sz="1400" dirty="0"/>
                     </a:p>
                   </a:txBody>
                   <a:tcPr marL="91440" marR="91440" marT="45720" marB="45720">
@@ -3389,14 +5751,14 @@
                         <a:buNone/>
                       </a:pPr>
                       <a:r>
-                        <a:rPr lang="en-US" sz="1000" dirty="0">
+                        <a:rPr lang="en-US" sz="1400" dirty="0">
                           <a:solidFill>
                             <a:srgbClr val="000000"/>
                           </a:solidFill>
                         </a:rPr>
                         <a:t>515 ± 87 Hz</a:t>
                       </a:r>
-                      <a:endParaRPr lang="en-US" sz="1000" dirty="0"/>
+                      <a:endParaRPr lang="en-US" sz="1400" dirty="0"/>
                     </a:p>
                   </a:txBody>
                   <a:tcPr marL="91440" marR="91440" marT="45720" marB="45720">
@@ -3447,14 +5809,14 @@
                         <a:buNone/>
                       </a:pPr>
                       <a:r>
-                        <a:rPr lang="en-US" sz="1000" dirty="0">
+                        <a:rPr lang="en-US" sz="1400" dirty="0">
                           <a:solidFill>
                             <a:srgbClr val="000000"/>
                           </a:solidFill>
                         </a:rPr>
                         <a:t>361 ± 120 Hz</a:t>
                       </a:r>
-                      <a:endParaRPr lang="en-US" sz="1000" dirty="0"/>
+                      <a:endParaRPr lang="en-US" sz="1400" dirty="0"/>
                     </a:p>
                   </a:txBody>
                   <a:tcPr marL="91440" marR="91440" marT="45720" marB="45720">
@@ -3505,14 +5867,14 @@
                         <a:buNone/>
                       </a:pPr>
                       <a:r>
-                        <a:rPr lang="en-US" sz="1000" dirty="0">
+                        <a:rPr lang="en-US" sz="1400" dirty="0">
                           <a:solidFill>
                             <a:srgbClr val="000000"/>
                           </a:solidFill>
                         </a:rPr>
                         <a:t>154 Hz</a:t>
                       </a:r>
-                      <a:endParaRPr lang="en-US" sz="1000" dirty="0"/>
+                      <a:endParaRPr lang="en-US" sz="1400" dirty="0"/>
                     </a:p>
                   </a:txBody>
                   <a:tcPr marL="91440" marR="91440" marT="45720" marB="45720">
@@ -3563,74 +5925,14 @@
                         <a:buNone/>
                       </a:pPr>
                       <a:r>
-                        <a:rPr lang="en-US" sz="1000" dirty="0">
+                        <a:rPr lang="en-US" sz="1400" dirty="0">
                           <a:solidFill>
                             <a:srgbClr val="000000"/>
                           </a:solidFill>
                         </a:rPr>
                         <a:t>1.32 (LARGE)</a:t>
                       </a:r>
-                      <a:endParaRPr lang="en-US" sz="1000" dirty="0"/>
-                    </a:p>
-                  </a:txBody>
-                  <a:tcPr marL="91440" marR="91440" marT="45720" marB="45720">
-                    <a:lnL w="6350" cap="flat" cmpd="sng" algn="ctr">
-                      <a:solidFill>
-                        <a:srgbClr val="DDDDDD"/>
-                      </a:solidFill>
-                      <a:prstDash val="solid"/>
-                      <a:round/>
-                      <a:headEnd type="none" w="med" len="med"/>
-                      <a:tailEnd type="none" w="med" len="med"/>
-                    </a:lnL>
-                    <a:lnR w="6350" cap="flat" cmpd="sng" algn="ctr">
-                      <a:solidFill>
-                        <a:srgbClr val="DDDDDD"/>
-                      </a:solidFill>
-                      <a:prstDash val="solid"/>
-                      <a:round/>
-                      <a:headEnd type="none" w="med" len="med"/>
-                      <a:tailEnd type="none" w="med" len="med"/>
-                    </a:lnR>
-                    <a:lnT w="6350" cap="flat" cmpd="sng" algn="ctr">
-                      <a:solidFill>
-                        <a:srgbClr val="DDDDDD"/>
-                      </a:solidFill>
-                      <a:prstDash val="solid"/>
-                      <a:round/>
-                      <a:headEnd type="none" w="med" len="med"/>
-                      <a:tailEnd type="none" w="med" len="med"/>
-                    </a:lnT>
-                    <a:lnB w="6350" cap="flat" cmpd="sng" algn="ctr">
-                      <a:solidFill>
-                        <a:srgbClr val="DDDDDD"/>
-                      </a:solidFill>
-                      <a:prstDash val="solid"/>
-                      <a:round/>
-                      <a:headEnd type="none" w="med" len="med"/>
-                      <a:tailEnd type="none" w="med" len="med"/>
-                    </a:lnB>
-                  </a:tcPr>
-                </a:tc>
-              </a:tr>
-              <a:tr h="0">
-                <a:tc>
-                  <a:txBody>
-                    <a:bodyPr/>
-                    <a:lstStyle/>
-                    <a:p>
-                      <a:pPr algn="ctr" indent="0" marL="0">
-                        <a:buNone/>
-                      </a:pPr>
-                      <a:r>
-                        <a:rPr lang="en-US" sz="1000" dirty="0">
-                          <a:solidFill>
-                            <a:srgbClr val="000000"/>
-                          </a:solidFill>
-                        </a:rPr>
-                        <a:t>F1 mean</a:t>
-                      </a:r>
-                      <a:endParaRPr lang="en-US" sz="1000" dirty="0"/>
+                      <a:endParaRPr lang="en-US" sz="1400" dirty="0"/>
                     </a:p>
                   </a:txBody>
                   <a:tcPr marL="91440" marR="91440" marT="45720" marB="45720">
@@ -3681,14 +5983,74 @@
                         <a:buNone/>
                       </a:pPr>
                       <a:r>
-                        <a:rPr lang="en-US" sz="1000" dirty="0">
+                        <a:rPr lang="en-US" sz="1400" dirty="0">
                           <a:solidFill>
                             <a:srgbClr val="000000"/>
                           </a:solidFill>
                         </a:rPr>
-                        <a:t>666 ± 71 Hz</a:t>
+                        <a:t>18.0%</a:t>
                       </a:r>
-                      <a:endParaRPr lang="en-US" sz="1000" dirty="0"/>
+                      <a:endParaRPr lang="en-US" sz="1400" dirty="0"/>
+                    </a:p>
+                  </a:txBody>
+                  <a:tcPr marL="91440" marR="91440" marT="45720" marB="45720">
+                    <a:lnL w="6350" cap="flat" cmpd="sng" algn="ctr">
+                      <a:solidFill>
+                        <a:srgbClr val="DDDDDD"/>
+                      </a:solidFill>
+                      <a:prstDash val="solid"/>
+                      <a:round/>
+                      <a:headEnd type="none" w="med" len="med"/>
+                      <a:tailEnd type="none" w="med" len="med"/>
+                    </a:lnL>
+                    <a:lnR w="6350" cap="flat" cmpd="sng" algn="ctr">
+                      <a:solidFill>
+                        <a:srgbClr val="DDDDDD"/>
+                      </a:solidFill>
+                      <a:prstDash val="solid"/>
+                      <a:round/>
+                      <a:headEnd type="none" w="med" len="med"/>
+                      <a:tailEnd type="none" w="med" len="med"/>
+                    </a:lnR>
+                    <a:lnT w="6350" cap="flat" cmpd="sng" algn="ctr">
+                      <a:solidFill>
+                        <a:srgbClr val="DDDDDD"/>
+                      </a:solidFill>
+                      <a:prstDash val="solid"/>
+                      <a:round/>
+                      <a:headEnd type="none" w="med" len="med"/>
+                      <a:tailEnd type="none" w="med" len="med"/>
+                    </a:lnT>
+                    <a:lnB w="6350" cap="flat" cmpd="sng" algn="ctr">
+                      <a:solidFill>
+                        <a:srgbClr val="DDDDDD"/>
+                      </a:solidFill>
+                      <a:prstDash val="solid"/>
+                      <a:round/>
+                      <a:headEnd type="none" w="med" len="med"/>
+                      <a:tailEnd type="none" w="med" len="med"/>
+                    </a:lnB>
+                  </a:tcPr>
+                </a:tc>
+              </a:tr>
+              <a:tr h="457200">
+                <a:tc>
+                  <a:txBody>
+                    <a:bodyPr/>
+                    <a:lstStyle/>
+                    <a:p>
+                      <a:pPr algn="ctr" indent="0" marL="0">
+                        <a:buNone/>
+                      </a:pPr>
+                      <a:r>
+                        <a:rPr lang="en-US" sz="1400" dirty="0">
+                          <a:solidFill>
+                            <a:srgbClr val="000000"/>
+                          </a:solidFill>
+                        </a:rPr>
+                        <a:t>F1 mean freq</a:t>
+                      </a:r>
+                      <a:endParaRPr lang="en-US" sz="1400" dirty="0"/>
                     </a:p>
                   </a:txBody>
                   <a:tcPr marL="91440" marR="91440" marT="45720" marB="45720">
@@ -3739,14 +6101,14 @@
                         <a:buNone/>
                       </a:pPr>
                       <a:r>
-                        <a:rPr lang="en-US" sz="1000" dirty="0">
+                        <a:rPr lang="en-US" sz="1400" dirty="0">
                           <a:solidFill>
                             <a:srgbClr val="000000"/>
                           </a:solidFill>
                         </a:rPr>
-                        <a:t>553 ± 77 Hz</a:t>
+                        <a:t>666 ± 71 Hz</a:t>
                       </a:r>
-                      <a:endParaRPr lang="en-US" sz="1000" dirty="0"/>
+                      <a:endParaRPr lang="en-US" sz="1400" dirty="0"/>
                     </a:p>
                   </a:txBody>
                   <a:tcPr marL="91440" marR="91440" marT="45720" marB="45720">
@@ -3797,14 +6159,14 @@
                         <a:buNone/>
                       </a:pPr>
                       <a:r>
-                        <a:rPr lang="en-US" sz="1000" dirty="0">
+                        <a:rPr lang="en-US" sz="1400" dirty="0">
                           <a:solidFill>
                             <a:srgbClr val="000000"/>
                           </a:solidFill>
                         </a:rPr>
-                        <a:t>113 Hz</a:t>
+                        <a:t>553 ± 77 Hz</a:t>
                       </a:r>
-                      <a:endParaRPr lang="en-US" sz="1000" dirty="0"/>
+                      <a:endParaRPr lang="en-US" sz="1400" dirty="0"/>
                     </a:p>
                   </a:txBody>
                   <a:tcPr marL="91440" marR="91440" marT="45720" marB="45720">
@@ -3855,74 +6217,14 @@
                         <a:buNone/>
                       </a:pPr>
                       <a:r>
-                        <a:rPr lang="en-US" sz="1000" dirty="0">
+                        <a:rPr lang="en-US" sz="1400" dirty="0">
                           <a:solidFill>
                             <a:srgbClr val="000000"/>
                           </a:solidFill>
                         </a:rPr>
-                        <a:t>1.48 (LARGE)</a:t>
+                        <a:t>113 Hz</a:t>
                       </a:r>
-                      <a:endParaRPr lang="en-US" sz="1000" dirty="0"/>
-                    </a:p>
-                  </a:txBody>
-                  <a:tcPr marL="91440" marR="91440" marT="45720" marB="45720">
-                    <a:lnL w="6350" cap="flat" cmpd="sng" algn="ctr">
-                      <a:solidFill>
-                        <a:srgbClr val="DDDDDD"/>
-                      </a:solidFill>
-                      <a:prstDash val="solid"/>
-                      <a:round/>
-                      <a:headEnd type="none" w="med" len="med"/>
-                      <a:tailEnd type="none" w="med" len="med"/>
-                    </a:lnL>
-                    <a:lnR w="6350" cap="flat" cmpd="sng" algn="ctr">
-                      <a:solidFill>
-                        <a:srgbClr val="DDDDDD"/>
-                      </a:solidFill>
-                      <a:prstDash val="solid"/>
-                      <a:round/>
-                      <a:headEnd type="none" w="med" len="med"/>
-                      <a:tailEnd type="none" w="med" len="med"/>
-                    </a:lnR>
-                    <a:lnT w="6350" cap="flat" cmpd="sng" algn="ctr">
-                      <a:solidFill>
-                        <a:srgbClr val="DDDDDD"/>
-                      </a:solidFill>
-                      <a:prstDash val="solid"/>
-                      <a:round/>
-                      <a:headEnd type="none" w="med" len="med"/>
-                      <a:tailEnd type="none" w="med" len="med"/>
-                    </a:lnT>
-                    <a:lnB w="6350" cap="flat" cmpd="sng" algn="ctr">
-                      <a:solidFill>
-                        <a:srgbClr val="DDDDDD"/>
-                      </a:solidFill>
-                      <a:prstDash val="solid"/>
-                      <a:round/>
-                      <a:headEnd type="none" w="med" len="med"/>
-                      <a:tailEnd type="none" w="med" len="med"/>
-                    </a:lnB>
-                  </a:tcPr>
-                </a:tc>
-              </a:tr>
-              <a:tr h="0">
-                <a:tc>
-                  <a:txBody>
-                    <a:bodyPr/>
-                    <a:lstStyle/>
-                    <a:p>
-                      <a:pPr algn="ctr" indent="0" marL="0">
-                        <a:buNone/>
-                      </a:pPr>
-                      <a:r>
-                        <a:rPr lang="en-US" sz="1000" dirty="0">
-                          <a:solidFill>
-                            <a:srgbClr val="000000"/>
-                          </a:solidFill>
-                        </a:rPr>
-                        <a:t>F1 variability</a:t>
-                      </a:r>
-                      <a:endParaRPr lang="en-US" sz="1000" dirty="0"/>
+                      <a:endParaRPr lang="en-US" sz="1400" dirty="0"/>
                     </a:p>
                   </a:txBody>
                   <a:tcPr marL="91440" marR="91440" marT="45720" marB="45720">
@@ -3973,14 +6275,14 @@
                         <a:buNone/>
                       </a:pPr>
                       <a:r>
-                        <a:rPr lang="en-US" sz="1000" dirty="0">
+                        <a:rPr lang="en-US" sz="1400" dirty="0">
                           <a:solidFill>
                             <a:srgbClr val="000000"/>
                           </a:solidFill>
                         </a:rPr>
-                        <a:t>272 ± 25 Hz</a:t>
+                        <a:t>1.48 (LARGE)</a:t>
                       </a:r>
-                      <a:endParaRPr lang="en-US" sz="1000" dirty="0"/>
+                      <a:endParaRPr lang="en-US" sz="1400" dirty="0"/>
                     </a:p>
                   </a:txBody>
                   <a:tcPr marL="91440" marR="91440" marT="45720" marB="45720">
@@ -4031,14 +6333,74 @@
                         <a:buNone/>
                       </a:pPr>
                       <a:r>
-                        <a:rPr lang="en-US" sz="1000" dirty="0">
+                        <a:rPr lang="en-US" sz="1400" dirty="0">
                           <a:solidFill>
                             <a:srgbClr val="000000"/>
                           </a:solidFill>
                         </a:rPr>
-                        <a:t>226 ± 42 Hz</a:t>
+                        <a:t>19.5%</a:t>
                       </a:r>
-                      <a:endParaRPr lang="en-US" sz="1000" dirty="0"/>
+                      <a:endParaRPr lang="en-US" sz="1400" dirty="0"/>
+                    </a:p>
+                  </a:txBody>
+                  <a:tcPr marL="91440" marR="91440" marT="45720" marB="45720">
+                    <a:lnL w="6350" cap="flat" cmpd="sng" algn="ctr">
+                      <a:solidFill>
+                        <a:srgbClr val="DDDDDD"/>
+                      </a:solidFill>
+                      <a:prstDash val="solid"/>
+                      <a:round/>
+                      <a:headEnd type="none" w="med" len="med"/>
+                      <a:tailEnd type="none" w="med" len="med"/>
+                    </a:lnL>
+                    <a:lnR w="6350" cap="flat" cmpd="sng" algn="ctr">
+                      <a:solidFill>
+                        <a:srgbClr val="DDDDDD"/>
+                      </a:solidFill>
+                      <a:prstDash val="solid"/>
+                      <a:round/>
+                      <a:headEnd type="none" w="med" len="med"/>
+                      <a:tailEnd type="none" w="med" len="med"/>
+                    </a:lnR>
+                    <a:lnT w="6350" cap="flat" cmpd="sng" algn="ctr">
+                      <a:solidFill>
+                        <a:srgbClr val="DDDDDD"/>
+                      </a:solidFill>
+                      <a:prstDash val="solid"/>
+                      <a:round/>
+                      <a:headEnd type="none" w="med" len="med"/>
+                      <a:tailEnd type="none" w="med" len="med"/>
+                    </a:lnT>
+                    <a:lnB w="6350" cap="flat" cmpd="sng" algn="ctr">
+                      <a:solidFill>
+                        <a:srgbClr val="DDDDDD"/>
+                      </a:solidFill>
+                      <a:prstDash val="solid"/>
+                      <a:round/>
+                      <a:headEnd type="none" w="med" len="med"/>
+                      <a:tailEnd type="none" w="med" len="med"/>
+                    </a:lnB>
+                  </a:tcPr>
+                </a:tc>
+              </a:tr>
+              <a:tr h="457200">
+                <a:tc>
+                  <a:txBody>
+                    <a:bodyPr/>
+                    <a:lstStyle/>
+                    <a:p>
+                      <a:pPr algn="ctr" indent="0" marL="0">
+                        <a:buNone/>
+                      </a:pPr>
+                      <a:r>
+                        <a:rPr lang="en-US" sz="1400" dirty="0">
+                          <a:solidFill>
+                            <a:srgbClr val="000000"/>
+                          </a:solidFill>
+                        </a:rPr>
+                        <a:t>F1 variability</a:t>
+                      </a:r>
+                      <a:endParaRPr lang="en-US" sz="1400" dirty="0"/>
                     </a:p>
                   </a:txBody>
                   <a:tcPr marL="91440" marR="91440" marT="45720" marB="45720">
@@ -4089,14 +6451,14 @@
                         <a:buNone/>
                       </a:pPr>
                       <a:r>
-                        <a:rPr lang="en-US" sz="1000" dirty="0">
+                        <a:rPr lang="en-US" sz="1400" dirty="0">
                           <a:solidFill>
                             <a:srgbClr val="000000"/>
                           </a:solidFill>
                         </a:rPr>
-                        <a:t>46 Hz</a:t>
+                        <a:t>272 ± 25 Hz</a:t>
                       </a:r>
-                      <a:endParaRPr lang="en-US" sz="1000" dirty="0"/>
+                      <a:endParaRPr lang="en-US" sz="1400" dirty="0"/>
                     </a:p>
                   </a:txBody>
                   <a:tcPr marL="91440" marR="91440" marT="45720" marB="45720">
@@ -4147,74 +6509,14 @@
                         <a:buNone/>
                       </a:pPr>
                       <a:r>
-                        <a:rPr lang="en-US" sz="1000" dirty="0">
+                        <a:rPr lang="en-US" sz="1400" dirty="0">
                           <a:solidFill>
                             <a:srgbClr val="000000"/>
                           </a:solidFill>
                         </a:rPr>
-                        <a:t>1.13 (LARGE)</a:t>
+                        <a:t>226 ± 42 Hz</a:t>
                       </a:r>
-                      <a:endParaRPr lang="en-US" sz="1000" dirty="0"/>
-                    </a:p>
-                  </a:txBody>
-                  <a:tcPr marL="91440" marR="91440" marT="45720" marB="45720">
-                    <a:lnL w="6350" cap="flat" cmpd="sng" algn="ctr">
-                      <a:solidFill>
-                        <a:srgbClr val="DDDDDD"/>
-                      </a:solidFill>
-                      <a:prstDash val="solid"/>
-                      <a:round/>
-                      <a:headEnd type="none" w="med" len="med"/>
-                      <a:tailEnd type="none" w="med" len="med"/>
-                    </a:lnL>
-                    <a:lnR w="6350" cap="flat" cmpd="sng" algn="ctr">
-                      <a:solidFill>
-                        <a:srgbClr val="DDDDDD"/>
-                      </a:solidFill>
-                      <a:prstDash val="solid"/>
-                      <a:round/>
-                      <a:headEnd type="none" w="med" len="med"/>
-                      <a:tailEnd type="none" w="med" len="med"/>
-                    </a:lnR>
-                    <a:lnT w="6350" cap="flat" cmpd="sng" algn="ctr">
-                      <a:solidFill>
-                        <a:srgbClr val="DDDDDD"/>
-                      </a:solidFill>
-                      <a:prstDash val="solid"/>
-                      <a:round/>
-                      <a:headEnd type="none" w="med" len="med"/>
-                      <a:tailEnd type="none" w="med" len="med"/>
-                    </a:lnT>
-                    <a:lnB w="6350" cap="flat" cmpd="sng" algn="ctr">
-                      <a:solidFill>
-                        <a:srgbClr val="DDDDDD"/>
-                      </a:solidFill>
-                      <a:prstDash val="solid"/>
-                      <a:round/>
-                      <a:headEnd type="none" w="med" len="med"/>
-                      <a:tailEnd type="none" w="med" len="med"/>
-                    </a:lnB>
-                  </a:tcPr>
-                </a:tc>
-              </a:tr>
-              <a:tr h="0">
-                <a:tc>
-                  <a:txBody>
-                    <a:bodyPr/>
-                    <a:lstStyle/>
-                    <a:p>
-                      <a:pPr algn="ctr" indent="0" marL="0">
-                        <a:buNone/>
-                      </a:pPr>
-                      <a:r>
-                        <a:rPr lang="en-US" sz="1000" dirty="0">
-                          <a:solidFill>
-                            <a:srgbClr val="000000"/>
-                          </a:solidFill>
-                        </a:rPr>
-                        <a:t>F1/F2 ratio</a:t>
-                      </a:r>
-                      <a:endParaRPr lang="en-US" sz="1000" dirty="0"/>
+                      <a:endParaRPr lang="en-US" sz="1400" dirty="0"/>
                     </a:p>
                   </a:txBody>
                   <a:tcPr marL="91440" marR="91440" marT="45720" marB="45720">
@@ -4265,14 +6567,14 @@
                         <a:buNone/>
                       </a:pPr>
                       <a:r>
-                        <a:rPr lang="en-US" sz="1000" dirty="0">
+                        <a:rPr lang="en-US" sz="1400" dirty="0">
                           <a:solidFill>
                             <a:srgbClr val="000000"/>
                           </a:solidFill>
                         </a:rPr>
-                        <a:t>0.342 ± 0.033</a:t>
+                        <a:t>46 Hz</a:t>
                       </a:r>
-                      <a:endParaRPr lang="en-US" sz="1000" dirty="0"/>
+                      <a:endParaRPr lang="en-US" sz="1400" dirty="0"/>
                     </a:p>
                   </a:txBody>
                   <a:tcPr marL="91440" marR="91440" marT="45720" marB="45720">
@@ -4323,14 +6625,14 @@
                         <a:buNone/>
                       </a:pPr>
                       <a:r>
-                        <a:rPr lang="en-US" sz="1000" dirty="0">
+                        <a:rPr lang="en-US" sz="1400" dirty="0">
                           <a:solidFill>
                             <a:srgbClr val="000000"/>
                           </a:solidFill>
                         </a:rPr>
-                        <a:t>0.292 ± 0.039</a:t>
+                        <a:t>1.13 (LARGE)</a:t>
                       </a:r>
-                      <a:endParaRPr lang="en-US" sz="1000" dirty="0"/>
+                      <a:endParaRPr lang="en-US" sz="1400" dirty="0"/>
                     </a:p>
                   </a:txBody>
                   <a:tcPr marL="91440" marR="91440" marT="45720" marB="45720">
@@ -4381,14 +6683,74 @@
                         <a:buNone/>
                       </a:pPr>
                       <a:r>
-                        <a:rPr lang="en-US" sz="1000" dirty="0">
+                        <a:rPr lang="en-US" sz="1400" dirty="0">
                           <a:solidFill>
                             <a:srgbClr val="000000"/>
                           </a:solidFill>
                         </a:rPr>
-                        <a:t>0.050</a:t>
+                        <a:t>21.7%</a:t>
                       </a:r>
-                      <a:endParaRPr lang="en-US" sz="1000" dirty="0"/>
+                      <a:endParaRPr lang="en-US" sz="1400" dirty="0"/>
+                    </a:p>
+                  </a:txBody>
+                  <a:tcPr marL="91440" marR="91440" marT="45720" marB="45720">
+                    <a:lnL w="6350" cap="flat" cmpd="sng" algn="ctr">
+                      <a:solidFill>
+                        <a:srgbClr val="DDDDDD"/>
+                      </a:solidFill>
+                      <a:prstDash val="solid"/>
+                      <a:round/>
+                      <a:headEnd type="none" w="med" len="med"/>
+                      <a:tailEnd type="none" w="med" len="med"/>
+                    </a:lnL>
+                    <a:lnR w="6350" cap="flat" cmpd="sng" algn="ctr">
+                      <a:solidFill>
+                        <a:srgbClr val="DDDDDD"/>
+                      </a:solidFill>
+                      <a:prstDash val="solid"/>
+                      <a:round/>
+                      <a:headEnd type="none" w="med" len="med"/>
+                      <a:tailEnd type="none" w="med" len="med"/>
+                    </a:lnR>
+                    <a:lnT w="6350" cap="flat" cmpd="sng" algn="ctr">
+                      <a:solidFill>
+                        <a:srgbClr val="DDDDDD"/>
+                      </a:solidFill>
+                      <a:prstDash val="solid"/>
+                      <a:round/>
+                      <a:headEnd type="none" w="med" len="med"/>
+                      <a:tailEnd type="none" w="med" len="med"/>
+                    </a:lnT>
+                    <a:lnB w="6350" cap="flat" cmpd="sng" algn="ctr">
+                      <a:solidFill>
+                        <a:srgbClr val="DDDDDD"/>
+                      </a:solidFill>
+                      <a:prstDash val="solid"/>
+                      <a:round/>
+                      <a:headEnd type="none" w="med" len="med"/>
+                      <a:tailEnd type="none" w="med" len="med"/>
+                    </a:lnB>
+                  </a:tcPr>
+                </a:tc>
+              </a:tr>
+              <a:tr h="457200">
+                <a:tc>
+                  <a:txBody>
+                    <a:bodyPr/>
+                    <a:lstStyle/>
+                    <a:p>
+                      <a:pPr algn="ctr" indent="0" marL="0">
+                        <a:buNone/>
+                      </a:pPr>
+                      <a:r>
+                        <a:rPr lang="en-US" sz="1400" dirty="0">
+                          <a:solidFill>
+                            <a:srgbClr val="000000"/>
+                          </a:solidFill>
+                        </a:rPr>
+                        <a:t>F1/F2 ratio</a:t>
+                      </a:r>
+                      <a:endParaRPr lang="en-US" sz="1400" dirty="0"/>
                     </a:p>
                   </a:txBody>
                   <a:tcPr marL="91440" marR="91440" marT="45720" marB="45720">
@@ -4439,14 +6801,246 @@
                         <a:buNone/>
                       </a:pPr>
                       <a:r>
-                        <a:rPr lang="en-US" sz="1000" dirty="0">
+                        <a:rPr lang="en-US" sz="1400" dirty="0">
+                          <a:solidFill>
+                            <a:srgbClr val="000000"/>
+                          </a:solidFill>
+                        </a:rPr>
+                        <a:t>0.342 ± 0.033</a:t>
+                      </a:r>
+                      <a:endParaRPr lang="en-US" sz="1400" dirty="0"/>
+                    </a:p>
+                  </a:txBody>
+                  <a:tcPr marL="91440" marR="91440" marT="45720" marB="45720">
+                    <a:lnL w="6350" cap="flat" cmpd="sng" algn="ctr">
+                      <a:solidFill>
+                        <a:srgbClr val="DDDDDD"/>
+                      </a:solidFill>
+                      <a:prstDash val="solid"/>
+                      <a:round/>
+                      <a:headEnd type="none" w="med" len="med"/>
+                      <a:tailEnd type="none" w="med" len="med"/>
+                    </a:lnL>
+                    <a:lnR w="6350" cap="flat" cmpd="sng" algn="ctr">
+                      <a:solidFill>
+                        <a:srgbClr val="DDDDDD"/>
+                      </a:solidFill>
+                      <a:prstDash val="solid"/>
+                      <a:round/>
+                      <a:headEnd type="none" w="med" len="med"/>
+                      <a:tailEnd type="none" w="med" len="med"/>
+                    </a:lnR>
+                    <a:lnT w="6350" cap="flat" cmpd="sng" algn="ctr">
+                      <a:solidFill>
+                        <a:srgbClr val="DDDDDD"/>
+                      </a:solidFill>
+                      <a:prstDash val="solid"/>
+                      <a:round/>
+                      <a:headEnd type="none" w="med" len="med"/>
+                      <a:tailEnd type="none" w="med" len="med"/>
+                    </a:lnT>
+                    <a:lnB w="6350" cap="flat" cmpd="sng" algn="ctr">
+                      <a:solidFill>
+                        <a:srgbClr val="DDDDDD"/>
+                      </a:solidFill>
+                      <a:prstDash val="solid"/>
+                      <a:round/>
+                      <a:headEnd type="none" w="med" len="med"/>
+                      <a:tailEnd type="none" w="med" len="med"/>
+                    </a:lnB>
+                  </a:tcPr>
+                </a:tc>
+                <a:tc>
+                  <a:txBody>
+                    <a:bodyPr/>
+                    <a:lstStyle/>
+                    <a:p>
+                      <a:pPr algn="ctr" indent="0" marL="0">
+                        <a:buNone/>
+                      </a:pPr>
+                      <a:r>
+                        <a:rPr lang="en-US" sz="1400" dirty="0">
+                          <a:solidFill>
+                            <a:srgbClr val="000000"/>
+                          </a:solidFill>
+                        </a:rPr>
+                        <a:t>0.292 ± 0.039</a:t>
+                      </a:r>
+                      <a:endParaRPr lang="en-US" sz="1400" dirty="0"/>
+                    </a:p>
+                  </a:txBody>
+                  <a:tcPr marL="91440" marR="91440" marT="45720" marB="45720">
+                    <a:lnL w="6350" cap="flat" cmpd="sng" algn="ctr">
+                      <a:solidFill>
+                        <a:srgbClr val="DDDDDD"/>
+                      </a:solidFill>
+                      <a:prstDash val="solid"/>
+                      <a:round/>
+                      <a:headEnd type="none" w="med" len="med"/>
+                      <a:tailEnd type="none" w="med" len="med"/>
+                    </a:lnL>
+                    <a:lnR w="6350" cap="flat" cmpd="sng" algn="ctr">
+                      <a:solidFill>
+                        <a:srgbClr val="DDDDDD"/>
+                      </a:solidFill>
+                      <a:prstDash val="solid"/>
+                      <a:round/>
+                      <a:headEnd type="none" w="med" len="med"/>
+                      <a:tailEnd type="none" w="med" len="med"/>
+                    </a:lnR>
+                    <a:lnT w="6350" cap="flat" cmpd="sng" algn="ctr">
+                      <a:solidFill>
+                        <a:srgbClr val="DDDDDD"/>
+                      </a:solidFill>
+                      <a:prstDash val="solid"/>
+                      <a:round/>
+                      <a:headEnd type="none" w="med" len="med"/>
+                      <a:tailEnd type="none" w="med" len="med"/>
+                    </a:lnT>
+                    <a:lnB w="6350" cap="flat" cmpd="sng" algn="ctr">
+                      <a:solidFill>
+                        <a:srgbClr val="DDDDDD"/>
+                      </a:solidFill>
+                      <a:prstDash val="solid"/>
+                      <a:round/>
+                      <a:headEnd type="none" w="med" len="med"/>
+                      <a:tailEnd type="none" w="med" len="med"/>
+                    </a:lnB>
+                  </a:tcPr>
+                </a:tc>
+                <a:tc>
+                  <a:txBody>
+                    <a:bodyPr/>
+                    <a:lstStyle/>
+                    <a:p>
+                      <a:pPr algn="ctr" indent="0" marL="0">
+                        <a:buNone/>
+                      </a:pPr>
+                      <a:r>
+                        <a:rPr lang="en-US" sz="1400" dirty="0">
+                          <a:solidFill>
+                            <a:srgbClr val="000000"/>
+                          </a:solidFill>
+                        </a:rPr>
+                        <a:t>0.050</a:t>
+                      </a:r>
+                      <a:endParaRPr lang="en-US" sz="1400" dirty="0"/>
+                    </a:p>
+                  </a:txBody>
+                  <a:tcPr marL="91440" marR="91440" marT="45720" marB="45720">
+                    <a:lnL w="6350" cap="flat" cmpd="sng" algn="ctr">
+                      <a:solidFill>
+                        <a:srgbClr val="DDDDDD"/>
+                      </a:solidFill>
+                      <a:prstDash val="solid"/>
+                      <a:round/>
+                      <a:headEnd type="none" w="med" len="med"/>
+                      <a:tailEnd type="none" w="med" len="med"/>
+                    </a:lnL>
+                    <a:lnR w="6350" cap="flat" cmpd="sng" algn="ctr">
+                      <a:solidFill>
+                        <a:srgbClr val="DDDDDD"/>
+                      </a:solidFill>
+                      <a:prstDash val="solid"/>
+                      <a:round/>
+                      <a:headEnd type="none" w="med" len="med"/>
+                      <a:tailEnd type="none" w="med" len="med"/>
+                    </a:lnR>
+                    <a:lnT w="6350" cap="flat" cmpd="sng" algn="ctr">
+                      <a:solidFill>
+                        <a:srgbClr val="DDDDDD"/>
+                      </a:solidFill>
+                      <a:prstDash val="solid"/>
+                      <a:round/>
+                      <a:headEnd type="none" w="med" len="med"/>
+                      <a:tailEnd type="none" w="med" len="med"/>
+                    </a:lnT>
+                    <a:lnB w="6350" cap="flat" cmpd="sng" algn="ctr">
+                      <a:solidFill>
+                        <a:srgbClr val="DDDDDD"/>
+                      </a:solidFill>
+                      <a:prstDash val="solid"/>
+                      <a:round/>
+                      <a:headEnd type="none" w="med" len="med"/>
+                      <a:tailEnd type="none" w="med" len="med"/>
+                    </a:lnB>
+                  </a:tcPr>
+                </a:tc>
+                <a:tc>
+                  <a:txBody>
+                    <a:bodyPr/>
+                    <a:lstStyle/>
+                    <a:p>
+                      <a:pPr algn="ctr" indent="0" marL="0">
+                        <a:buNone/>
+                      </a:pPr>
+                      <a:r>
+                        <a:rPr lang="en-US" sz="1400" dirty="0">
                           <a:solidFill>
                             <a:srgbClr val="000000"/>
                           </a:solidFill>
                         </a:rPr>
                         <a:t>1.29 (LARGE)</a:t>
                       </a:r>
-                      <a:endParaRPr lang="en-US" sz="1000" dirty="0"/>
+                      <a:endParaRPr lang="en-US" sz="1400" dirty="0"/>
+                    </a:p>
+                  </a:txBody>
+                  <a:tcPr marL="91440" marR="91440" marT="45720" marB="45720">
+                    <a:lnL w="6350" cap="flat" cmpd="sng" algn="ctr">
+                      <a:solidFill>
+                        <a:srgbClr val="DDDDDD"/>
+                      </a:solidFill>
+                      <a:prstDash val="solid"/>
+                      <a:round/>
+                      <a:headEnd type="none" w="med" len="med"/>
+                      <a:tailEnd type="none" w="med" len="med"/>
+                    </a:lnL>
+                    <a:lnR w="6350" cap="flat" cmpd="sng" algn="ctr">
+                      <a:solidFill>
+                        <a:srgbClr val="DDDDDD"/>
+                      </a:solidFill>
+                      <a:prstDash val="solid"/>
+                      <a:round/>
+                      <a:headEnd type="none" w="med" len="med"/>
+                      <a:tailEnd type="none" w="med" len="med"/>
+                    </a:lnR>
+                    <a:lnT w="6350" cap="flat" cmpd="sng" algn="ctr">
+                      <a:solidFill>
+                        <a:srgbClr val="DDDDDD"/>
+                      </a:solidFill>
+                      <a:prstDash val="solid"/>
+                      <a:round/>
+                      <a:headEnd type="none" w="med" len="med"/>
+                      <a:tailEnd type="none" w="med" len="med"/>
+                    </a:lnT>
+                    <a:lnB w="6350" cap="flat" cmpd="sng" algn="ctr">
+                      <a:solidFill>
+                        <a:srgbClr val="DDDDDD"/>
+                      </a:solidFill>
+                      <a:prstDash val="solid"/>
+                      <a:round/>
+                      <a:headEnd type="none" w="med" len="med"/>
+                      <a:tailEnd type="none" w="med" len="med"/>
+                    </a:lnB>
+                  </a:tcPr>
+                </a:tc>
+                <a:tc>
+                  <a:txBody>
+                    <a:bodyPr/>
+                    <a:lstStyle/>
+                    <a:p>
+                      <a:pPr algn="ctr" indent="0" marL="0">
+                        <a:buNone/>
+                      </a:pPr>
+                      <a:r>
+                        <a:rPr lang="en-US" sz="1400" dirty="0">
+                          <a:solidFill>
+                            <a:srgbClr val="000000"/>
+                          </a:solidFill>
+                        </a:rPr>
+                        <a:t>23.0%</a:t>
+                      </a:r>
+                      <a:endParaRPr lang="en-US" sz="1400" dirty="0"/>
                     </a:p>
                   </a:txBody>
                   <a:tcPr marL="91440" marR="91440" marT="45720" marB="45720">
@@ -4493,6 +7087,106 @@
           </a:graphicData>
         </a:graphic>
       </p:graphicFrame>
+      <p:sp>
+        <p:nvSpPr>
+          <p:cNvPr id="5" name="Text 2"/>
+          <p:cNvSpPr/>
+          <p:nvPr/>
+        </p:nvSpPr>
+        <p:spPr>
+          <a:xfrm>
+            <a:off x="457200" y="4114800"/>
+            <a:ext cx="10972800" cy="731520"/>
+          </a:xfrm>
+          <a:prstGeom prst="rect">
+            <a:avLst/>
+          </a:prstGeom>
+          <a:noFill/>
+          <a:ln/>
+        </p:spPr>
+        <p:txBody>
+          <a:bodyPr wrap="square" rtlCol="0" anchor="ctr"/>
+          <a:lstStyle/>
+          <a:p>
+            <a:pPr algn="ctr" indent="0" marL="0">
+              <a:buNone/>
+            </a:pPr>
+            <a:r>
+              <a:rPr lang="en-US" sz="1400" b="1" dirty="0">
+                <a:solidFill>
+                  <a:srgbClr val="1B5E3B"/>
+                </a:solidFill>
+              </a:rPr>
+              <a:t>All 4 measure the first formant (F1) — the first resonance of the vocal tract</a:t>
+            </a:r>
+            <a:endParaRPr lang="en-US" sz="1400" dirty="0"/>
+          </a:p>
+          <a:p>
+            <a:pPr algn="ctr" indent="0" marL="0">
+              <a:buNone/>
+            </a:pPr>
+            <a:r>
+              <a:rPr lang="en-US" sz="1400" dirty="0">
+                <a:solidFill>
+                  <a:srgbClr val="1B5E3B"/>
+                </a:solidFill>
+              </a:rPr>
+              <a:t>Real speech has WIDER, HIGHER, MORE VARIABLE F1 resonances than fake speech</a:t>
+            </a:r>
+            <a:endParaRPr lang="en-US" sz="1400" dirty="0"/>
+          </a:p>
+        </p:txBody>
+      </p:sp>
+      <p:sp>
+        <p:nvSpPr>
+          <p:cNvPr id="6" name="Text 3"/>
+          <p:cNvSpPr/>
+          <p:nvPr/>
+        </p:nvSpPr>
+        <p:spPr>
+          <a:xfrm>
+            <a:off x="457200" y="5029200"/>
+            <a:ext cx="10972800" cy="640080"/>
+          </a:xfrm>
+          <a:prstGeom prst="rect">
+            <a:avLst/>
+          </a:prstGeom>
+          <a:noFill/>
+          <a:ln/>
+        </p:spPr>
+        <p:txBody>
+          <a:bodyPr wrap="square" rtlCol="0" anchor="ctr"/>
+          <a:lstStyle/>
+          <a:p>
+            <a:pPr algn="ctr" indent="0" marL="0">
+              <a:buNone/>
+            </a:pPr>
+            <a:r>
+              <a:rPr lang="en-US" sz="1200" dirty="0">
+                <a:solidFill>
+                  <a:srgbClr val="333333"/>
+                </a:solidFill>
+              </a:rPr>
+              <a:t>Kruskal-Wallis test across 6 attack types: all 4 features differ significantly (H &gt; 10,000, p ≈ 0)</a:t>
+            </a:r>
+            <a:endParaRPr lang="en-US" sz="1200" dirty="0"/>
+          </a:p>
+          <a:p>
+            <a:pPr algn="ctr" indent="0" marL="0">
+              <a:buNone/>
+            </a:pPr>
+            <a:r>
+              <a:rPr lang="en-US" sz="1200" b="1" dirty="0">
+                <a:solidFill>
+                  <a:srgbClr val="1B5E3B"/>
+                </a:solidFill>
+              </a:rPr>
+              <a:t>→ These features detect MANY types of fakes, not just one specific system</a:t>
+            </a:r>
+            <a:endParaRPr lang="en-US" sz="1200" dirty="0"/>
+          </a:p>
+        </p:txBody>
+      </p:sp>
     </p:spTree>
   </p:cSld>
   <p:clrMapOvr>
@@ -4548,7 +7242,7 @@
                   <a:srgbClr val="1B5E3B"/>
                 </a:solidFill>
               </a:rPr>
-              <a:t>STEP 4</a:t>
+              <a:t>STEP 3</a:t>
             </a:r>
             <a:endParaRPr lang="en-US" sz="1100" dirty="0"/>
           </a:p>
@@ -4579,7 +7273,7 @@
               <a:buNone/>
             </a:pPr>
             <a:r>
-              <a:rPr lang="en-US" sz="2800" b="1" dirty="0">
+              <a:rPr lang="en-US" sz="3200" b="1" dirty="0">
                 <a:solidFill>
                   <a:srgbClr val="1B5E3B"/>
                 </a:solidFill>
@@ -4587,390 +7281,15 @@
                 <a:ea typeface="Georgia" pitchFamily="34" charset="-122"/>
                 <a:cs typeface="Georgia" pitchFamily="34" charset="-120"/>
               </a:rPr>
-              <a:t>Why Formants Differ + Codec Survival Test</a:t>
-            </a:r>
-            <a:endParaRPr lang="en-US" sz="2800" dirty="0"/>
-          </a:p>
-        </p:txBody>
-      </p:sp>
-      <p:sp>
-        <p:nvSpPr>
-          <p:cNvPr id="4" name="Shape 2"/>
-          <p:cNvSpPr/>
-          <p:nvPr/>
-        </p:nvSpPr>
-        <p:spPr>
-          <a:xfrm>
-            <a:off x="274320" y="914400"/>
-            <a:ext cx="3657600" cy="2011680"/>
-          </a:xfrm>
-          <a:prstGeom prst="roundRect">
-            <a:avLst>
-              <a:gd name="adj" fmla="val 4545"/>
-            </a:avLst>
-          </a:prstGeom>
-          <a:solidFill>
-            <a:srgbClr val="E8F5E9"/>
-          </a:solidFill>
-          <a:ln/>
-        </p:spPr>
-      </p:sp>
-      <p:sp>
-        <p:nvSpPr>
-          <p:cNvPr id="5" name="Text 3"/>
-          <p:cNvSpPr/>
-          <p:nvPr/>
-        </p:nvSpPr>
-        <p:spPr>
-          <a:xfrm>
-            <a:off x="457200" y="960120"/>
-            <a:ext cx="3291840" cy="274320"/>
-          </a:xfrm>
-          <a:prstGeom prst="rect">
-            <a:avLst/>
-          </a:prstGeom>
-          <a:noFill/>
-          <a:ln/>
-        </p:spPr>
-        <p:txBody>
-          <a:bodyPr wrap="square" rtlCol="0" anchor="ctr"/>
-          <a:lstStyle/>
-          <a:p>
-            <a:pPr indent="0" marL="0">
-              <a:buNone/>
-            </a:pPr>
-            <a:r>
-              <a:rPr lang="en-US" sz="1400" b="1" dirty="0">
-                <a:solidFill>
-                  <a:srgbClr val="1B5E3B"/>
-                </a:solidFill>
-              </a:rPr>
-              <a:t>Real Speech</a:t>
-            </a:r>
-            <a:endParaRPr lang="en-US" sz="1400" dirty="0"/>
-          </a:p>
-        </p:txBody>
-      </p:sp>
-      <p:sp>
-        <p:nvSpPr>
-          <p:cNvPr id="6" name="Text 4"/>
-          <p:cNvSpPr/>
-          <p:nvPr/>
-        </p:nvSpPr>
-        <p:spPr>
-          <a:xfrm>
-            <a:off x="457200" y="1280160"/>
-            <a:ext cx="3291840" cy="1371600"/>
-          </a:xfrm>
-          <a:prstGeom prst="rect">
-            <a:avLst/>
-          </a:prstGeom>
-          <a:noFill/>
-          <a:ln/>
-        </p:spPr>
-        <p:txBody>
-          <a:bodyPr wrap="square" rtlCol="0" anchor="ctr"/>
-          <a:lstStyle/>
-          <a:p>
-            <a:pPr marL="342900" indent="-342900">
-              <a:buSzPct val="100000"/>
-              <a:buChar char="•"/>
-            </a:pPr>
-            <a:r>
-              <a:rPr lang="en-US" sz="1100" dirty="0">
-                <a:solidFill>
-                  <a:srgbClr val="333333"/>
-                </a:solidFill>
-              </a:rPr>
-              <a:t>Physical tube (mouth+throat)</a:t>
-            </a:r>
-            <a:endParaRPr lang="en-US" sz="1100" dirty="0"/>
-          </a:p>
-          <a:p>
-            <a:pPr marL="342900" indent="-342900">
-              <a:buSzPct val="100000"/>
-              <a:buChar char="•"/>
-            </a:pPr>
-            <a:r>
-              <a:rPr lang="en-US" sz="1100" dirty="0">
-                <a:solidFill>
-                  <a:srgbClr val="333333"/>
-                </a:solidFill>
-              </a:rPr>
-              <a:t>Energy absorbed → wide resonances</a:t>
-            </a:r>
-            <a:endParaRPr lang="en-US" sz="1100" dirty="0"/>
-          </a:p>
-          <a:p>
-            <a:pPr marL="342900" indent="-342900">
-              <a:buSzPct val="100000"/>
-              <a:buChar char="•"/>
-            </a:pPr>
-            <a:r>
-              <a:rPr lang="en-US" sz="1100" b="1" dirty="0">
-                <a:solidFill>
-                  <a:srgbClr val="333333"/>
-                </a:solidFill>
-              </a:rPr>
-              <a:t>F1 bandwidth ≈ 515 Hz</a:t>
-            </a:r>
-            <a:endParaRPr lang="en-US" sz="1100" dirty="0"/>
-          </a:p>
-        </p:txBody>
-      </p:sp>
-      <p:sp>
-        <p:nvSpPr>
-          <p:cNvPr id="7" name="Shape 5"/>
-          <p:cNvSpPr/>
-          <p:nvPr/>
-        </p:nvSpPr>
-        <p:spPr>
-          <a:xfrm>
-            <a:off x="4206240" y="914400"/>
-            <a:ext cx="3657600" cy="2011680"/>
-          </a:xfrm>
-          <a:prstGeom prst="roundRect">
-            <a:avLst>
-              <a:gd name="adj" fmla="val 4545"/>
-            </a:avLst>
-          </a:prstGeom>
-          <a:solidFill>
-            <a:srgbClr val="FFEBEE"/>
-          </a:solidFill>
-          <a:ln/>
-        </p:spPr>
-      </p:sp>
-      <p:sp>
-        <p:nvSpPr>
-          <p:cNvPr id="8" name="Text 6"/>
-          <p:cNvSpPr/>
-          <p:nvPr/>
-        </p:nvSpPr>
-        <p:spPr>
-          <a:xfrm>
-            <a:off x="4389120" y="960120"/>
-            <a:ext cx="3291840" cy="274320"/>
-          </a:xfrm>
-          <a:prstGeom prst="rect">
-            <a:avLst/>
-          </a:prstGeom>
-          <a:noFill/>
-          <a:ln/>
-        </p:spPr>
-        <p:txBody>
-          <a:bodyPr wrap="square" rtlCol="0" anchor="ctr"/>
-          <a:lstStyle/>
-          <a:p>
-            <a:pPr indent="0" marL="0">
-              <a:buNone/>
-            </a:pPr>
-            <a:r>
-              <a:rPr lang="en-US" sz="1400" b="1" dirty="0">
-                <a:solidFill>
-                  <a:srgbClr val="C5221F"/>
-                </a:solidFill>
-              </a:rPr>
-              <a:t>Fake Speech</a:t>
-            </a:r>
-            <a:endParaRPr lang="en-US" sz="1400" dirty="0"/>
-          </a:p>
-        </p:txBody>
-      </p:sp>
-      <p:sp>
-        <p:nvSpPr>
-          <p:cNvPr id="9" name="Text 7"/>
-          <p:cNvSpPr/>
-          <p:nvPr/>
-        </p:nvSpPr>
-        <p:spPr>
-          <a:xfrm>
-            <a:off x="4389120" y="1280160"/>
-            <a:ext cx="3291840" cy="1371600"/>
-          </a:xfrm>
-          <a:prstGeom prst="rect">
-            <a:avLst/>
-          </a:prstGeom>
-          <a:noFill/>
-          <a:ln/>
-        </p:spPr>
-        <p:txBody>
-          <a:bodyPr wrap="square" rtlCol="0" anchor="ctr"/>
-          <a:lstStyle/>
-          <a:p>
-            <a:pPr marL="342900" indent="-342900">
-              <a:buSzPct val="100000"/>
-              <a:buChar char="•"/>
-            </a:pPr>
-            <a:r>
-              <a:rPr lang="en-US" sz="1100" dirty="0">
-                <a:solidFill>
-                  <a:srgbClr val="333333"/>
-                </a:solidFill>
-              </a:rPr>
-              <a:t>Neural network generates sound</a:t>
-            </a:r>
-            <a:endParaRPr lang="en-US" sz="1100" dirty="0"/>
-          </a:p>
-          <a:p>
-            <a:pPr marL="342900" indent="-342900">
-              <a:buSzPct val="100000"/>
-              <a:buChar char="•"/>
-            </a:pPr>
-            <a:r>
-              <a:rPr lang="en-US" sz="1100" dirty="0">
-                <a:solidFill>
-                  <a:srgbClr val="333333"/>
-                </a:solidFill>
-              </a:rPr>
-              <a:t>Optimizes average → sharp peaks</a:t>
-            </a:r>
-            <a:endParaRPr lang="en-US" sz="1100" dirty="0"/>
-          </a:p>
-          <a:p>
-            <a:pPr marL="342900" indent="-342900">
-              <a:buSzPct val="100000"/>
-              <a:buChar char="•"/>
-            </a:pPr>
-            <a:r>
-              <a:rPr lang="en-US" sz="1100" b="1" dirty="0">
-                <a:solidFill>
-                  <a:srgbClr val="333333"/>
-                </a:solidFill>
-              </a:rPr>
-              <a:t>F1 bandwidth ≈ 361 Hz</a:t>
-            </a:r>
-            <a:endParaRPr lang="en-US" sz="1100" dirty="0"/>
-          </a:p>
-        </p:txBody>
-      </p:sp>
-      <p:sp>
-        <p:nvSpPr>
-          <p:cNvPr id="10" name="Shape 8"/>
-          <p:cNvSpPr/>
-          <p:nvPr/>
-        </p:nvSpPr>
-        <p:spPr>
-          <a:xfrm>
-            <a:off x="8138160" y="914400"/>
-            <a:ext cx="3749040" cy="2011680"/>
-          </a:xfrm>
-          <a:prstGeom prst="roundRect">
-            <a:avLst>
-              <a:gd name="adj" fmla="val 4545"/>
-            </a:avLst>
-          </a:prstGeom>
-          <a:solidFill>
-            <a:srgbClr val="E8F0FE"/>
-          </a:solidFill>
-          <a:ln/>
-        </p:spPr>
-      </p:sp>
-      <p:sp>
-        <p:nvSpPr>
-          <p:cNvPr id="11" name="Text 9"/>
-          <p:cNvSpPr/>
-          <p:nvPr/>
-        </p:nvSpPr>
-        <p:spPr>
-          <a:xfrm>
-            <a:off x="8321040" y="960120"/>
-            <a:ext cx="3383280" cy="274320"/>
-          </a:xfrm>
-          <a:prstGeom prst="rect">
-            <a:avLst/>
-          </a:prstGeom>
-          <a:noFill/>
-          <a:ln/>
-        </p:spPr>
-        <p:txBody>
-          <a:bodyPr wrap="square" rtlCol="0" anchor="ctr"/>
-          <a:lstStyle/>
-          <a:p>
-            <a:pPr indent="0" marL="0">
-              <a:buNone/>
-            </a:pPr>
-            <a:r>
-              <a:rPr lang="en-US" sz="1400" b="1" dirty="0">
-                <a:solidFill>
-                  <a:srgbClr val="1A73E8"/>
-                </a:solidFill>
-              </a:rPr>
-              <a:t>Why Codecs Preserve</a:t>
-            </a:r>
-            <a:endParaRPr lang="en-US" sz="1400" dirty="0"/>
-          </a:p>
-        </p:txBody>
-      </p:sp>
-      <p:sp>
-        <p:nvSpPr>
-          <p:cNvPr id="12" name="Text 10"/>
-          <p:cNvSpPr/>
-          <p:nvPr/>
-        </p:nvSpPr>
-        <p:spPr>
-          <a:xfrm>
-            <a:off x="8321040" y="1280160"/>
-            <a:ext cx="3383280" cy="1371600"/>
-          </a:xfrm>
-          <a:prstGeom prst="rect">
-            <a:avLst/>
-          </a:prstGeom>
-          <a:noFill/>
-          <a:ln/>
-        </p:spPr>
-        <p:txBody>
-          <a:bodyPr wrap="square" rtlCol="0" anchor="ctr"/>
-          <a:lstStyle/>
-          <a:p>
-            <a:pPr marL="342900" indent="-342900">
-              <a:buSzPct val="100000"/>
-              <a:buChar char="•"/>
-            </a:pPr>
-            <a:r>
-              <a:rPr lang="en-US" sz="1100" dirty="0">
-                <a:solidFill>
-                  <a:srgbClr val="333333"/>
-                </a:solidFill>
-              </a:rPr>
-              <a:t>Must preserve formants for intelligibility</a:t>
-            </a:r>
-            <a:endParaRPr lang="en-US" sz="1100" dirty="0"/>
-          </a:p>
-          <a:p>
-            <a:pPr marL="342900" indent="-342900">
-              <a:buSzPct val="100000"/>
-              <a:buChar char="•"/>
-            </a:pPr>
-            <a:r>
-              <a:rPr lang="en-US" sz="1100" dirty="0">
-                <a:solidFill>
-                  <a:srgbClr val="333333"/>
-                </a:solidFill>
-              </a:rPr>
-              <a:t>G.729 explicitly encodes formants</a:t>
-            </a:r>
-            <a:endParaRPr lang="en-US" sz="1100" dirty="0"/>
-          </a:p>
-          <a:p>
-            <a:pPr marL="342900" indent="-342900">
-              <a:buSzPct val="100000"/>
-              <a:buChar char="•"/>
-            </a:pPr>
-            <a:r>
-              <a:rPr lang="en-US" sz="1100" dirty="0">
-                <a:solidFill>
-                  <a:srgbClr val="333333"/>
-                </a:solidFill>
-              </a:rPr>
-              <a:t>MP3/AAC keep structure &lt; 4 kHz</a:t>
-            </a:r>
-            <a:endParaRPr lang="en-US" sz="1100" dirty="0"/>
+              <a:t>Are the 4 Winners Redundant?</a:t>
+            </a:r>
+            <a:endParaRPr lang="en-US" sz="3200" dirty="0"/>
           </a:p>
         </p:txBody>
       </p:sp>
       <p:pic>
         <p:nvPicPr>
-          <p:cNvPr id="13" name="Image 0" descr="/home/lab2208/Documents/df_detection/docs/presentation_figures/step5_codec_robustness_v2.png">    </p:cNvPr>
+          <p:cNvPr id="4" name="Image 0" descr="/home/lab2208/Documents/df_detection/docs/presentation_figures/step4_correlation_pca_v2.png">    </p:cNvPr>
           <p:cNvPicPr>
             <a:picLocks noChangeAspect="1"/>
           </p:cNvPicPr>
@@ -4984,14 +7303,72 @@
         </p:blipFill>
         <p:spPr>
           <a:xfrm>
-            <a:off x="274320" y="3108960"/>
-            <a:ext cx="11430000" cy="3474720"/>
+            <a:off x="274320" y="1005840"/>
+            <a:ext cx="11430000" cy="5303520"/>
           </a:xfrm>
           <a:prstGeom prst="rect">
             <a:avLst/>
           </a:prstGeom>
         </p:spPr>
       </p:pic>
+      <p:sp>
+        <p:nvSpPr>
+          <p:cNvPr id="5" name="Shape 2"/>
+          <p:cNvSpPr/>
+          <p:nvPr/>
+        </p:nvSpPr>
+        <p:spPr>
+          <a:xfrm>
+            <a:off x="274320" y="6400800"/>
+            <a:ext cx="11430000" cy="274320"/>
+          </a:xfrm>
+          <a:prstGeom prst="roundRect">
+            <a:avLst>
+              <a:gd name="adj" fmla="val 16667"/>
+            </a:avLst>
+          </a:prstGeom>
+          <a:solidFill>
+            <a:srgbClr val="E8F5E9"/>
+          </a:solidFill>
+          <a:ln/>
+        </p:spPr>
+      </p:sp>
+      <p:sp>
+        <p:nvSpPr>
+          <p:cNvPr id="6" name="Text 3"/>
+          <p:cNvSpPr/>
+          <p:nvPr/>
+        </p:nvSpPr>
+        <p:spPr>
+          <a:xfrm>
+            <a:off x="457200" y="6400800"/>
+            <a:ext cx="10972800" cy="274320"/>
+          </a:xfrm>
+          <a:prstGeom prst="rect">
+            <a:avLst/>
+          </a:prstGeom>
+          <a:noFill/>
+          <a:ln/>
+        </p:spPr>
+        <p:txBody>
+          <a:bodyPr wrap="square" rtlCol="0" anchor="ctr"/>
+          <a:lstStyle/>
+          <a:p>
+            <a:pPr algn="ctr" indent="0" marL="0">
+              <a:buNone/>
+            </a:pPr>
+            <a:r>
+              <a:rPr lang="en-US" sz="1200" b="1" dirty="0">
+                <a:solidFill>
+                  <a:srgbClr val="1B5E3B"/>
+                </a:solidFill>
+              </a:rPr>
+              <a:t>Conclusion: ONE signal (F1 formant characteristics) measured 4 different ways. PCA 1 component = 79%.</a:t>
+            </a:r>
+            <a:endParaRPr lang="en-US" sz="1200" dirty="0"/>
+          </a:p>
+        </p:txBody>
+      </p:sp>
     </p:spTree>
   </p:cSld>
   <p:clrMapOvr>
@@ -5047,7 +7424,7 @@
                   <a:srgbClr val="1B5E3B"/>
                 </a:solidFill>
               </a:rPr>
-              <a:t>STEP 5</a:t>
+              <a:t>STEP 4</a:t>
             </a:r>
             <a:endParaRPr lang="en-US" sz="1100" dirty="0"/>
           </a:p>
@@ -5078,7 +7455,7 @@
               <a:buNone/>
             </a:pPr>
             <a:r>
-              <a:rPr lang="en-US" sz="2800" b="1" dirty="0">
+              <a:rPr lang="en-US" sz="3000" b="1" dirty="0">
                 <a:solidFill>
                   <a:srgbClr val="1B5E3B"/>
                 </a:solidFill>
@@ -5086,68 +7463,44 @@
                 <a:ea typeface="Georgia" pitchFamily="34" charset="-122"/>
                 <a:cs typeface="Georgia" pitchFamily="34" charset="-120"/>
               </a:rPr>
-              <a:t>Ablation: Adding Bad Features Destroys Detection</a:t>
-            </a:r>
-            <a:endParaRPr lang="en-US" sz="2800" dirty="0"/>
+              <a:t>Why Do Formants Differ Between Real and Fake?</a:t>
+            </a:r>
+            <a:endParaRPr lang="en-US" sz="3000" dirty="0"/>
           </a:p>
         </p:txBody>
       </p:sp>
-      <p:pic>
-        <p:nvPicPr>
-          <p:cNvPr id="4" name="Image 0" descr="/home/lab2208/Documents/df_detection/docs/presentation_figures/fig10_ablation.png">    </p:cNvPr>
-          <p:cNvPicPr>
-            <a:picLocks noChangeAspect="1"/>
-          </p:cNvPicPr>
+      <p:sp>
+        <p:nvSpPr>
+          <p:cNvPr id="4" name="Shape 2"/>
+          <p:cNvSpPr/>
           <p:nvPr/>
-        </p:nvPicPr>
-        <p:blipFill>
-          <a:blip r:embed="rId1"/>
-          <a:stretch>
-            <a:fillRect/>
-          </a:stretch>
-        </p:blipFill>
+        </p:nvSpPr>
         <p:spPr>
           <a:xfrm>
-            <a:off x="182880" y="914400"/>
-            <a:ext cx="8229600" cy="4754880"/>
-          </a:xfrm>
-          <a:prstGeom prst="rect">
-            <a:avLst/>
-          </a:prstGeom>
-        </p:spPr>
-      </p:pic>
-      <p:sp>
-        <p:nvSpPr>
-          <p:cNvPr id="5" name="Shape 2"/>
-          <p:cNvSpPr/>
-          <p:nvPr/>
-        </p:nvSpPr>
-        <p:spPr>
-          <a:xfrm>
-            <a:off x="8686800" y="914400"/>
-            <a:ext cx="3200400" cy="4754880"/>
+            <a:off x="457200" y="1188720"/>
+            <a:ext cx="5029200" cy="4114800"/>
           </a:xfrm>
           <a:prstGeom prst="roundRect">
             <a:avLst>
-              <a:gd name="adj" fmla="val 2857"/>
+              <a:gd name="adj" fmla="val 3333"/>
             </a:avLst>
           </a:prstGeom>
           <a:solidFill>
-            <a:srgbClr val="F5F5F0"/>
+            <a:srgbClr val="E8F5E9"/>
           </a:solidFill>
           <a:ln/>
         </p:spPr>
       </p:sp>
       <p:sp>
         <p:nvSpPr>
-          <p:cNvPr id="6" name="Text 3"/>
+          <p:cNvPr id="5" name="Text 3"/>
           <p:cNvSpPr/>
           <p:nvPr/>
         </p:nvSpPr>
         <p:spPr>
           <a:xfrm>
-            <a:off x="8869680" y="1005840"/>
-            <a:ext cx="2834640" cy="274320"/>
+            <a:off x="731520" y="1280160"/>
+            <a:ext cx="4572000" cy="365760"/>
           </a:xfrm>
           <a:prstGeom prst="rect">
             <a:avLst/>
@@ -5163,27 +7516,27 @@
               <a:buNone/>
             </a:pPr>
             <a:r>
-              <a:rPr lang="en-US" sz="1600" b="1" dirty="0">
+              <a:rPr lang="en-US" sz="2200" b="1" dirty="0">
                 <a:solidFill>
-                  <a:srgbClr val="C5221F"/>
+                  <a:srgbClr val="1B5E3B"/>
                 </a:solidFill>
               </a:rPr>
-              <a:t>Key Finding</a:t>
-            </a:r>
-            <a:endParaRPr lang="en-US" sz="1600" dirty="0"/>
+              <a:t>Real Speech</a:t>
+            </a:r>
+            <a:endParaRPr lang="en-US" sz="2200" dirty="0"/>
           </a:p>
         </p:txBody>
       </p:sp>
       <p:sp>
         <p:nvSpPr>
-          <p:cNvPr id="7" name="Text 4"/>
+          <p:cNvPr id="6" name="Text 4"/>
           <p:cNvSpPr/>
           <p:nvPr/>
         </p:nvSpPr>
         <p:spPr>
           <a:xfrm>
-            <a:off x="8869680" y="1371600"/>
-            <a:ext cx="2834640" cy="4114800"/>
+            <a:off x="731520" y="1737360"/>
+            <a:ext cx="4572000" cy="3200400"/>
           </a:xfrm>
           <a:prstGeom prst="rect">
             <a:avLst/>
@@ -5195,162 +7548,326 @@
           <a:bodyPr wrap="square" rtlCol="0" anchor="ctr"/>
           <a:lstStyle/>
           <a:p>
-            <a:pPr indent="0" marL="0">
-              <a:buNone/>
-            </a:pPr>
-            <a:r>
-              <a:rPr lang="en-US" sz="1100" b="1" dirty="0">
+            <a:pPr marL="342900" indent="-342900">
+              <a:buSzPct val="100000"/>
+              <a:buChar char="•"/>
+            </a:pPr>
+            <a:r>
+              <a:rPr lang="en-US" sz="1500" dirty="0">
                 <a:solidFill>
                   <a:srgbClr val="333333"/>
                 </a:solidFill>
               </a:rPr>
-              <a:t>Left (green):</a:t>
-            </a:r>
-            <a:endParaRPr lang="en-US" sz="1100" dirty="0"/>
+              <a:t>Your mouth and throat form a tube</a:t>
+            </a:r>
+            <a:endParaRPr lang="en-US" sz="1500" dirty="0"/>
           </a:p>
           <a:p>
             <a:pPr indent="0" marL="0">
               <a:buNone/>
             </a:pPr>
-            <a:r>
-              <a:rPr lang="en-US" sz="1100" dirty="0">
+            <a:endParaRPr lang="en-US" sz="1500" dirty="0"/>
+          </a:p>
+          <a:p>
+            <a:pPr marL="342900" indent="-342900">
+              <a:buSzPct val="100000"/>
+              <a:buChar char="•"/>
+            </a:pPr>
+            <a:r>
+              <a:rPr lang="en-US" sz="1500" dirty="0">
                 <a:solidFill>
                   <a:srgbClr val="333333"/>
                 </a:solidFill>
               </a:rPr>
-              <a:t>Formants/Prosody alone</a:t>
-            </a:r>
-            <a:endParaRPr lang="en-US" sz="1100" dirty="0"/>
+              <a:t>This tube has resonances (formants)</a:t>
+            </a:r>
+            <a:endParaRPr lang="en-US" sz="1500" dirty="0"/>
           </a:p>
           <a:p>
             <a:pPr indent="0" marL="0">
               <a:buNone/>
             </a:pPr>
-            <a:r>
-              <a:rPr lang="en-US" sz="1100" dirty="0">
+            <a:endParaRPr lang="en-US" sz="1500" dirty="0"/>
+          </a:p>
+          <a:p>
+            <a:pPr marL="342900" indent="-342900">
+              <a:buSzPct val="100000"/>
+              <a:buChar char="•"/>
+            </a:pPr>
+            <a:r>
+              <a:rPr lang="en-US" sz="1500" dirty="0">
                 <a:solidFill>
                   <a:srgbClr val="333333"/>
                 </a:solidFill>
               </a:rPr>
-              <a:t>→ 21-29% after codecs</a:t>
-            </a:r>
-            <a:endParaRPr lang="en-US" sz="1100" dirty="0"/>
+              <a:t>The tube absorbs energy</a:t>
+            </a:r>
+            <a:endParaRPr lang="en-US" sz="1500" dirty="0"/>
           </a:p>
           <a:p>
             <a:pPr indent="0" marL="0">
               <a:buNone/>
             </a:pPr>
-            <a:endParaRPr lang="en-US" sz="1100" dirty="0"/>
-          </a:p>
-          <a:p>
-            <a:pPr indent="0" marL="0">
-              <a:buNone/>
-            </a:pPr>
-            <a:r>
-              <a:rPr lang="en-US" sz="1100" b="1" dirty="0">
+            <a:r>
+              <a:rPr lang="en-US" sz="1500" b="1" dirty="0">
                 <a:solidFill>
                   <a:srgbClr val="333333"/>
                 </a:solidFill>
               </a:rPr>
-              <a:t>Right (red):</a:t>
-            </a:r>
-            <a:endParaRPr lang="en-US" sz="1100" dirty="0"/>
+              <a:t>→ wide resonances (515 Hz)</a:t>
+            </a:r>
+            <a:endParaRPr lang="en-US" sz="1500" dirty="0"/>
           </a:p>
           <a:p>
             <a:pPr indent="0" marL="0">
               <a:buNone/>
             </a:pPr>
-            <a:r>
-              <a:rPr lang="en-US" sz="1100" dirty="0">
+            <a:endParaRPr lang="en-US" sz="1500" dirty="0"/>
+          </a:p>
+          <a:p>
+            <a:pPr marL="342900" indent="-342900">
+              <a:buSzPct val="100000"/>
+              <a:buChar char="•"/>
+            </a:pPr>
+            <a:r>
+              <a:rPr lang="en-US" sz="1500" dirty="0">
                 <a:solidFill>
                   <a:srgbClr val="333333"/>
                 </a:solidFill>
               </a:rPr>
-              <a:t>PNCC or LFCC added</a:t>
-            </a:r>
-            <a:endParaRPr lang="en-US" sz="1100" dirty="0"/>
-          </a:p>
+              <a:t>High natural variation</a:t>
+            </a:r>
+            <a:endParaRPr lang="en-US" sz="1500" dirty="0"/>
+          </a:p>
+        </p:txBody>
+      </p:sp>
+      <p:sp>
+        <p:nvSpPr>
+          <p:cNvPr id="7" name="Shape 5"/>
+          <p:cNvSpPr/>
+          <p:nvPr/>
+        </p:nvSpPr>
+        <p:spPr>
+          <a:xfrm>
+            <a:off x="6217920" y="1188720"/>
+            <a:ext cx="5029200" cy="4114800"/>
+          </a:xfrm>
+          <a:prstGeom prst="roundRect">
+            <a:avLst>
+              <a:gd name="adj" fmla="val 3333"/>
+            </a:avLst>
+          </a:prstGeom>
+          <a:solidFill>
+            <a:srgbClr val="FFEBEE"/>
+          </a:solidFill>
+          <a:ln/>
+        </p:spPr>
+      </p:sp>
+      <p:sp>
+        <p:nvSpPr>
+          <p:cNvPr id="8" name="Text 6"/>
+          <p:cNvSpPr/>
+          <p:nvPr/>
+        </p:nvSpPr>
+        <p:spPr>
+          <a:xfrm>
+            <a:off x="6492240" y="1280160"/>
+            <a:ext cx="4572000" cy="365760"/>
+          </a:xfrm>
+          <a:prstGeom prst="rect">
+            <a:avLst/>
+          </a:prstGeom>
+          <a:noFill/>
+          <a:ln/>
+        </p:spPr>
+        <p:txBody>
+          <a:bodyPr wrap="square" rtlCol="0" anchor="ctr"/>
+          <a:lstStyle/>
           <a:p>
             <a:pPr indent="0" marL="0">
               <a:buNone/>
             </a:pPr>
             <a:r>
-              <a:rPr lang="en-US" sz="1100" b="1" dirty="0">
+              <a:rPr lang="en-US" sz="2200" b="1" dirty="0">
                 <a:solidFill>
                   <a:srgbClr val="C5221F"/>
                 </a:solidFill>
               </a:rPr>
-              <a:t>→ 42-55% COLLAPSED</a:t>
-            </a:r>
-            <a:endParaRPr lang="en-US" sz="1100" dirty="0"/>
-          </a:p>
-          <a:p>
-            <a:pPr indent="0" marL="0">
-              <a:buNone/>
-            </a:pPr>
-            <a:endParaRPr lang="en-US" sz="1100" dirty="0"/>
-          </a:p>
-          <a:p>
-            <a:pPr indent="0" marL="0">
-              <a:buNone/>
-            </a:pPr>
-            <a:r>
-              <a:rPr lang="en-US" sz="1100" b="1" dirty="0">
+              <a:t>Fake Speech</a:t>
+            </a:r>
+            <a:endParaRPr lang="en-US" sz="2200" dirty="0"/>
+          </a:p>
+        </p:txBody>
+      </p:sp>
+      <p:sp>
+        <p:nvSpPr>
+          <p:cNvPr id="9" name="Text 7"/>
+          <p:cNvSpPr/>
+          <p:nvPr/>
+        </p:nvSpPr>
+        <p:spPr>
+          <a:xfrm>
+            <a:off x="6492240" y="1737360"/>
+            <a:ext cx="4572000" cy="3200400"/>
+          </a:xfrm>
+          <a:prstGeom prst="rect">
+            <a:avLst/>
+          </a:prstGeom>
+          <a:noFill/>
+          <a:ln/>
+        </p:spPr>
+        <p:txBody>
+          <a:bodyPr wrap="square" rtlCol="0" anchor="ctr"/>
+          <a:lstStyle/>
+          <a:p>
+            <a:pPr marL="342900" indent="-342900">
+              <a:buSzPct val="100000"/>
+              <a:buChar char="•"/>
+            </a:pPr>
+            <a:r>
+              <a:rPr lang="en-US" sz="1500" dirty="0">
                 <a:solidFill>
                   <a:srgbClr val="333333"/>
                 </a:solidFill>
               </a:rPr>
-              <a:t>PNCC+Formants = 50%</a:t>
-            </a:r>
-            <a:endParaRPr lang="en-US" sz="1100" dirty="0"/>
+              <a:t>A neural network generates sound</a:t>
+            </a:r>
+            <a:endParaRPr lang="en-US" sz="1500" dirty="0"/>
           </a:p>
           <a:p>
             <a:pPr indent="0" marL="0">
               <a:buNone/>
             </a:pPr>
-            <a:r>
-              <a:rPr lang="en-US" sz="1100" dirty="0">
+            <a:endParaRPr lang="en-US" sz="1500" dirty="0"/>
+          </a:p>
+          <a:p>
+            <a:pPr marL="342900" indent="-342900">
+              <a:buSzPct val="100000"/>
+              <a:buChar char="•"/>
+            </a:pPr>
+            <a:r>
+              <a:rPr lang="en-US" sz="1500" dirty="0">
                 <a:solidFill>
                   <a:srgbClr val="333333"/>
                 </a:solidFill>
               </a:rPr>
-              <a:t>Formants alone = 29%</a:t>
-            </a:r>
-            <a:endParaRPr lang="en-US" sz="1100" dirty="0"/>
+              <a:t>It optimizes for average shape</a:t>
+            </a:r>
+            <a:endParaRPr lang="en-US" sz="1500" dirty="0"/>
           </a:p>
           <a:p>
             <a:pPr indent="0" marL="0">
               <a:buNone/>
             </a:pPr>
-            <a:endParaRPr lang="en-US" sz="1100" dirty="0"/>
-          </a:p>
-          <a:p>
-            <a:pPr indent="0" marL="0">
-              <a:buNone/>
-            </a:pPr>
-            <a:r>
-              <a:rPr lang="en-US" sz="1100" i="1" dirty="0">
+            <a:endParaRPr lang="en-US" sz="1500" dirty="0"/>
+          </a:p>
+          <a:p>
+            <a:pPr marL="342900" indent="-342900">
+              <a:buSzPct val="100000"/>
+              <a:buChar char="•"/>
+            </a:pPr>
+            <a:r>
+              <a:rPr lang="en-US" sz="1500" dirty="0">
                 <a:solidFill>
                   <a:srgbClr val="333333"/>
                 </a:solidFill>
               </a:rPr>
-              <a:t>Adding fragile features</a:t>
-            </a:r>
-            <a:endParaRPr lang="en-US" sz="1100" dirty="0"/>
+              <a:t>No physical damping</a:t>
+            </a:r>
+            <a:endParaRPr lang="en-US" sz="1500" dirty="0"/>
           </a:p>
           <a:p>
             <a:pPr indent="0" marL="0">
               <a:buNone/>
             </a:pPr>
             <a:r>
-              <a:rPr lang="en-US" sz="1100" b="1" dirty="0">
+              <a:rPr lang="en-US" sz="1500" b="1" dirty="0">
                 <a:solidFill>
-                  <a:srgbClr val="C5221F"/>
+                  <a:srgbClr val="333333"/>
                 </a:solidFill>
               </a:rPr>
-              <a:t>DESTROYS the system.</a:t>
-            </a:r>
-            <a:endParaRPr lang="en-US" sz="1100" dirty="0"/>
+              <a:t>→ sharp, narrow resonances (361 Hz)</a:t>
+            </a:r>
+            <a:endParaRPr lang="en-US" sz="1500" dirty="0"/>
+          </a:p>
+          <a:p>
+            <a:pPr indent="0" marL="0">
+              <a:buNone/>
+            </a:pPr>
+            <a:endParaRPr lang="en-US" sz="1500" dirty="0"/>
+          </a:p>
+          <a:p>
+            <a:pPr marL="342900" indent="-342900">
+              <a:buSzPct val="100000"/>
+              <a:buChar char="•"/>
+            </a:pPr>
+            <a:r>
+              <a:rPr lang="en-US" sz="1500" dirty="0">
+                <a:solidFill>
+                  <a:srgbClr val="333333"/>
+                </a:solidFill>
+              </a:rPr>
+              <a:t>Over-smoothed, less variation</a:t>
+            </a:r>
+            <a:endParaRPr lang="en-US" sz="1500" dirty="0"/>
+          </a:p>
+        </p:txBody>
+      </p:sp>
+      <p:sp>
+        <p:nvSpPr>
+          <p:cNvPr id="10" name="Shape 8"/>
+          <p:cNvSpPr/>
+          <p:nvPr/>
+        </p:nvSpPr>
+        <p:spPr>
+          <a:xfrm>
+            <a:off x="457200" y="5577840"/>
+            <a:ext cx="10972800" cy="914400"/>
+          </a:xfrm>
+          <a:prstGeom prst="roundRect">
+            <a:avLst>
+              <a:gd name="adj" fmla="val 10000"/>
+            </a:avLst>
+          </a:prstGeom>
+          <a:solidFill>
+            <a:srgbClr val="E8F0FE"/>
+          </a:solidFill>
+          <a:ln/>
+        </p:spPr>
+      </p:sp>
+      <p:sp>
+        <p:nvSpPr>
+          <p:cNvPr id="11" name="Text 9"/>
+          <p:cNvSpPr/>
+          <p:nvPr/>
+        </p:nvSpPr>
+        <p:spPr>
+          <a:xfrm>
+            <a:off x="640080" y="5669280"/>
+            <a:ext cx="10515600" cy="640080"/>
+          </a:xfrm>
+          <a:prstGeom prst="rect">
+            <a:avLst/>
+          </a:prstGeom>
+          <a:noFill/>
+          <a:ln/>
+        </p:spPr>
+        <p:txBody>
+          <a:bodyPr wrap="square" rtlCol="0" anchor="ctr"/>
+          <a:lstStyle/>
+          <a:p>
+            <a:pPr algn="ctr" indent="0" marL="0">
+              <a:buNone/>
+            </a:pPr>
+            <a:r>
+              <a:rPr lang="en-US" sz="1400" dirty="0">
+                <a:solidFill>
+                  <a:srgbClr val="1A73E8"/>
+                </a:solidFill>
+              </a:rPr>
+              <a:t>Codecs MUST preserve formants — without them, you can't understand speech on the phone. That's why this difference survives compression.</a:t>
+            </a:r>
+            <a:endParaRPr lang="en-US" sz="1400" dirty="0"/>
           </a:p>
         </p:txBody>
       </p:sp>
@@ -5409,7 +7926,7 @@
                   <a:srgbClr val="1B5E3B"/>
                 </a:solidFill>
               </a:rPr>
-              <a:t>STEP 6</a:t>
+              <a:t>STEP 4</a:t>
             </a:r>
             <a:endParaRPr lang="en-US" sz="1100" dirty="0"/>
           </a:p>
@@ -5440,7 +7957,7 @@
               <a:buNone/>
             </a:pPr>
             <a:r>
-              <a:rPr lang="en-US" sz="3200" b="1" dirty="0">
+              <a:rPr lang="en-US" sz="3000" b="1" dirty="0">
                 <a:solidFill>
                   <a:srgbClr val="1B5E3B"/>
                 </a:solidFill>
@@ -5448,15 +7965,15 @@
                 <a:ea typeface="Georgia" pitchFamily="34" charset="-122"/>
                 <a:cs typeface="Georgia" pitchFamily="34" charset="-120"/>
               </a:rPr>
-              <a:t>Classifier Results</a:t>
-            </a:r>
-            <a:endParaRPr lang="en-US" sz="3200" dirty="0"/>
+              <a:t>Paired Codec Test: Does the Signal Survive?</a:t>
+            </a:r>
+            <a:endParaRPr lang="en-US" sz="3000" dirty="0"/>
           </a:p>
         </p:txBody>
       </p:sp>
       <p:pic>
         <p:nvPicPr>
-          <p:cNvPr id="4" name="Image 0" descr="/home/lab2208/Documents/df_detection/docs/presentation_figures/step6_classifiers_v2.png">    </p:cNvPr>
+          <p:cNvPr id="4" name="Image 0" descr="/home/lab2208/Documents/df_detection/docs/presentation_figures/step5_codec_robustness_v2.png">    </p:cNvPr>
           <p:cNvPicPr>
             <a:picLocks noChangeAspect="1"/>
           </p:cNvPicPr>
@@ -5470,7 +7987,7 @@
         </p:blipFill>
         <p:spPr>
           <a:xfrm>
-            <a:off x="274320" y="914400"/>
+            <a:off x="274320" y="1005840"/>
             <a:ext cx="11430000" cy="5029200"/>
           </a:xfrm>
           <a:prstGeom prst="rect">
@@ -5486,16 +8003,16 @@
         </p:nvSpPr>
         <p:spPr>
           <a:xfrm>
-            <a:off x="274320" y="6035040"/>
-            <a:ext cx="11430000" cy="548640"/>
+            <a:off x="274320" y="6126480"/>
+            <a:ext cx="11430000" cy="457200"/>
           </a:xfrm>
           <a:prstGeom prst="roundRect">
             <a:avLst>
-              <a:gd name="adj" fmla="val 8333"/>
+              <a:gd name="adj" fmla="val 10000"/>
             </a:avLst>
           </a:prstGeom>
           <a:solidFill>
-            <a:srgbClr val="FFEBEE"/>
+            <a:srgbClr val="F5F5F0"/>
           </a:solidFill>
           <a:ln/>
         </p:spPr>
@@ -5508,8 +8025,8 @@
         </p:nvSpPr>
         <p:spPr>
           <a:xfrm>
-            <a:off x="457200" y="6080760"/>
-            <a:ext cx="10972800" cy="457200"/>
+            <a:off x="457200" y="6144768"/>
+            <a:ext cx="10972800" cy="365760"/>
           </a:xfrm>
           <a:prstGeom prst="rect">
             <a:avLst/>
@@ -5525,14 +8042,14 @@
               <a:buNone/>
             </a:pPr>
             <a:r>
-              <a:rPr lang="en-US" sz="1300" b="1" dirty="0">
+              <a:rPr lang="en-US" sz="1200" b="1" dirty="0">
                 <a:solidFill>
                   <a:srgbClr val="333333"/>
                 </a:solidFill>
               </a:rPr>
-              <a:t>Formants+Prosody: 11% → 21% (graceful)  |  All 36: 9% → 55% (COLLAPSED)  |  F1_bw alone: 18% → 24%</a:t>
-            </a:r>
-            <a:endParaRPr lang="en-US" sz="1300" dirty="0"/>
+              <a:t>150 files × 9 codecs, paired design  |  MP3/AAC: 5-18% of gap (survives)  |  G.711: 69-79% (marginal)</a:t>
+            </a:r>
+            <a:endParaRPr lang="en-US" sz="1200" dirty="0"/>
           </a:p>
         </p:txBody>
       </p:sp>
@@ -5547,13 +8064,6 @@
 <file path=ppt/slides/slide9.xml><?xml version="1.0" encoding="utf-8"?>
 <p:sld xmlns:a="http://schemas.openxmlformats.org/drawingml/2006/main" xmlns:r="http://schemas.openxmlformats.org/officeDocument/2006/relationships" xmlns:p="http://schemas.openxmlformats.org/presentationml/2006/main">
   <p:cSld name="Slide 9">
-    <p:bg>
-      <p:bgPr>
-        <a:solidFill>
-          <a:srgbClr val="1B5E3B"/>
-        </a:solidFill>
-      </p:bgPr>
-    </p:bg>
     <p:spTree>
       <p:nvGrpSpPr>
         <p:cNvPr id="1" name=""/>
@@ -5576,8 +8086,8 @@
         </p:nvSpPr>
         <p:spPr>
           <a:xfrm>
-            <a:off x="731520" y="274320"/>
-            <a:ext cx="10058400" cy="548640"/>
+            <a:off x="457200" y="137160"/>
+            <a:ext cx="1097280" cy="274320"/>
           </a:xfrm>
           <a:prstGeom prst="rect">
             <a:avLst/>
@@ -5593,52 +8103,27 @@
               <a:buNone/>
             </a:pPr>
             <a:r>
-              <a:rPr lang="en-US" sz="3600" b="1" dirty="0">
+              <a:rPr lang="en-US" sz="1100" b="1" dirty="0">
                 <a:solidFill>
-                  <a:srgbClr val="FFFFFF"/>
+                  <a:srgbClr val="1B5E3B"/>
                 </a:solidFill>
-                <a:latin typeface="Georgia" pitchFamily="34" charset="0"/>
-                <a:ea typeface="Georgia" pitchFamily="34" charset="-122"/>
-                <a:cs typeface="Georgia" pitchFamily="34" charset="-120"/>
               </a:rPr>
-              <a:t>Conclusions</a:t>
-            </a:r>
-            <a:endParaRPr lang="en-US" sz="3600" dirty="0"/>
+              <a:t>STEP 5</a:t>
+            </a:r>
+            <a:endParaRPr lang="en-US" sz="1100" dirty="0"/>
           </a:p>
         </p:txBody>
       </p:sp>
       <p:sp>
         <p:nvSpPr>
-          <p:cNvPr id="3" name="Shape 1"/>
+          <p:cNvPr id="3" name="Text 1"/>
           <p:cNvSpPr/>
           <p:nvPr/>
         </p:nvSpPr>
         <p:spPr>
           <a:xfrm>
-            <a:off x="457200" y="914400"/>
-            <a:ext cx="5303520" cy="3657600"/>
-          </a:xfrm>
-          <a:prstGeom prst="roundRect">
-            <a:avLst>
-              <a:gd name="adj" fmla="val 2500"/>
-            </a:avLst>
-          </a:prstGeom>
-          <a:solidFill>
-            <a:srgbClr val="1B7E4B"/>
-          </a:solidFill>
-          <a:ln/>
-        </p:spPr>
-      </p:sp>
-      <p:sp>
-        <p:nvSpPr>
-          <p:cNvPr id="4" name="Text 2"/>
-          <p:cNvSpPr/>
-          <p:nvPr/>
-        </p:nvSpPr>
-        <p:spPr>
-          <a:xfrm>
-            <a:off x="640080" y="960120"/>
-            <a:ext cx="4937760" cy="274320"/>
+            <a:off x="457200" y="365760"/>
+            <a:ext cx="10972800" cy="548640"/>
           </a:xfrm>
           <a:prstGeom prst="rect">
             <a:avLst/>
@@ -5654,27 +8139,76 @@
               <a:buNone/>
             </a:pPr>
             <a:r>
-              <a:rPr lang="en-US" sz="1800" b="1" dirty="0">
+              <a:rPr lang="en-US" sz="2800" b="1" dirty="0">
                 <a:solidFill>
-                  <a:srgbClr val="D4A017"/>
+                  <a:srgbClr val="1B5E3B"/>
                 </a:solidFill>
+                <a:latin typeface="Georgia" pitchFamily="34" charset="0"/>
+                <a:ea typeface="Georgia" pitchFamily="34" charset="-122"/>
+                <a:cs typeface="Georgia" pitchFamily="34" charset="-120"/>
               </a:rPr>
-              <a:t>What We Found</a:t>
-            </a:r>
-            <a:endParaRPr lang="en-US" sz="1800" dirty="0"/>
+              <a:t>Ablation: Adding Bad Features Destroys Detection</a:t>
+            </a:r>
+            <a:endParaRPr lang="en-US" sz="2800" dirty="0"/>
           </a:p>
         </p:txBody>
       </p:sp>
-      <p:sp>
-        <p:nvSpPr>
-          <p:cNvPr id="5" name="Text 3"/>
+      <p:pic>
+        <p:nvPicPr>
+          <p:cNvPr id="4" name="Image 0" descr="/home/lab2208/Documents/df_detection/docs/presentation_figures/fig10_ablation.png">    </p:cNvPr>
+          <p:cNvPicPr>
+            <a:picLocks noChangeAspect="1"/>
+          </p:cNvPicPr>
+          <p:nvPr/>
+        </p:nvPicPr>
+        <p:blipFill>
+          <a:blip r:embed="rId1"/>
+          <a:stretch>
+            <a:fillRect/>
+          </a:stretch>
+        </p:blipFill>
+        <p:spPr>
+          <a:xfrm>
+            <a:off x="182880" y="914400"/>
+            <a:ext cx="8229600" cy="4754880"/>
+          </a:xfrm>
+          <a:prstGeom prst="rect">
+            <a:avLst/>
+          </a:prstGeom>
+        </p:spPr>
+      </p:pic>
+      <p:sp>
+        <p:nvSpPr>
+          <p:cNvPr id="5" name="Shape 2"/>
           <p:cNvSpPr/>
           <p:nvPr/>
         </p:nvSpPr>
         <p:spPr>
           <a:xfrm>
-            <a:off x="640080" y="1280160"/>
-            <a:ext cx="4937760" cy="2926080"/>
+            <a:off x="8686800" y="914400"/>
+            <a:ext cx="3200400" cy="4754880"/>
+          </a:xfrm>
+          <a:prstGeom prst="roundRect">
+            <a:avLst>
+              <a:gd name="adj" fmla="val 2857"/>
+            </a:avLst>
+          </a:prstGeom>
+          <a:solidFill>
+            <a:srgbClr val="F5F5F0"/>
+          </a:solidFill>
+          <a:ln/>
+        </p:spPr>
+      </p:sp>
+      <p:sp>
+        <p:nvSpPr>
+          <p:cNvPr id="6" name="Text 3"/>
+          <p:cNvSpPr/>
+          <p:nvPr/>
+        </p:nvSpPr>
+        <p:spPr>
+          <a:xfrm>
+            <a:off x="8869680" y="1005840"/>
+            <a:ext cx="2834640" cy="274320"/>
           </a:xfrm>
           <a:prstGeom prst="rect">
             <a:avLst/>
@@ -5690,89 +8224,27 @@
               <a:buNone/>
             </a:pPr>
             <a:r>
-              <a:rPr lang="en-US" sz="1200" dirty="0">
+              <a:rPr lang="en-US" sz="1600" b="1" dirty="0">
                 <a:solidFill>
-                  <a:srgbClr val="FFFFFF"/>
+                  <a:srgbClr val="C5221F"/>
                 </a:solidFill>
               </a:rPr>
-              <a:t>1. Out of 36 features, 4 detect deepfakes after compression. All measure F1 formant.</a:t>
-            </a:r>
-            <a:endParaRPr lang="en-US" sz="1200" dirty="0"/>
-          </a:p>
-          <a:p>
-            <a:pPr indent="0" marL="0">
-              <a:buNone/>
-            </a:pPr>
-            <a:endParaRPr lang="en-US" sz="1200" dirty="0"/>
-          </a:p>
-          <a:p>
-            <a:pPr indent="0" marL="0">
-              <a:buNone/>
-            </a:pPr>
-            <a:r>
-              <a:rPr lang="en-US" sz="1200" dirty="0">
-                <a:solidFill>
-                  <a:srgbClr val="FFFFFF"/>
-                </a:solidFill>
-              </a:rPr>
-              <a:t>2. Mann-Whitney (p ≈ 0), Cohen's d (large), Kruskal-Wallis (across attacks), paired codec test (survives MP3/AAC).</a:t>
-            </a:r>
-            <a:endParaRPr lang="en-US" sz="1200" dirty="0"/>
-          </a:p>
-          <a:p>
-            <a:pPr indent="0" marL="0">
-              <a:buNone/>
-            </a:pPr>
-            <a:endParaRPr lang="en-US" sz="1200" dirty="0"/>
-          </a:p>
-          <a:p>
-            <a:pPr indent="0" marL="0">
-              <a:buNone/>
-            </a:pPr>
-            <a:r>
-              <a:rPr lang="en-US" sz="1200" b="1" dirty="0">
-                <a:solidFill>
-                  <a:srgbClr val="FFFFFF"/>
-                </a:solidFill>
-              </a:rPr>
-              <a:t>3. Adding fragile features DESTROYS the detector: 9% lab → 55% codecs.</a:t>
-            </a:r>
-            <a:endParaRPr lang="en-US" sz="1200" dirty="0"/>
+              <a:t>Key Finding</a:t>
+            </a:r>
+            <a:endParaRPr lang="en-US" sz="1600" dirty="0"/>
           </a:p>
         </p:txBody>
       </p:sp>
       <p:sp>
         <p:nvSpPr>
-          <p:cNvPr id="6" name="Shape 4"/>
+          <p:cNvPr id="7" name="Text 4"/>
           <p:cNvSpPr/>
           <p:nvPr/>
         </p:nvSpPr>
         <p:spPr>
           <a:xfrm>
-            <a:off x="6217920" y="914400"/>
-            <a:ext cx="5303520" cy="3657600"/>
-          </a:xfrm>
-          <a:prstGeom prst="roundRect">
-            <a:avLst>
-              <a:gd name="adj" fmla="val 2500"/>
-            </a:avLst>
-          </a:prstGeom>
-          <a:solidFill>
-            <a:srgbClr val="1B7E4B"/>
-          </a:solidFill>
-          <a:ln/>
-        </p:spPr>
-      </p:sp>
-      <p:sp>
-        <p:nvSpPr>
-          <p:cNvPr id="7" name="Text 5"/>
-          <p:cNvSpPr/>
-          <p:nvPr/>
-        </p:nvSpPr>
-        <p:spPr>
-          <a:xfrm>
-            <a:off x="6400800" y="960120"/>
-            <a:ext cx="4937760" cy="274320"/>
+            <a:off x="8869680" y="1371600"/>
+            <a:ext cx="2834640" cy="4114800"/>
           </a:xfrm>
           <a:prstGeom prst="rect">
             <a:avLst/>
@@ -5788,37 +8260,15 @@
               <a:buNone/>
             </a:pPr>
             <a:r>
-              <a:rPr lang="en-US" sz="1800" b="1" dirty="0">
+              <a:rPr lang="en-US" sz="1200" b="1" dirty="0">
                 <a:solidFill>
-                  <a:srgbClr val="FF9999"/>
+                  <a:srgbClr val="333333"/>
                 </a:solidFill>
               </a:rPr>
-              <a:t>Limitations</a:t>
-            </a:r>
-            <a:endParaRPr lang="en-US" sz="1800" dirty="0"/>
-          </a:p>
-        </p:txBody>
-      </p:sp>
-      <p:sp>
-        <p:nvSpPr>
-          <p:cNvPr id="8" name="Text 6"/>
-          <p:cNvSpPr/>
-          <p:nvPr/>
-        </p:nvSpPr>
-        <p:spPr>
-          <a:xfrm>
-            <a:off x="6400800" y="1280160"/>
-            <a:ext cx="4937760" cy="2926080"/>
-          </a:xfrm>
-          <a:prstGeom prst="rect">
-            <a:avLst/>
-          </a:prstGeom>
-          <a:noFill/>
-          <a:ln/>
-        </p:spPr>
-        <p:txBody>
-          <a:bodyPr wrap="square" rtlCol="0" anchor="ctr"/>
-          <a:lstStyle/>
+              <a:t>Left (green):</a:t>
+            </a:r>
+            <a:endParaRPr lang="en-US" sz="1200" dirty="0"/>
+          </a:p>
           <a:p>
             <a:pPr indent="0" marL="0">
               <a:buNone/>
@@ -5826,10 +8276,10 @@
             <a:r>
               <a:rPr lang="en-US" sz="1200" dirty="0">
                 <a:solidFill>
-                  <a:srgbClr val="FFFFFF"/>
+                  <a:srgbClr val="333333"/>
                 </a:solidFill>
               </a:rPr>
-              <a:t>1. 21% error (SOTA neural: 1.9%)</a:t>
+              <a:t>Formants/Prosody alone</a:t>
             </a:r>
             <a:endParaRPr lang="en-US" sz="1200" dirty="0"/>
           </a:p>
@@ -5837,19 +8287,47 @@
             <a:pPr indent="0" marL="0">
               <a:buNone/>
             </a:pPr>
+            <a:r>
+              <a:rPr lang="en-US" sz="1200" dirty="0">
+                <a:solidFill>
+                  <a:srgbClr val="333333"/>
+                </a:solidFill>
+              </a:rPr>
+              <a:t>→ 21-29% after codecs (stable)</a:t>
+            </a:r>
             <a:endParaRPr lang="en-US" sz="1200" dirty="0"/>
           </a:p>
           <a:p>
             <a:pPr indent="0" marL="0">
               <a:buNone/>
             </a:pPr>
+            <a:endParaRPr lang="en-US" sz="1200" dirty="0"/>
+          </a:p>
+          <a:p>
+            <a:pPr indent="0" marL="0">
+              <a:buNone/>
+            </a:pPr>
+            <a:r>
+              <a:rPr lang="en-US" sz="1200" b="1" dirty="0">
+                <a:solidFill>
+                  <a:srgbClr val="333333"/>
+                </a:solidFill>
+              </a:rPr>
+              <a:t>Right (red):</a:t>
+            </a:r>
+            <a:endParaRPr lang="en-US" sz="1200" dirty="0"/>
+          </a:p>
+          <a:p>
+            <a:pPr indent="0" marL="0">
+              <a:buNone/>
+            </a:pPr>
             <a:r>
               <a:rPr lang="en-US" sz="1200" dirty="0">
                 <a:solidFill>
-                  <a:srgbClr val="FFFFFF"/>
+                  <a:srgbClr val="333333"/>
                 </a:solidFill>
               </a:rPr>
-              <a:t>2. 4 features are 91% correlated — one signal</a:t>
+              <a:t>Any set with PNCC or LFCC</a:t>
             </a:r>
             <a:endParaRPr lang="en-US" sz="1200" dirty="0"/>
           </a:p>
@@ -5857,19 +8335,33 @@
             <a:pPr indent="0" marL="0">
               <a:buNone/>
             </a:pPr>
+            <a:r>
+              <a:rPr lang="en-US" sz="1200" b="1" dirty="0">
+                <a:solidFill>
+                  <a:srgbClr val="C5221F"/>
+                </a:solidFill>
+              </a:rPr>
+              <a:t>→ 42-55% COLLAPSED</a:t>
+            </a:r>
             <a:endParaRPr lang="en-US" sz="1200" dirty="0"/>
           </a:p>
           <a:p>
             <a:pPr indent="0" marL="0">
               <a:buNone/>
             </a:pPr>
-            <a:r>
-              <a:rPr lang="en-US" sz="1200" dirty="0">
+            <a:endParaRPr lang="en-US" sz="1200" dirty="0"/>
+          </a:p>
+          <a:p>
+            <a:pPr indent="0" marL="0">
+              <a:buNone/>
+            </a:pPr>
+            <a:r>
+              <a:rPr lang="en-US" sz="1200" i="1" dirty="0">
                 <a:solidFill>
-                  <a:srgbClr val="FFFFFF"/>
+                  <a:srgbClr val="333333"/>
                 </a:solidFill>
               </a:rPr>
-              <a:t>3. Advanced vocoders (A17-A19): error &gt; 48%</a:t>
+              <a:t>Adding fragile features doesn't</a:t>
             </a:r>
             <a:endParaRPr lang="en-US" sz="1200" dirty="0"/>
           </a:p>
@@ -5877,188 +8369,15 @@
             <a:pPr indent="0" marL="0">
               <a:buNone/>
             </a:pPr>
-            <a:endParaRPr lang="en-US" sz="1200" dirty="0"/>
-          </a:p>
-          <a:p>
-            <a:pPr indent="0" marL="0">
-              <a:buNone/>
-            </a:pPr>
-            <a:r>
-              <a:rPr lang="en-US" sz="1200" dirty="0">
+            <a:r>
+              <a:rPr lang="en-US" sz="1200" b="1" dirty="0">
                 <a:solidFill>
-                  <a:srgbClr val="FFFFFF"/>
+                  <a:srgbClr val="C5221F"/>
                 </a:solidFill>
               </a:rPr>
-              <a:t>4. G.711 telephone: 79% of signal lost</a:t>
+              <a:t>just fail — it DESTROYS the system.</a:t>
             </a:r>
             <a:endParaRPr lang="en-US" sz="1200" dirty="0"/>
-          </a:p>
-        </p:txBody>
-      </p:sp>
-      <p:sp>
-        <p:nvSpPr>
-          <p:cNvPr id="9" name="Shape 7"/>
-          <p:cNvSpPr/>
-          <p:nvPr/>
-        </p:nvSpPr>
-        <p:spPr>
-          <a:xfrm>
-            <a:off x="457200" y="4754880"/>
-            <a:ext cx="10972800" cy="1097280"/>
-          </a:xfrm>
-          <a:prstGeom prst="roundRect">
-            <a:avLst>
-              <a:gd name="adj" fmla="val 8333"/>
-            </a:avLst>
-          </a:prstGeom>
-          <a:solidFill>
-            <a:srgbClr val="FFFFFF"/>
-          </a:solidFill>
-          <a:ln/>
-        </p:spPr>
-      </p:sp>
-      <p:sp>
-        <p:nvSpPr>
-          <p:cNvPr id="10" name="Text 8"/>
-          <p:cNvSpPr/>
-          <p:nvPr/>
-        </p:nvSpPr>
-        <p:spPr>
-          <a:xfrm>
-            <a:off x="640080" y="4846320"/>
-            <a:ext cx="10515600" cy="914400"/>
-          </a:xfrm>
-          <a:prstGeom prst="rect">
-            <a:avLst/>
-          </a:prstGeom>
-          <a:noFill/>
-          <a:ln/>
-        </p:spPr>
-        <p:txBody>
-          <a:bodyPr wrap="square" rtlCol="0" anchor="ctr"/>
-          <a:lstStyle/>
-          <a:p>
-            <a:pPr algn="ctr" indent="0" marL="0">
-              <a:buNone/>
-            </a:pPr>
-            <a:r>
-              <a:rPr lang="en-US" sz="1400" dirty="0">
-                <a:solidFill>
-                  <a:srgbClr val="1B5E3B"/>
-                </a:solidFill>
-                <a:latin typeface="Calibri" pitchFamily="34" charset="0"/>
-                <a:ea typeface="Calibri" pitchFamily="34" charset="-122"/>
-                <a:cs typeface="Calibri" pitchFamily="34" charset="-120"/>
-              </a:rPr>
-              <a:t>Real speech has wider formant resonances (515 Hz) than synthetic speech (361 Hz)</a:t>
-            </a:r>
-            <a:endParaRPr lang="en-US" sz="1400" dirty="0"/>
-          </a:p>
-          <a:p>
-            <a:pPr algn="ctr" indent="0" marL="0">
-              <a:buNone/>
-            </a:pPr>
-            <a:r>
-              <a:rPr lang="en-US" sz="1400" dirty="0">
-                <a:solidFill>
-                  <a:srgbClr val="1B5E3B"/>
-                </a:solidFill>
-                <a:latin typeface="Calibri" pitchFamily="34" charset="0"/>
-                <a:ea typeface="Calibri" pitchFamily="34" charset="-122"/>
-                <a:cs typeface="Calibri" pitchFamily="34" charset="-120"/>
-              </a:rPr>
-              <a:t>because physical vocal tracts have damping that voice synthesizers don't model.</a:t>
-            </a:r>
-            <a:endParaRPr lang="en-US" sz="1400" dirty="0"/>
-          </a:p>
-          <a:p>
-            <a:pPr algn="ctr" indent="0" marL="0">
-              <a:buNone/>
-            </a:pPr>
-            <a:r>
-              <a:rPr lang="en-US" sz="1400" dirty="0">
-                <a:solidFill>
-                  <a:srgbClr val="1B5E3B"/>
-                </a:solidFill>
-                <a:latin typeface="Calibri" pitchFamily="34" charset="0"/>
-                <a:ea typeface="Calibri" pitchFamily="34" charset="-122"/>
-                <a:cs typeface="Calibri" pitchFamily="34" charset="-120"/>
-              </a:rPr>
-              <a:t>This difference survives most audio compression methods.</a:t>
-            </a:r>
-            <a:endParaRPr lang="en-US" sz="1400" dirty="0"/>
-          </a:p>
-        </p:txBody>
-      </p:sp>
-      <p:sp>
-        <p:nvSpPr>
-          <p:cNvPr id="11" name="Text 9"/>
-          <p:cNvSpPr/>
-          <p:nvPr/>
-        </p:nvSpPr>
-        <p:spPr>
-          <a:xfrm>
-            <a:off x="457200" y="6126480"/>
-            <a:ext cx="10972800" cy="274320"/>
-          </a:xfrm>
-          <a:prstGeom prst="rect">
-            <a:avLst/>
-          </a:prstGeom>
-          <a:noFill/>
-          <a:ln/>
-        </p:spPr>
-        <p:txBody>
-          <a:bodyPr wrap="square" rtlCol="0" anchor="ctr"/>
-          <a:lstStyle/>
-          <a:p>
-            <a:pPr algn="ctr" indent="0" marL="0">
-              <a:buNone/>
-            </a:pPr>
-            <a:r>
-              <a:rPr lang="en-US" sz="1200" dirty="0">
-                <a:solidFill>
-                  <a:srgbClr val="D4A017"/>
-                </a:solidFill>
-              </a:rPr>
-              <a:t>github.com/Yash-Sukhdeve/stats-audio-deepfake-detection</a:t>
-            </a:r>
-            <a:endParaRPr lang="en-US" sz="1200" dirty="0"/>
-          </a:p>
-        </p:txBody>
-      </p:sp>
-      <p:sp>
-        <p:nvSpPr>
-          <p:cNvPr id="12" name="Text 10"/>
-          <p:cNvSpPr/>
-          <p:nvPr/>
-        </p:nvSpPr>
-        <p:spPr>
-          <a:xfrm>
-            <a:off x="457200" y="6400800"/>
-            <a:ext cx="10972800" cy="274320"/>
-          </a:xfrm>
-          <a:prstGeom prst="rect">
-            <a:avLst/>
-          </a:prstGeom>
-          <a:noFill/>
-          <a:ln/>
-        </p:spPr>
-        <p:txBody>
-          <a:bodyPr wrap="square" rtlCol="0" anchor="ctr"/>
-          <a:lstStyle/>
-          <a:p>
-            <a:pPr algn="ctr" indent="0" marL="0">
-              <a:buNone/>
-            </a:pPr>
-            <a:r>
-              <a:rPr lang="en-US" sz="900" dirty="0">
-                <a:solidFill>
-                  <a:srgbClr val="AAAAAA"/>
-                </a:solidFill>
-              </a:rPr>
-              <a:t>Mann &amp; Whitney (1947) | Cohen (1988) | Benjamini &amp; Hochberg (1995) | Kruskal &amp; Wallis (1952) | Kim &amp; Stern (2016)</a:t>
-            </a:r>
-            <a:endParaRPr lang="en-US" sz="900" dirty="0"/>
           </a:p>
         </p:txBody>
       </p:sp>
